--- a/docs/content/nonparametric_t_tests/nonparametric_t_tests_lecture.pptx
+++ b/docs/content/nonparametric_t_tests/nonparametric_t_tests_lecture.pptx
@@ -32,6 +32,14 @@
     <p:sldId id="280" r:id="rId26"/>
     <p:sldId id="281" r:id="rId27"/>
     <p:sldId id="282" r:id="rId28"/>
+    <p:sldId id="283" r:id="rId29"/>
+    <p:sldId id="284" r:id="rId30"/>
+    <p:sldId id="285" r:id="rId31"/>
+    <p:sldId id="286" r:id="rId32"/>
+    <p:sldId id="287" r:id="rId33"/>
+    <p:sldId id="288" r:id="rId34"/>
+    <p:sldId id="289" r:id="rId35"/>
+    <p:sldId id="290" r:id="rId36"/>
   </p:sldIdLst>
   <p:sldSz cx="9144000" cy="5143500" type="screen16x9"/>
   <p:notesSz cx="6858000" cy="9144000"/>
@@ -3319,7 +3327,7 @@
             </a:pPr>
             <a:r>
               <a:rPr/>
-              <a:t>Non-Parametric T-Tests</a:t>
+              <a:t>Lecture: Non-Parametric T-Tests</a:t>
             </a:r>
           </a:p>
         </p:txBody>
@@ -3410,7 +3418,7 @@
             </a:pPr>
             <a:r>
               <a:rPr/>
-              <a:t>Shapiro-Wilk Test for Normality</a:t>
+              <a:t>Assumptions — Random Sampling</a:t>
             </a:r>
           </a:p>
         </p:txBody>
@@ -3435,148 +3443,64 @@
             </a:pPr>
             <a:r>
               <a:rPr/>
-              <a:t>Basic assumptions of parametric t-tests:</a:t>
+              <a:t>Basic assumptions of parametric t-tests: random sampling, normality, equal variance, no outliers.</a:t>
+            </a:r>
+          </a:p>
+          <a:p>
+            <a:pPr lvl="0" indent="0" marL="0">
+              <a:buNone/>
+            </a:pPr>
+            <a:r>
+              <a:rPr b="1"/>
+              <a:t>Random sampling:</a:t>
             </a:r>
           </a:p>
           <a:p>
             <a:pPr lvl="0"/>
             <a:r>
               <a:rPr/>
-              <a:t>Normality</a:t>
+              <a:t>samples are randomly collected from populations; part of experimental design</a:t>
             </a:r>
           </a:p>
           <a:p>
             <a:pPr lvl="0"/>
             <a:r>
               <a:rPr/>
-              <a:t>equal variance</a:t>
-            </a:r>
-          </a:p>
-          <a:p>
-            <a:pPr lvl="0"/>
-            <a:r>
-              <a:rPr/>
-              <a:t>random sampling</a:t>
-            </a:r>
-          </a:p>
-          <a:p>
-            <a:pPr lvl="0"/>
-            <a:r>
-              <a:rPr/>
-              <a:t>no outliers</a:t>
-            </a:r>
-          </a:p>
-          <a:p>
-            <a:pPr lvl="0"/>
-            <a:r>
-              <a:rPr/>
-              <a:t>Lets do the above for one lake - </a:t>
-            </a:r>
-            <a:r>
-              <a:rPr>
-                <a:latin typeface="Courier"/>
-              </a:rPr>
-              <a:t>NE 12</a:t>
-            </a:r>
-            <a:r>
-              <a:rPr/>
-              <a:t> as if we were going to do a one sample T Test</a:t>
-            </a:r>
-          </a:p>
-          <a:p>
-            <a:pPr lvl="1"/>
-            <a:r>
-              <a:rPr/>
-              <a:t>we need to make a new dataframe with NE 12 data only called </a:t>
-            </a:r>
-            <a:r>
-              <a:rPr>
-                <a:latin typeface="Courier"/>
-              </a:rPr>
-              <a:t>ne12_data</a:t>
-            </a:r>
-          </a:p>
-          <a:p>
-            <a:pPr lvl="1"/>
-            <a:r>
-              <a:rPr/>
-              <a:t>how do you do this?</a:t>
-            </a:r>
-          </a:p>
-          <a:p>
-            <a:pPr lvl="0"/>
-            <a:r>
-              <a:rPr/>
-              <a:t>Normality: Samples from normally distributed population</a:t>
-            </a:r>
-          </a:p>
-          <a:p>
-            <a:pPr lvl="1"/>
-            <a:r>
-              <a:rPr/>
-              <a:t>Graphical tests: histograms, dotplots, boxplots, </a:t>
-            </a:r>
-            <a:r>
-              <a:rPr b="1"/>
-              <a:t>qq-plots</a:t>
-            </a:r>
-          </a:p>
-          <a:p>
-            <a:pPr lvl="1"/>
-            <a:r>
-              <a:rPr/>
-              <a:t>“Formal” tests: </a:t>
-            </a:r>
-            <a:r>
-              <a:rPr b="1"/>
-              <a:t>Shapiro-Wilk test</a:t>
-            </a:r>
-            <a:r>
-              <a:rPr/>
-              <a:t> - sometimes not useful</a:t>
-            </a:r>
-          </a:p>
-          <a:p>
-            <a:pPr lvl="0" indent="0" marL="0">
-              <a:buNone/>
-            </a:pPr>
-            <a:r>
-              <a:rPr/>
-              <a:t>“Null hypothesis is that data is normally distributed”</a:t>
-            </a:r>
-          </a:p>
-        </p:txBody>
-      </p:sp>
-      <p:sp>
-        <p:nvSpPr>
-          <p:cNvPr id="4" name="Content Placeholder 3"/>
-          <p:cNvSpPr>
-            <a:spLocks noGrp="1"/>
-          </p:cNvSpPr>
-          <p:nvPr>
-            <p:ph idx="2" sz="half"/>
-          </p:nvPr>
-        </p:nvSpPr>
-        <p:spPr/>
-        <p:txBody>
-          <a:bodyPr/>
-          <a:lstStyle/>
-          <a:p>
-            <a:pPr lvl="0" indent="0">
-              <a:buNone/>
-            </a:pPr>
-            <a:r>
-              <a:rPr>
-                <a:latin typeface="Courier"/>
-              </a:rPr>
-              <a:t>
-    Shapiro-Wilk normality test
-data:  ne12_data$length_mm
-W = 0.94528, p-value = 1.56e-09</a:t>
-            </a:r>
-          </a:p>
-        </p:txBody>
-      </p:sp>
+              <a:t>necessary for sample → population inference</a:t>
+            </a:r>
+          </a:p>
+        </p:txBody>
+      </p:sp>
+      <p:pic>
+        <p:nvPicPr>
+          <p:cNvPr descr="images/clipboard-2526616735.png" id="0" name="Picture 1"/>
+          <p:cNvPicPr>
+            <a:picLocks noGrp="1" noChangeAspect="1"/>
+          </p:cNvPicPr>
+          <p:nvPr/>
+        </p:nvPicPr>
+        <p:blipFill>
+          <a:blip r:embed="rId2"/>
+          <a:stretch>
+            <a:fillRect/>
+          </a:stretch>
+        </p:blipFill>
+        <p:spPr bwMode="auto">
+          <a:xfrm>
+            <a:off x="6121400" y="1117600"/>
+            <a:ext cx="2781300" cy="3568700"/>
+          </a:xfrm>
+          <a:prstGeom prst="rect">
+            <a:avLst/>
+          </a:prstGeom>
+          <a:noFill/>
+          <a:ln w="9525">
+            <a:noFill/>
+            <a:headEnd/>
+            <a:tailEnd/>
+          </a:ln>
+        </p:spPr>
+      </p:pic>
     </p:spTree>
   </p:cSld>
 </p:sld>
@@ -3612,11 +3536,8 @@
         <p:spPr>
           <a:xfrm>
             <a:off x="0" y="0"/>
-            <a:ext cx="9144000" cy="602780"/>
+            <a:ext cx="9144000" cy="582780"/>
           </a:xfrm>
-          <a:solidFill>
-            <a:srgbClr val="70121D"/>
-          </a:solidFill>
         </p:spPr>
         <p:txBody>
           <a:bodyPr/>
@@ -3627,7 +3548,7 @@
             </a:pPr>
             <a:r>
               <a:rPr/>
-              <a:t>Testing Equal Variance Assumption</a:t>
+              <a:t>Assumptions — Normality Testing</a:t>
             </a:r>
           </a:p>
         </p:txBody>
@@ -3639,7 +3560,7 @@
             <a:spLocks noGrp="1"/>
           </p:cNvSpPr>
           <p:nvPr>
-            <p:ph idx="1" sz="half"/>
+            <p:ph idx="1"/>
           </p:nvPr>
         </p:nvSpPr>
         <p:spPr/>
@@ -3647,118 +3568,37 @@
           <a:bodyPr/>
           <a:lstStyle/>
           <a:p>
-            <a:pPr lvl="0" indent="0" marL="0">
-              <a:buNone/>
-            </a:pPr>
-            <a:r>
-              <a:rPr/>
-              <a:t>Basic assumptions of parametric t-tests:</a:t>
-            </a:r>
-          </a:p>
-          <a:p>
-            <a:pPr lvl="0"/>
-            <a:r>
-              <a:rPr/>
-              <a:t>Normality</a:t>
-            </a:r>
-          </a:p>
-          <a:p>
-            <a:pPr lvl="0"/>
-            <a:r>
-              <a:rPr/>
-              <a:t>equal variance</a:t>
-            </a:r>
-          </a:p>
-          <a:p>
-            <a:pPr lvl="0"/>
-            <a:r>
-              <a:rPr/>
-              <a:t>random sampling</a:t>
-            </a:r>
-          </a:p>
-          <a:p>
-            <a:pPr lvl="0"/>
-            <a:r>
-              <a:rPr/>
-              <a:t>no outliers</a:t>
-            </a:r>
-          </a:p>
-          <a:p>
-            <a:pPr lvl="0" indent="0" marL="0">
-              <a:buNone/>
-            </a:pPr>
-            <a:r>
-              <a:rPr/>
-              <a:t>Equal variance: samples are from populations with similar degree of variability</a:t>
-            </a:r>
-          </a:p>
-          <a:p>
-            <a:pPr lvl="0"/>
-            <a:r>
-              <a:rPr/>
-              <a:t>Graphical tests: boxplots</a:t>
-            </a:r>
-          </a:p>
-          <a:p>
-            <a:pPr lvl="0"/>
-            <a:r>
-              <a:rPr/>
-              <a:t>“Formal” tests: F-ratio test</a:t>
-            </a:r>
-          </a:p>
-          <a:p>
-            <a:pPr lvl="0"/>
-            <a:r>
-              <a:rPr/>
-              <a:t>When samples sizes equal</a:t>
-            </a:r>
-          </a:p>
-          <a:p>
-            <a:pPr lvl="1"/>
-            <a:r>
-              <a:rPr/>
-              <a:t>Parametric tests most robust to violations of normality</a:t>
-            </a:r>
-          </a:p>
-          <a:p>
-            <a:pPr lvl="1"/>
-            <a:r>
-              <a:rPr/>
-              <a:t>Less so for equal variation assumptions</a:t>
-            </a:r>
-          </a:p>
-        </p:txBody>
-      </p:sp>
-      <p:pic>
-        <p:nvPicPr>
-          <p:cNvPr descr="nonparametric_t_tests_lecture_files/figure-pptx/l07-05-1.png" id="0" name="Picture 1"/>
-          <p:cNvPicPr>
-            <a:picLocks noGrp="1" noChangeAspect="1"/>
-          </p:cNvPicPr>
-          <p:nvPr/>
-        </p:nvPicPr>
-        <p:blipFill>
-          <a:blip r:embed="rId2"/>
-          <a:stretch>
-            <a:fillRect/>
-          </a:stretch>
-        </p:blipFill>
-        <p:spPr bwMode="auto">
-          <a:xfrm>
-            <a:off x="6121400" y="2044700"/>
-            <a:ext cx="2781300" cy="1714500"/>
-          </a:xfrm>
-          <a:prstGeom prst="rect">
-            <a:avLst/>
-          </a:prstGeom>
-          <a:noFill/>
-          <a:ln w="9525">
-            <a:noFill/>
-            <a:headEnd/>
-            <a:tailEnd/>
-          </a:ln>
-        </p:spPr>
-      </p:pic>
+            <a:pPr lvl="0" indent="0" marL="1270000">
+              <a:buNone/>
+            </a:pPr>
+            <a:r>
+              <a:rPr sz="2000" b="1"/>
+              <a:t>Note</a:t>
+            </a:r>
+          </a:p>
+          <a:p>
+            <a:pPr lvl="0" indent="0" marL="1270000">
+              <a:buNone/>
+            </a:pPr>
+            <a:r>
+              <a:rPr sz="2000" b="1"/>
+              <a:t>🔮 Predict first:</a:t>
+            </a:r>
+            <a:r>
+              <a:rPr sz="2000"/>
+              <a:t> We’re about to look at histogram, dotplot, boxplot, and QQ-plot views of the </a:t>
+            </a:r>
+            <a:r>
+              <a:rPr sz="2000" i="1"/>
+              <a:t>same</a:t>
+            </a:r>
+            <a:r>
+              <a:rPr sz="2000"/>
+              <a:t> NE 12 mass data. Which of the four do you expect to be most convincing about normality?</a:t>
+            </a:r>
+          </a:p>
+        </p:txBody>
+      </p:sp>
     </p:spTree>
   </p:cSld>
 </p:sld>
@@ -3783,23 +3623,15 @@
       </p:grpSpPr>
       <p:sp>
         <p:nvSpPr>
-          <p:cNvPr id="2" name="Title 1"/>
-          <p:cNvSpPr>
-            <a:spLocks noGrp="1"/>
-          </p:cNvSpPr>
-          <p:nvPr>
-            <p:ph type="title"/>
-          </p:nvPr>
-        </p:nvSpPr>
-        <p:spPr>
-          <a:xfrm>
-            <a:off x="0" y="0"/>
-            <a:ext cx="9144000" cy="602780"/>
-          </a:xfrm>
-          <a:solidFill>
-            <a:srgbClr val="70121D"/>
-          </a:solidFill>
-        </p:spPr>
+          <p:cNvPr id="3" name="Content Placeholder 2"/>
+          <p:cNvSpPr>
+            <a:spLocks noGrp="1"/>
+          </p:cNvSpPr>
+          <p:nvPr>
+            <p:ph idx="1" sz="half"/>
+          </p:nvPr>
+        </p:nvSpPr>
+        <p:spPr/>
         <p:txBody>
           <a:bodyPr/>
           <a:lstStyle/>
@@ -3809,93 +3641,73 @@
             </a:pPr>
             <a:r>
               <a:rPr/>
-              <a:t>Testing for Outliers</a:t>
-            </a:r>
-          </a:p>
-        </p:txBody>
-      </p:sp>
-      <p:sp>
-        <p:nvSpPr>
-          <p:cNvPr id="3" name="Content Placeholder 2"/>
-          <p:cNvSpPr>
-            <a:spLocks noGrp="1"/>
-          </p:cNvSpPr>
-          <p:nvPr>
-            <p:ph idx="1" sz="half"/>
-          </p:nvPr>
-        </p:nvSpPr>
-        <p:spPr/>
-        <p:txBody>
-          <a:bodyPr/>
-          <a:lstStyle/>
+              <a:t>Let’s test normality for one lake — </a:t>
+            </a:r>
+            <a:r>
+              <a:rPr b="1">
+                <a:latin typeface="Courier"/>
+              </a:rPr>
+              <a:t>NE 12</a:t>
+            </a:r>
+            <a:r>
+              <a:rPr/>
+              <a:t> — as if we were going to run a one-sample t-test. We need a new data frame with only NE 12 data, called </a:t>
+            </a:r>
+            <a:r>
+              <a:rPr>
+                <a:latin typeface="Courier"/>
+              </a:rPr>
+              <a:t>ne12_data</a:t>
+            </a:r>
+            <a:r>
+              <a:rPr/>
+              <a:t>.</a:t>
+            </a:r>
+          </a:p>
+          <a:p>
+            <a:pPr lvl="0" indent="0" marL="0">
+              <a:buNone/>
+            </a:pPr>
+            <a:r>
+              <a:rPr b="1"/>
+              <a:t>Normality:</a:t>
+            </a:r>
+            <a:r>
+              <a:rPr/>
+              <a:t> samples from a normally distributed population</a:t>
+            </a:r>
+          </a:p>
           <a:p>
             <a:pPr lvl="0"/>
             <a:r>
               <a:rPr/>
-              <a:t>Basic assumptions of parametric t-tests:</a:t>
-            </a:r>
-          </a:p>
-          <a:p>
-            <a:pPr lvl="1"/>
-            <a:r>
-              <a:rPr/>
-              <a:t>Normality</a:t>
-            </a:r>
-          </a:p>
-          <a:p>
-            <a:pPr lvl="1"/>
-            <a:r>
-              <a:rPr/>
-              <a:t>equal variance</a:t>
-            </a:r>
-          </a:p>
-          <a:p>
-            <a:pPr lvl="1"/>
-            <a:r>
-              <a:rPr/>
-              <a:t>random sampling</a:t>
-            </a:r>
-          </a:p>
-          <a:p>
-            <a:pPr lvl="1"/>
-            <a:r>
-              <a:rPr/>
-              <a:t>no outliers</a:t>
+              <a:t>Graphical tests: histograms, dotplots, boxplots, </a:t>
+            </a:r>
+            <a:r>
+              <a:rPr b="1"/>
+              <a:t>QQ-plots</a:t>
             </a:r>
           </a:p>
           <a:p>
             <a:pPr lvl="0"/>
             <a:r>
               <a:rPr/>
-              <a:t>No outliers: no “extreme” values that are very different from rest of sample</a:t>
-            </a:r>
-          </a:p>
-          <a:p>
-            <a:pPr lvl="1"/>
-            <a:r>
-              <a:rPr/>
-              <a:t>Graphical tests: boxplots, histograms</a:t>
-            </a:r>
-          </a:p>
-          <a:p>
-            <a:pPr lvl="1"/>
-            <a:r>
-              <a:rPr/>
-              <a:t>“Formal tests”: Grubb’s test - no one really does this</a:t>
-            </a:r>
-          </a:p>
-          <a:p>
-            <a:pPr lvl="1"/>
+              <a:t>“Formal” tests: </a:t>
+            </a:r>
             <a:r>
               <a:rPr b="1"/>
-              <a:t>Note: outliers a problem for non-parametric tests as well</a:t>
+              <a:t>Shapiro-Wilk test</a:t>
+            </a:r>
+            <a:r>
+              <a:rPr/>
+              <a:t> — sometimes not useful</a:t>
             </a:r>
           </a:p>
         </p:txBody>
       </p:sp>
       <p:pic>
         <p:nvPicPr>
-          <p:cNvPr descr="nonparametric_t_tests_lecture_files/figure-pptx/l07-06-1.png" id="0" name="Picture 1"/>
+          <p:cNvPr descr="nonparametric_t_tests_lecture_files/figure-pptx/unnamed-chunk-4-1.png" id="0" name="Picture 1"/>
           <p:cNvPicPr>
             <a:picLocks noGrp="1" noChangeAspect="1"/>
           </p:cNvPicPr>
@@ -3909,8 +3721,8 @@
         </p:blipFill>
         <p:spPr bwMode="auto">
           <a:xfrm>
-            <a:off x="6121400" y="1778000"/>
-            <a:ext cx="2781300" cy="2222500"/>
+            <a:off x="6121400" y="1638300"/>
+            <a:ext cx="2781300" cy="2501900"/>
           </a:xfrm>
           <a:prstGeom prst="rect">
             <a:avLst/>
@@ -3973,7 +3785,7 @@
             </a:pPr>
             <a:r>
               <a:rPr/>
-              <a:t>Alternative Tests When Assumptions Fail</a:t>
+              <a:t>Shapiro-Wilk Test for Normality</a:t>
             </a:r>
           </a:p>
         </p:txBody>
@@ -3993,91 +3805,79 @@
           <a:bodyPr/>
           <a:lstStyle/>
           <a:p>
+            <a:pPr lvl="0" indent="0" marL="0">
+              <a:buNone/>
+            </a:pPr>
+            <a:r>
+              <a:rPr/>
+              <a:t>“Null hypothesis is that data is normally distributed.”</a:t>
+            </a:r>
+          </a:p>
+          <a:p>
             <a:pPr lvl="0"/>
             <a:r>
               <a:rPr/>
-              <a:t>What if T Test assumptions fail?</a:t>
+              <a:t>Normality: samples from a normally distributed population</a:t>
             </a:r>
           </a:p>
           <a:p>
             <a:pPr lvl="0"/>
             <a:r>
               <a:rPr/>
-              <a:t>Alternative tests, with more relaxed assumptions, are available</a:t>
+              <a:t>Graphical tests: histograms, dotplots, boxplots, </a:t>
+            </a:r>
+            <a:r>
+              <a:rPr b="1"/>
+              <a:t>QQ-plots</a:t>
             </a:r>
           </a:p>
           <a:p>
             <a:pPr lvl="0"/>
             <a:r>
               <a:rPr/>
-              <a:t>In which case would you use the following tests?</a:t>
-            </a:r>
-          </a:p>
-          <a:p>
-            <a:pPr lvl="1"/>
-            <a:r>
-              <a:rPr/>
-              <a:t>Welch’s t-test: </a:t>
-            </a:r>
-            <a:r>
-              <a:rPr i="1"/>
-              <a:t>when distribution normal but variance unequal</a:t>
-            </a:r>
-          </a:p>
-          <a:p>
-            <a:pPr lvl="1"/>
-            <a:r>
-              <a:rPr/>
-              <a:t>Mann-Whitney-Wilcoxon test: </a:t>
-            </a:r>
-            <a:r>
-              <a:rPr i="1"/>
-              <a:t>when distribution not normal and/or outliers are present (but both groups should still have similar distributions and ~equal variance)</a:t>
-            </a:r>
-          </a:p>
-          <a:p>
-            <a:pPr lvl="1"/>
-            <a:r>
-              <a:rPr/>
-              <a:t>Permutation test for two samples: </a:t>
-            </a:r>
-            <a:r>
-              <a:rPr i="1"/>
-              <a:t>when distribution not normal (but both groups should still have similar distributions and ~equal variance)</a:t>
-            </a:r>
-          </a:p>
-        </p:txBody>
-      </p:sp>
-      <p:pic>
-        <p:nvPicPr>
-          <p:cNvPr descr="nonparametric_t_tests_lecture_files/figure-pptx/l07-07-1.png" id="0" name="Picture 1"/>
-          <p:cNvPicPr>
-            <a:picLocks noGrp="1" noChangeAspect="1"/>
-          </p:cNvPicPr>
-          <p:nvPr/>
-        </p:nvPicPr>
-        <p:blipFill>
-          <a:blip r:embed="rId2"/>
-          <a:stretch>
-            <a:fillRect/>
-          </a:stretch>
-        </p:blipFill>
-        <p:spPr bwMode="auto">
-          <a:xfrm>
-            <a:off x="6121400" y="2044700"/>
-            <a:ext cx="2781300" cy="1714500"/>
-          </a:xfrm>
-          <a:prstGeom prst="rect">
-            <a:avLst/>
-          </a:prstGeom>
-          <a:noFill/>
-          <a:ln w="9525">
-            <a:noFill/>
-            <a:headEnd/>
-            <a:tailEnd/>
-          </a:ln>
-        </p:spPr>
-      </p:pic>
+              <a:t>“Formal” tests: </a:t>
+            </a:r>
+            <a:r>
+              <a:rPr b="1"/>
+              <a:t>Shapiro-Wilk test</a:t>
+            </a:r>
+            <a:r>
+              <a:rPr/>
+              <a:t> — sometimes not useful</a:t>
+            </a:r>
+          </a:p>
+        </p:txBody>
+      </p:sp>
+      <p:sp>
+        <p:nvSpPr>
+          <p:cNvPr id="4" name="Content Placeholder 3"/>
+          <p:cNvSpPr>
+            <a:spLocks noGrp="1"/>
+          </p:cNvSpPr>
+          <p:nvPr>
+            <p:ph idx="2" sz="half"/>
+          </p:nvPr>
+        </p:nvSpPr>
+        <p:spPr/>
+        <p:txBody>
+          <a:bodyPr/>
+          <a:lstStyle/>
+          <a:p>
+            <a:pPr lvl="0" indent="0">
+              <a:buNone/>
+            </a:pPr>
+            <a:r>
+              <a:rPr>
+                <a:latin typeface="Courier"/>
+              </a:rPr>
+              <a:t>
+    Shapiro-Wilk normality test
+data:  ne12_data$length_mm
+W = 0.94528, p-value = 1.56e-09</a:t>
+            </a:r>
+          </a:p>
+        </p:txBody>
+      </p:sp>
     </p:spTree>
   </p:cSld>
 </p:sld>
@@ -4128,7 +3928,7 @@
             </a:pPr>
             <a:r>
               <a:rPr/>
-              <a:t>Understanding QQ-Plots</a:t>
+              <a:t>Testing the Equal Variance Assumption</a:t>
             </a:r>
           </a:p>
         </p:txBody>
@@ -4149,42 +3949,43 @@
           <a:lstStyle/>
           <a:p>
             <a:pPr lvl="0" indent="0" marL="0">
-              <a:spcBef>
-                <a:spcPts val="3000"/>
-              </a:spcBef>
               <a:buNone/>
             </a:pPr>
             <a:r>
               <a:rPr b="1"/>
-              <a:t>QQ-plots: tool for assessing normality</a:t>
+              <a:t>Equal variance:</a:t>
+            </a:r>
+            <a:r>
+              <a:rPr/>
+              <a:t> samples are from populations with a similar degree of variability.</a:t>
             </a:r>
           </a:p>
           <a:p>
             <a:pPr lvl="0"/>
             <a:r>
               <a:rPr/>
-              <a:t>On x- theoretical quantiles from SND</a:t>
+              <a:t>Graphical tests: boxplots</a:t>
             </a:r>
           </a:p>
           <a:p>
             <a:pPr lvl="0"/>
             <a:r>
               <a:rPr/>
-              <a:t>On y- ordered sample values</a:t>
+              <a:t>“Formal” tests: F-ratio test</a:t>
             </a:r>
           </a:p>
           <a:p>
             <a:pPr lvl="0"/>
             <a:r>
               <a:rPr/>
-              <a:t>Deviation from normal can be detected as deviation from straight line</a:t>
+              <a:t>When sample sizes are equal, parametric tests are most robust to violations of normality — less so for equal variance</a:t>
             </a:r>
           </a:p>
         </p:txBody>
       </p:sp>
       <p:pic>
         <p:nvPicPr>
-          <p:cNvPr descr="nonparametric_t_tests_lecture_files/figure-pptx/l07-08-1.png" id="0" name="Picture 1"/>
+          <p:cNvPr descr="nonparametric_t_tests_lecture_files/figure-pptx/unnamed-chunk-6-1.png" id="0" name="Picture 1"/>
           <p:cNvPicPr>
             <a:picLocks noGrp="1" noChangeAspect="1"/>
           </p:cNvPicPr>
@@ -4198,8 +3999,8 @@
         </p:blipFill>
         <p:spPr bwMode="auto">
           <a:xfrm>
-            <a:off x="6121400" y="2044700"/>
-            <a:ext cx="2781300" cy="1714500"/>
+            <a:off x="6121400" y="1676400"/>
+            <a:ext cx="2781300" cy="2438400"/>
           </a:xfrm>
           <a:prstGeom prst="rect">
             <a:avLst/>
@@ -4262,6 +4063,503 @@
             </a:pPr>
             <a:r>
               <a:rPr/>
+              <a:t>Testing for Outliers</a:t>
+            </a:r>
+          </a:p>
+        </p:txBody>
+      </p:sp>
+      <p:sp>
+        <p:nvSpPr>
+          <p:cNvPr id="3" name="Content Placeholder 2"/>
+          <p:cNvSpPr>
+            <a:spLocks noGrp="1"/>
+          </p:cNvSpPr>
+          <p:nvPr>
+            <p:ph idx="1" sz="half"/>
+          </p:nvPr>
+        </p:nvSpPr>
+        <p:spPr/>
+        <p:txBody>
+          <a:bodyPr/>
+          <a:lstStyle/>
+          <a:p>
+            <a:pPr lvl="0" indent="0" marL="0">
+              <a:buNone/>
+            </a:pPr>
+            <a:r>
+              <a:rPr b="1"/>
+              <a:t>No outliers:</a:t>
+            </a:r>
+            <a:r>
+              <a:rPr/>
+              <a:t> no “extreme” values very different from the rest of the sample.</a:t>
+            </a:r>
+          </a:p>
+          <a:p>
+            <a:pPr lvl="0"/>
+            <a:r>
+              <a:rPr/>
+              <a:t>Graphical tests: boxplots, histograms</a:t>
+            </a:r>
+          </a:p>
+          <a:p>
+            <a:pPr lvl="0"/>
+            <a:r>
+              <a:rPr/>
+              <a:t>“Formal tests”: Grubbs’ test — no one really does this</a:t>
+            </a:r>
+          </a:p>
+          <a:p>
+            <a:pPr lvl="0" indent="0" marL="1270000">
+              <a:buNone/>
+            </a:pPr>
+            <a:r>
+              <a:rPr sz="2000" b="1"/>
+              <a:t>Warning</a:t>
+            </a:r>
+          </a:p>
+          <a:p>
+            <a:pPr lvl="0" indent="0" marL="1270000">
+              <a:buNone/>
+            </a:pPr>
+            <a:r>
+              <a:rPr sz="2000" b="1"/>
+              <a:t>⚠️ Watch out!</a:t>
+            </a:r>
+          </a:p>
+          <a:p>
+            <a:pPr lvl="0" indent="0" marL="1270000">
+              <a:buNone/>
+            </a:pPr>
+            <a:r>
+              <a:rPr sz="2000"/>
+              <a:t>Outliers are a problem for non-parametric tests as well — switching to a rank-based test doesn’t make an outlier stop mattering.</a:t>
+            </a:r>
+          </a:p>
+        </p:txBody>
+      </p:sp>
+      <p:pic>
+        <p:nvPicPr>
+          <p:cNvPr descr="nonparametric_t_tests_lecture_files/figure-pptx/unnamed-chunk-7-1.png" id="0" name="Picture 1"/>
+          <p:cNvPicPr>
+            <a:picLocks noGrp="1" noChangeAspect="1"/>
+          </p:cNvPicPr>
+          <p:nvPr/>
+        </p:nvPicPr>
+        <p:blipFill>
+          <a:blip r:embed="rId2"/>
+          <a:stretch>
+            <a:fillRect/>
+          </a:stretch>
+        </p:blipFill>
+        <p:spPr bwMode="auto">
+          <a:xfrm>
+            <a:off x="6121400" y="1676400"/>
+            <a:ext cx="2781300" cy="2438400"/>
+          </a:xfrm>
+          <a:prstGeom prst="rect">
+            <a:avLst/>
+          </a:prstGeom>
+          <a:noFill/>
+          <a:ln w="9525">
+            <a:noFill/>
+            <a:headEnd/>
+            <a:tailEnd/>
+          </a:ln>
+        </p:spPr>
+      </p:pic>
+    </p:spTree>
+  </p:cSld>
+</p:sld>
+</file>
+
+<file path=ppt/slides/slide16.xml><?xml version="1.0" encoding="utf-8"?>
+<p:sld xmlns:a="http://schemas.openxmlformats.org/drawingml/2006/main" xmlns:r="http://schemas.openxmlformats.org/officeDocument/2006/relationships" xmlns:p="http://schemas.openxmlformats.org/presentationml/2006/main">
+  <p:cSld>
+    <p:spTree>
+      <p:nvGrpSpPr>
+        <p:cNvPr id="1" name=""/>
+        <p:cNvGrpSpPr/>
+        <p:nvPr/>
+      </p:nvGrpSpPr>
+      <p:grpSpPr>
+        <a:xfrm>
+          <a:off x="0" y="0"/>
+          <a:ext cx="0" cy="0"/>
+          <a:chOff x="0" y="0"/>
+          <a:chExt cx="0" cy="0"/>
+        </a:xfrm>
+      </p:grpSpPr>
+      <p:sp>
+        <p:nvSpPr>
+          <p:cNvPr id="2" name="Title 1"/>
+          <p:cNvSpPr>
+            <a:spLocks noGrp="1"/>
+          </p:cNvSpPr>
+          <p:nvPr>
+            <p:ph type="title"/>
+          </p:nvPr>
+        </p:nvSpPr>
+        <p:spPr>
+          <a:xfrm>
+            <a:off x="0" y="0"/>
+            <a:ext cx="9144000" cy="582780"/>
+          </a:xfrm>
+        </p:spPr>
+        <p:txBody>
+          <a:bodyPr/>
+          <a:lstStyle/>
+          <a:p>
+            <a:pPr lvl="0" indent="0" marL="0">
+              <a:buNone/>
+            </a:pPr>
+            <a:r>
+              <a:rPr/>
+              <a:t>Part 3 · When Assumptions Fail</a:t>
+            </a:r>
+          </a:p>
+        </p:txBody>
+      </p:sp>
+    </p:spTree>
+  </p:cSld>
+</p:sld>
+</file>
+
+<file path=ppt/slides/slide17.xml><?xml version="1.0" encoding="utf-8"?>
+<p:sld xmlns:a="http://schemas.openxmlformats.org/drawingml/2006/main" xmlns:r="http://schemas.openxmlformats.org/officeDocument/2006/relationships" xmlns:p="http://schemas.openxmlformats.org/presentationml/2006/main">
+  <p:cSld>
+    <p:spTree>
+      <p:nvGrpSpPr>
+        <p:cNvPr id="1" name=""/>
+        <p:cNvGrpSpPr/>
+        <p:nvPr/>
+      </p:nvGrpSpPr>
+      <p:grpSpPr>
+        <a:xfrm>
+          <a:off x="0" y="0"/>
+          <a:ext cx="0" cy="0"/>
+          <a:chOff x="0" y="0"/>
+          <a:chExt cx="0" cy="0"/>
+        </a:xfrm>
+      </p:grpSpPr>
+      <p:sp>
+        <p:nvSpPr>
+          <p:cNvPr id="2" name="Title 1"/>
+          <p:cNvSpPr>
+            <a:spLocks noGrp="1"/>
+          </p:cNvSpPr>
+          <p:nvPr>
+            <p:ph type="title"/>
+          </p:nvPr>
+        </p:nvSpPr>
+        <p:spPr>
+          <a:xfrm>
+            <a:off x="0" y="0"/>
+            <a:ext cx="9144000" cy="602780"/>
+          </a:xfrm>
+          <a:solidFill>
+            <a:srgbClr val="70121D"/>
+          </a:solidFill>
+        </p:spPr>
+        <p:txBody>
+          <a:bodyPr/>
+          <a:lstStyle/>
+          <a:p>
+            <a:pPr lvl="0" indent="0" marL="0">
+              <a:buNone/>
+            </a:pPr>
+            <a:r>
+              <a:rPr/>
+              <a:t>Alternative Tests When Assumptions Fail</a:t>
+            </a:r>
+          </a:p>
+        </p:txBody>
+      </p:sp>
+      <p:sp>
+        <p:nvSpPr>
+          <p:cNvPr id="3" name="Content Placeholder 2"/>
+          <p:cNvSpPr>
+            <a:spLocks noGrp="1"/>
+          </p:cNvSpPr>
+          <p:nvPr>
+            <p:ph idx="1" sz="half"/>
+          </p:nvPr>
+        </p:nvSpPr>
+        <p:spPr/>
+        <p:txBody>
+          <a:bodyPr/>
+          <a:lstStyle/>
+          <a:p>
+            <a:pPr lvl="0" indent="0" marL="0">
+              <a:buNone/>
+            </a:pPr>
+            <a:r>
+              <a:rPr/>
+              <a:t>What if t-test assumptions fail? Alternative tests, with more relaxed assumptions, are available. In which case would you use each?</a:t>
+            </a:r>
+          </a:p>
+          <a:p>
+            <a:pPr lvl="0"/>
+            <a:r>
+              <a:rPr b="1"/>
+              <a:t>Welch’s t-test:</a:t>
+            </a:r>
+            <a:r>
+              <a:rPr/>
+              <a:t> </a:t>
+            </a:r>
+            <a:r>
+              <a:rPr i="1"/>
+              <a:t>distribution normal but variance unequal</a:t>
+            </a:r>
+          </a:p>
+          <a:p>
+            <a:pPr lvl="0"/>
+            <a:r>
+              <a:rPr b="1"/>
+              <a:t>Mann-Whitney-Wilcoxon test:</a:t>
+            </a:r>
+            <a:r>
+              <a:rPr/>
+              <a:t> </a:t>
+            </a:r>
+            <a:r>
+              <a:rPr i="1"/>
+              <a:t>distribution not normal and/or outliers present (but both groups should still have similar distributions and ~equal variance)</a:t>
+            </a:r>
+          </a:p>
+          <a:p>
+            <a:pPr lvl="0"/>
+            <a:r>
+              <a:rPr b="1"/>
+              <a:t>Permutation test for two samples:</a:t>
+            </a:r>
+            <a:r>
+              <a:rPr/>
+              <a:t> </a:t>
+            </a:r>
+            <a:r>
+              <a:rPr i="1"/>
+              <a:t>distribution not normal (but both groups should still have similar distributions and ~equal variance)</a:t>
+            </a:r>
+          </a:p>
+        </p:txBody>
+      </p:sp>
+      <p:pic>
+        <p:nvPicPr>
+          <p:cNvPr descr="nonparametric_t_tests_lecture_files/figure-pptx/unnamed-chunk-8-1.png" id="0" name="Picture 1"/>
+          <p:cNvPicPr>
+            <a:picLocks noGrp="1" noChangeAspect="1"/>
+          </p:cNvPicPr>
+          <p:nvPr/>
+        </p:nvPicPr>
+        <p:blipFill>
+          <a:blip r:embed="rId2"/>
+          <a:stretch>
+            <a:fillRect/>
+          </a:stretch>
+        </p:blipFill>
+        <p:spPr bwMode="auto">
+          <a:xfrm>
+            <a:off x="6121400" y="1155700"/>
+            <a:ext cx="2781300" cy="3479800"/>
+          </a:xfrm>
+          <a:prstGeom prst="rect">
+            <a:avLst/>
+          </a:prstGeom>
+          <a:noFill/>
+          <a:ln w="9525">
+            <a:noFill/>
+            <a:headEnd/>
+            <a:tailEnd/>
+          </a:ln>
+        </p:spPr>
+      </p:pic>
+    </p:spTree>
+  </p:cSld>
+</p:sld>
+</file>
+
+<file path=ppt/slides/slide18.xml><?xml version="1.0" encoding="utf-8"?>
+<p:sld xmlns:a="http://schemas.openxmlformats.org/drawingml/2006/main" xmlns:r="http://schemas.openxmlformats.org/officeDocument/2006/relationships" xmlns:p="http://schemas.openxmlformats.org/presentationml/2006/main">
+  <p:cSld>
+    <p:spTree>
+      <p:nvGrpSpPr>
+        <p:cNvPr id="1" name=""/>
+        <p:cNvGrpSpPr/>
+        <p:nvPr/>
+      </p:nvGrpSpPr>
+      <p:grpSpPr>
+        <a:xfrm>
+          <a:off x="0" y="0"/>
+          <a:ext cx="0" cy="0"/>
+          <a:chOff x="0" y="0"/>
+          <a:chExt cx="0" cy="0"/>
+        </a:xfrm>
+      </p:grpSpPr>
+      <p:sp>
+        <p:nvSpPr>
+          <p:cNvPr id="2" name="Title 1"/>
+          <p:cNvSpPr>
+            <a:spLocks noGrp="1"/>
+          </p:cNvSpPr>
+          <p:nvPr>
+            <p:ph type="title"/>
+          </p:nvPr>
+        </p:nvSpPr>
+        <p:spPr>
+          <a:xfrm>
+            <a:off x="0" y="0"/>
+            <a:ext cx="9144000" cy="602780"/>
+          </a:xfrm>
+          <a:solidFill>
+            <a:srgbClr val="70121D"/>
+          </a:solidFill>
+        </p:spPr>
+        <p:txBody>
+          <a:bodyPr/>
+          <a:lstStyle/>
+          <a:p>
+            <a:pPr lvl="0" indent="0" marL="0">
+              <a:buNone/>
+            </a:pPr>
+            <a:r>
+              <a:rPr/>
+              <a:t>Understanding QQ-Plots</a:t>
+            </a:r>
+          </a:p>
+        </p:txBody>
+      </p:sp>
+      <p:sp>
+        <p:nvSpPr>
+          <p:cNvPr id="3" name="Content Placeholder 2"/>
+          <p:cNvSpPr>
+            <a:spLocks noGrp="1"/>
+          </p:cNvSpPr>
+          <p:nvPr>
+            <p:ph idx="1" sz="half"/>
+          </p:nvPr>
+        </p:nvSpPr>
+        <p:spPr/>
+        <p:txBody>
+          <a:bodyPr/>
+          <a:lstStyle/>
+          <a:p>
+            <a:pPr lvl="0" indent="0" marL="0">
+              <a:buNone/>
+            </a:pPr>
+            <a:r>
+              <a:rPr b="1"/>
+              <a:t>QQ-plots:</a:t>
+            </a:r>
+            <a:r>
+              <a:rPr/>
+              <a:t> a tool for assessing normality.</a:t>
+            </a:r>
+          </a:p>
+          <a:p>
+            <a:pPr lvl="0"/>
+            <a:r>
+              <a:rPr/>
+              <a:t>On x: theoretical quantiles from a standard normal distribution</a:t>
+            </a:r>
+          </a:p>
+          <a:p>
+            <a:pPr lvl="0"/>
+            <a:r>
+              <a:rPr/>
+              <a:t>On y: ordered sample values</a:t>
+            </a:r>
+          </a:p>
+          <a:p>
+            <a:pPr lvl="0"/>
+            <a:r>
+              <a:rPr/>
+              <a:t>Deviation from normal can be detected as deviation from a straight line</a:t>
+            </a:r>
+          </a:p>
+        </p:txBody>
+      </p:sp>
+      <p:pic>
+        <p:nvPicPr>
+          <p:cNvPr descr="nonparametric_t_tests_lecture_files/figure-pptx/unnamed-chunk-9-1.png" id="0" name="Picture 1"/>
+          <p:cNvPicPr>
+            <a:picLocks noGrp="1" noChangeAspect="1"/>
+          </p:cNvPicPr>
+          <p:nvPr/>
+        </p:nvPicPr>
+        <p:blipFill>
+          <a:blip r:embed="rId2"/>
+          <a:stretch>
+            <a:fillRect/>
+          </a:stretch>
+        </p:blipFill>
+        <p:spPr bwMode="auto">
+          <a:xfrm>
+            <a:off x="6121400" y="1752600"/>
+            <a:ext cx="2781300" cy="2286000"/>
+          </a:xfrm>
+          <a:prstGeom prst="rect">
+            <a:avLst/>
+          </a:prstGeom>
+          <a:noFill/>
+          <a:ln w="9525">
+            <a:noFill/>
+            <a:headEnd/>
+            <a:tailEnd/>
+          </a:ln>
+        </p:spPr>
+      </p:pic>
+    </p:spTree>
+  </p:cSld>
+</p:sld>
+</file>
+
+<file path=ppt/slides/slide19.xml><?xml version="1.0" encoding="utf-8"?>
+<p:sld xmlns:a="http://schemas.openxmlformats.org/drawingml/2006/main" xmlns:r="http://schemas.openxmlformats.org/officeDocument/2006/relationships" xmlns:p="http://schemas.openxmlformats.org/presentationml/2006/main">
+  <p:cSld>
+    <p:spTree>
+      <p:nvGrpSpPr>
+        <p:cNvPr id="1" name=""/>
+        <p:cNvGrpSpPr/>
+        <p:nvPr/>
+      </p:nvGrpSpPr>
+      <p:grpSpPr>
+        <a:xfrm>
+          <a:off x="0" y="0"/>
+          <a:ext cx="0" cy="0"/>
+          <a:chOff x="0" y="0"/>
+          <a:chExt cx="0" cy="0"/>
+        </a:xfrm>
+      </p:grpSpPr>
+      <p:sp>
+        <p:nvSpPr>
+          <p:cNvPr id="2" name="Title 1"/>
+          <p:cNvSpPr>
+            <a:spLocks noGrp="1"/>
+          </p:cNvSpPr>
+          <p:nvPr>
+            <p:ph type="title"/>
+          </p:nvPr>
+        </p:nvSpPr>
+        <p:spPr>
+          <a:xfrm>
+            <a:off x="0" y="0"/>
+            <a:ext cx="9144000" cy="602780"/>
+          </a:xfrm>
+          <a:solidFill>
+            <a:srgbClr val="70121D"/>
+          </a:solidFill>
+        </p:spPr>
+        <p:txBody>
+          <a:bodyPr/>
+          <a:lstStyle/>
+          <a:p>
+            <a:pPr lvl="0" indent="0" marL="0">
+              <a:buNone/>
+            </a:pPr>
+            <a:r>
+              <a:rPr/>
               <a:t>Data Transformations</a:t>
             </a:r>
           </a:p>
@@ -4282,38 +4580,33 @@
           <a:bodyPr/>
           <a:lstStyle/>
           <a:p>
+            <a:pPr lvl="0" indent="0" marL="0">
+              <a:buNone/>
+            </a:pPr>
+            <a:r>
+              <a:rPr/>
+              <a:t>In some cases, data can be mathematically “transformed” to meet the assumptions of parametric tests. This can be done in R and usually involves:</a:t>
+            </a:r>
+          </a:p>
+          <a:p>
             <a:pPr lvl="0"/>
             <a:r>
               <a:rPr/>
-              <a:t>In some cases, data can be mathematically “transformed” to meet assumptions of parametric tests</a:t>
+              <a:t>log₁₀ transformations</a:t>
             </a:r>
           </a:p>
           <a:p>
             <a:pPr lvl="0"/>
             <a:r>
               <a:rPr/>
-              <a:t>this can be done in r and usually involves</a:t>
-            </a:r>
-          </a:p>
-          <a:p>
-            <a:pPr lvl="1"/>
-            <a:r>
-              <a:rPr/>
-              <a:t>log10 transformations</a:t>
-            </a:r>
-          </a:p>
-          <a:p>
-            <a:pPr lvl="1"/>
-            <a:r>
-              <a:rPr/>
               <a:t>square root transformations</a:t>
             </a:r>
           </a:p>
           <a:p>
-            <a:pPr lvl="1"/>
-            <a:r>
-              <a:rPr/>
-              <a:t>and many others… I will have a description soon</a:t>
+            <a:pPr lvl="0"/>
+            <a:r>
+              <a:rPr/>
+              <a:t>and many others</a:t>
             </a:r>
           </a:p>
         </p:txBody>
@@ -4353,528 +4646,6 @@
 </p:sld>
 </file>
 
-<file path=ppt/slides/slide16.xml><?xml version="1.0" encoding="utf-8"?>
-<p:sld xmlns:a="http://schemas.openxmlformats.org/drawingml/2006/main" xmlns:r="http://schemas.openxmlformats.org/officeDocument/2006/relationships" xmlns:p="http://schemas.openxmlformats.org/presentationml/2006/main">
-  <p:cSld>
-    <p:spTree>
-      <p:nvGrpSpPr>
-        <p:cNvPr id="1" name=""/>
-        <p:cNvGrpSpPr/>
-        <p:nvPr/>
-      </p:nvGrpSpPr>
-      <p:grpSpPr>
-        <a:xfrm>
-          <a:off x="0" y="0"/>
-          <a:ext cx="0" cy="0"/>
-          <a:chOff x="0" y="0"/>
-          <a:chExt cx="0" cy="0"/>
-        </a:xfrm>
-      </p:grpSpPr>
-      <p:sp>
-        <p:nvSpPr>
-          <p:cNvPr id="2" name="Title 1"/>
-          <p:cNvSpPr>
-            <a:spLocks noGrp="1"/>
-          </p:cNvSpPr>
-          <p:nvPr>
-            <p:ph type="title"/>
-          </p:nvPr>
-        </p:nvSpPr>
-        <p:spPr>
-          <a:xfrm>
-            <a:off x="0" y="0"/>
-            <a:ext cx="9144000" cy="602780"/>
-          </a:xfrm>
-          <a:solidFill>
-            <a:srgbClr val="70121D"/>
-          </a:solidFill>
-        </p:spPr>
-        <p:txBody>
-          <a:bodyPr/>
-          <a:lstStyle/>
-          <a:p>
-            <a:pPr lvl="0" indent="0" marL="0">
-              <a:buNone/>
-            </a:pPr>
-            <a:r>
-              <a:rPr/>
-              <a:t>Robust tests - Welch’s T-Test</a:t>
-            </a:r>
-          </a:p>
-        </p:txBody>
-      </p:sp>
-      <p:sp>
-        <p:nvSpPr>
-          <p:cNvPr id="3" name="Content Placeholder 2"/>
-          <p:cNvSpPr>
-            <a:spLocks noGrp="1"/>
-          </p:cNvSpPr>
-          <p:nvPr>
-            <p:ph idx="1" sz="half"/>
-          </p:nvPr>
-        </p:nvSpPr>
-        <p:spPr/>
-        <p:txBody>
-          <a:bodyPr/>
-          <a:lstStyle/>
-          <a:p>
-            <a:pPr lvl="0"/>
-            <a:r>
-              <a:rPr b="1"/>
-              <a:t>Welch’s t-test</a:t>
-            </a:r>
-          </a:p>
-          <a:p>
-            <a:pPr lvl="1"/>
-            <a:r>
-              <a:rPr/>
-              <a:t>common “robust” test for means of two populations</a:t>
-            </a:r>
-          </a:p>
-          <a:p>
-            <a:pPr lvl="1"/>
-            <a:r>
-              <a:rPr/>
-              <a:t>Robust to violation of equal variance assumption, deals better with unequal sample size</a:t>
-            </a:r>
-          </a:p>
-          <a:p>
-            <a:pPr lvl="1"/>
-            <a:r>
-              <a:rPr/>
-              <a:t>Parametric test (assumes normal distribution)</a:t>
-            </a:r>
-          </a:p>
-          <a:p>
-            <a:pPr lvl="1"/>
-            <a:r>
-              <a:rPr/>
-              <a:t>Calculates a t statistic but recalculates df based on samples sizes and s</a:t>
-            </a:r>
-          </a:p>
-        </p:txBody>
-      </p:sp>
-      <p:pic>
-        <p:nvPicPr>
-          <p:cNvPr descr="nonparametric_t_tests_lecture_files/figure-pptx/l07-09-1.png" id="0" name="Picture 1"/>
-          <p:cNvPicPr>
-            <a:picLocks noGrp="1" noChangeAspect="1"/>
-          </p:cNvPicPr>
-          <p:nvPr/>
-        </p:nvPicPr>
-        <p:blipFill>
-          <a:blip r:embed="rId2"/>
-          <a:stretch>
-            <a:fillRect/>
-          </a:stretch>
-        </p:blipFill>
-        <p:spPr bwMode="auto">
-          <a:xfrm>
-            <a:off x="6121400" y="1778000"/>
-            <a:ext cx="2781300" cy="2222500"/>
-          </a:xfrm>
-          <a:prstGeom prst="rect">
-            <a:avLst/>
-          </a:prstGeom>
-          <a:noFill/>
-          <a:ln w="9525">
-            <a:noFill/>
-            <a:headEnd/>
-            <a:tailEnd/>
-          </a:ln>
-        </p:spPr>
-      </p:pic>
-    </p:spTree>
-  </p:cSld>
-</p:sld>
-</file>
-
-<file path=ppt/slides/slide17.xml><?xml version="1.0" encoding="utf-8"?>
-<p:sld xmlns:a="http://schemas.openxmlformats.org/drawingml/2006/main" xmlns:r="http://schemas.openxmlformats.org/officeDocument/2006/relationships" xmlns:p="http://schemas.openxmlformats.org/presentationml/2006/main">
-  <p:cSld>
-    <p:spTree>
-      <p:nvGrpSpPr>
-        <p:cNvPr id="1" name=""/>
-        <p:cNvGrpSpPr/>
-        <p:nvPr/>
-      </p:nvGrpSpPr>
-      <p:grpSpPr>
-        <a:xfrm>
-          <a:off x="0" y="0"/>
-          <a:ext cx="0" cy="0"/>
-          <a:chOff x="0" y="0"/>
-          <a:chExt cx="0" cy="0"/>
-        </a:xfrm>
-      </p:grpSpPr>
-      <p:sp>
-        <p:nvSpPr>
-          <p:cNvPr id="2" name="Title 1"/>
-          <p:cNvSpPr>
-            <a:spLocks noGrp="1"/>
-          </p:cNvSpPr>
-          <p:nvPr>
-            <p:ph type="title"/>
-          </p:nvPr>
-        </p:nvSpPr>
-        <p:spPr>
-          <a:xfrm>
-            <a:off x="0" y="0"/>
-            <a:ext cx="9144000" cy="582780"/>
-          </a:xfrm>
-        </p:spPr>
-        <p:txBody>
-          <a:bodyPr/>
-          <a:lstStyle/>
-          <a:p>
-            <a:pPr lvl="0" indent="0" marL="0">
-              <a:buNone/>
-            </a:pPr>
-            <a:r>
-              <a:rPr/>
-              <a:t>Comparing Standard T-Test vs Welch’s T-Test</a:t>
-            </a:r>
-          </a:p>
-        </p:txBody>
-      </p:sp>
-      <p:sp>
-        <p:nvSpPr>
-          <p:cNvPr id="3" name="Content Placeholder 2"/>
-          <p:cNvSpPr>
-            <a:spLocks noGrp="1"/>
-          </p:cNvSpPr>
-          <p:nvPr>
-            <p:ph idx="1"/>
-          </p:nvPr>
-        </p:nvSpPr>
-        <p:spPr/>
-        <p:txBody>
-          <a:bodyPr/>
-          <a:lstStyle/>
-          <a:p>
-            <a:pPr lvl="0"/>
-            <a:r>
-              <a:rPr b="1"/>
-              <a:t>Lets compare a parametric T-Test to a Welch’s t-test</a:t>
-            </a:r>
-          </a:p>
-          <a:p>
-            <a:pPr lvl="1"/>
-            <a:r>
-              <a:rPr/>
-              <a:t>T-Test is:</a:t>
-            </a:r>
-          </a:p>
-          <a:p>
-            <a:pPr lvl="2"/>
-            <a:r>
-              <a:rPr b="1"/>
-              <a:t>t.test(y1, y2, var.equal = TRUE, paired = FALSE)</a:t>
-            </a:r>
-          </a:p>
-          <a:p>
-            <a:pPr lvl="1"/>
-            <a:r>
-              <a:rPr/>
-              <a:t>Welch’s T-Test is:</a:t>
-            </a:r>
-          </a:p>
-          <a:p>
-            <a:pPr lvl="2"/>
-            <a:r>
-              <a:rPr b="1"/>
-              <a:t>t.test(y1, y2, var.equal = FALSE, paired = FALSE)</a:t>
-            </a:r>
-          </a:p>
-          <a:p>
-            <a:pPr lvl="0" indent="0">
-              <a:buNone/>
-            </a:pPr>
-            <a:r>
-              <a:rPr>
-                <a:latin typeface="Courier"/>
-              </a:rPr>
-              <a:t>[1] "Standard t-test results for mass_g:"</a:t>
-            </a:r>
-          </a:p>
-          <a:p>
-            <a:pPr lvl="0" indent="0">
-              <a:buNone/>
-            </a:pPr>
-            <a:r>
-              <a:rPr>
-                <a:latin typeface="Courier"/>
-              </a:rPr>
-              <a:t>
-    Two Sample t-test
-data:  mass_g by lake
-t = 14.181, df = 330, p-value &lt; 2.2e-16
-alternative hypothesis: true difference in means between group Island Lake and group NE 12 is not equal to 0
-95 percent confidence interval:
- 2266.304 2996.360
-sample estimates:
-mean in group Island Lake       mean in group NE 12 
-                3165.0000                  533.6677 </a:t>
-            </a:r>
-          </a:p>
-          <a:p>
-            <a:pPr lvl="0" indent="0">
-              <a:buNone/>
-            </a:pPr>
-            <a:r>
-              <a:rPr>
-                <a:latin typeface="Courier"/>
-              </a:rPr>
-              <a:t>[1] "Welch's t-test results for mass_g:"</a:t>
-            </a:r>
-          </a:p>
-          <a:p>
-            <a:pPr lvl="0" indent="0">
-              <a:buNone/>
-            </a:pPr>
-            <a:r>
-              <a:rPr>
-                <a:latin typeface="Courier"/>
-              </a:rPr>
-              <a:t>
-    Welch Two Sample t-test
-data:  mass_g by lake
-t = 5.1368, df = 9.0578, p-value = 0.0006016
-alternative hypothesis: true difference in means between group Island Lake and group NE 12 is not equal to 0
-95 percent confidence interval:
- 1473.676 3788.989
-sample estimates:
-mean in group Island Lake       mean in group NE 12 
-                3165.0000                  533.6677 </a:t>
-            </a:r>
-          </a:p>
-        </p:txBody>
-      </p:sp>
-    </p:spTree>
-  </p:cSld>
-</p:sld>
-</file>
-
-<file path=ppt/slides/slide18.xml><?xml version="1.0" encoding="utf-8"?>
-<p:sld xmlns:a="http://schemas.openxmlformats.org/drawingml/2006/main" xmlns:r="http://schemas.openxmlformats.org/officeDocument/2006/relationships" xmlns:p="http://schemas.openxmlformats.org/presentationml/2006/main">
-  <p:cSld>
-    <p:spTree>
-      <p:nvGrpSpPr>
-        <p:cNvPr id="1" name=""/>
-        <p:cNvGrpSpPr/>
-        <p:nvPr/>
-      </p:nvGrpSpPr>
-      <p:grpSpPr>
-        <a:xfrm>
-          <a:off x="0" y="0"/>
-          <a:ext cx="0" cy="0"/>
-          <a:chOff x="0" y="0"/>
-          <a:chExt cx="0" cy="0"/>
-        </a:xfrm>
-      </p:grpSpPr>
-      <p:sp>
-        <p:nvSpPr>
-          <p:cNvPr id="2" name="Title 1"/>
-          <p:cNvSpPr>
-            <a:spLocks noGrp="1"/>
-          </p:cNvSpPr>
-          <p:nvPr>
-            <p:ph type="title"/>
-          </p:nvPr>
-        </p:nvSpPr>
-        <p:spPr>
-          <a:xfrm>
-            <a:off x="0" y="0"/>
-            <a:ext cx="9144000" cy="582780"/>
-          </a:xfrm>
-        </p:spPr>
-        <p:txBody>
-          <a:bodyPr/>
-          <a:lstStyle/>
-          <a:p>
-            <a:pPr lvl="0" indent="0" marL="0">
-              <a:buNone/>
-            </a:pPr>
-            <a:r>
-              <a:rPr/>
-              <a:t>Rank-Based Tests</a:t>
-            </a:r>
-          </a:p>
-        </p:txBody>
-      </p:sp>
-      <p:sp>
-        <p:nvSpPr>
-          <p:cNvPr id="3" name="Content Placeholder 2"/>
-          <p:cNvSpPr>
-            <a:spLocks noGrp="1"/>
-          </p:cNvSpPr>
-          <p:nvPr>
-            <p:ph idx="1"/>
-          </p:nvPr>
-        </p:nvSpPr>
-        <p:spPr/>
-        <p:txBody>
-          <a:bodyPr/>
-          <a:lstStyle/>
-          <a:p>
-            <a:pPr lvl="0" indent="0" marL="0">
-              <a:buNone/>
-            </a:pPr>
-            <a:r>
-              <a:rPr/>
-              <a:t>Rank-based tests: no assumptions about distribution (non-parametric)</a:t>
-            </a:r>
-          </a:p>
-          <a:p>
-            <a:pPr lvl="0"/>
-            <a:r>
-              <a:rPr/>
-              <a:t>Ranks of data: observations assigned ranks, sums (and signs for paired tests) of ranks for groups compared</a:t>
-            </a:r>
-          </a:p>
-          <a:p>
-            <a:pPr lvl="0"/>
-            <a:r>
-              <a:rPr b="1"/>
-              <a:t>Mann-Whitney U test</a:t>
-            </a:r>
-            <a:r>
-              <a:rPr/>
-              <a:t> common alternative to independent samples t-test</a:t>
-            </a:r>
-          </a:p>
-          <a:p>
-            <a:pPr lvl="0"/>
-            <a:r>
-              <a:rPr b="1"/>
-              <a:t>Wilcoxon signed-rank</a:t>
-            </a:r>
-            <a:r>
-              <a:rPr/>
-              <a:t> test is alternative to paired t-test</a:t>
-            </a:r>
-          </a:p>
-          <a:p>
-            <a:pPr lvl="0"/>
-            <a:r>
-              <a:rPr/>
-              <a:t>Assumptions: similar distributions for groups, equal variance</a:t>
-            </a:r>
-          </a:p>
-          <a:p>
-            <a:pPr lvl="0"/>
-            <a:r>
-              <a:rPr/>
-              <a:t>Less power than parametric tests</a:t>
-            </a:r>
-          </a:p>
-          <a:p>
-            <a:pPr lvl="0"/>
-            <a:r>
-              <a:rPr/>
-              <a:t>Best when normality assumption can not be met by transformation (weird distribution) or large outliers</a:t>
-            </a:r>
-          </a:p>
-        </p:txBody>
-      </p:sp>
-    </p:spTree>
-  </p:cSld>
-</p:sld>
-</file>
-
-<file path=ppt/slides/slide19.xml><?xml version="1.0" encoding="utf-8"?>
-<p:sld xmlns:a="http://schemas.openxmlformats.org/drawingml/2006/main" xmlns:r="http://schemas.openxmlformats.org/officeDocument/2006/relationships" xmlns:p="http://schemas.openxmlformats.org/presentationml/2006/main">
-  <p:cSld>
-    <p:spTree>
-      <p:nvGrpSpPr>
-        <p:cNvPr id="1" name=""/>
-        <p:cNvGrpSpPr/>
-        <p:nvPr/>
-      </p:nvGrpSpPr>
-      <p:grpSpPr>
-        <a:xfrm>
-          <a:off x="0" y="0"/>
-          <a:ext cx="0" cy="0"/>
-          <a:chOff x="0" y="0"/>
-          <a:chExt cx="0" cy="0"/>
-        </a:xfrm>
-      </p:grpSpPr>
-      <p:sp>
-        <p:nvSpPr>
-          <p:cNvPr id="2" name="Title 1"/>
-          <p:cNvSpPr>
-            <a:spLocks noGrp="1"/>
-          </p:cNvSpPr>
-          <p:nvPr>
-            <p:ph type="title"/>
-          </p:nvPr>
-        </p:nvSpPr>
-        <p:spPr>
-          <a:xfrm>
-            <a:off x="0" y="0"/>
-            <a:ext cx="9144000" cy="582780"/>
-          </a:xfrm>
-        </p:spPr>
-        <p:txBody>
-          <a:bodyPr/>
-          <a:lstStyle/>
-          <a:p>
-            <a:pPr lvl="0" indent="0" marL="0">
-              <a:buNone/>
-            </a:pPr>
-            <a:r>
-              <a:rPr/>
-              <a:t>Mann-Whitney U Test Results</a:t>
-            </a:r>
-          </a:p>
-        </p:txBody>
-      </p:sp>
-      <p:sp>
-        <p:nvSpPr>
-          <p:cNvPr id="3" name="Content Placeholder 2"/>
-          <p:cNvSpPr>
-            <a:spLocks noGrp="1"/>
-          </p:cNvSpPr>
-          <p:nvPr>
-            <p:ph idx="1"/>
-          </p:nvPr>
-        </p:nvSpPr>
-        <p:spPr/>
-        <p:txBody>
-          <a:bodyPr/>
-          <a:lstStyle/>
-          <a:p>
-            <a:pPr lvl="0" indent="0">
-              <a:buNone/>
-            </a:pPr>
-            <a:r>
-              <a:rPr>
-                <a:latin typeface="Courier"/>
-              </a:rPr>
-              <a:t>[1] "Mann-Whitney U test results mass_g:"</a:t>
-            </a:r>
-          </a:p>
-          <a:p>
-            <a:pPr lvl="0" indent="0">
-              <a:buNone/>
-            </a:pPr>
-            <a:r>
-              <a:rPr>
-                <a:latin typeface="Courier"/>
-              </a:rPr>
-              <a:t>
-    Wilcoxon rank sum test with continuity correction
-data:  mass_g by lake
-W = 3205.5, p-value = 9.506e-08
-alternative hypothesis: true location shift is not equal to 0</a:t>
-            </a:r>
-          </a:p>
-        </p:txBody>
-      </p:sp>
-    </p:spTree>
-  </p:cSld>
-</p:sld>
-</file>
-
 <file path=ppt/slides/slide2.xml><?xml version="1.0" encoding="utf-8"?>
 <p:sld xmlns:a="http://schemas.openxmlformats.org/drawingml/2006/main" xmlns:r="http://schemas.openxmlformats.org/officeDocument/2006/relationships" xmlns:p="http://schemas.openxmlformats.org/presentationml/2006/main">
   <p:cSld>
@@ -4920,7 +4691,7 @@
             </a:pPr>
             <a:r>
               <a:rPr/>
-              <a:t>Lecture 6 - A Brief review</a:t>
+              <a:t>Where We Left Off</a:t>
             </a:r>
           </a:p>
         </p:txBody>
@@ -4940,6 +4711,15 @@
           <a:bodyPr/>
           <a:lstStyle/>
           <a:p>
+            <a:pPr lvl="0" indent="0" marL="0">
+              <a:buNone/>
+            </a:pPr>
+            <a:r>
+              <a:rPr/>
+              <a:t>A brief review:</a:t>
+            </a:r>
+          </a:p>
+          <a:p>
             <a:pPr lvl="0"/>
             <a:r>
               <a:rPr/>
@@ -4950,14 +4730,14 @@
             <a:pPr lvl="0"/>
             <a:r>
               <a:rPr/>
-              <a:t>1- and 2-sided T tests</a:t>
+              <a:t>One- and two-sided t-tests</a:t>
             </a:r>
           </a:p>
           <a:p>
             <a:pPr lvl="0"/>
             <a:r>
               <a:rPr/>
-              <a:t>Power - what is it and why talk about it.</a:t>
+              <a:t>Power — what it is and why we talk about it</a:t>
             </a:r>
           </a:p>
           <a:p>
@@ -4971,28 +4751,55 @@
             <a:pPr lvl="0"/>
             <a:r>
               <a:rPr/>
-              <a:t>What next — WHEN ASSUMPTIONS FAIL!</a:t>
+              <a:t>What next — when assumptions fail!</a:t>
             </a:r>
           </a:p>
           <a:p>
             <a:pPr lvl="1"/>
             <a:r>
               <a:rPr/>
-              <a:t>we will always cover parametric tests</a:t>
+              <a:t>we will always cover parametric tests first</a:t>
             </a:r>
           </a:p>
           <a:p>
             <a:pPr lvl="1"/>
             <a:r>
               <a:rPr/>
-              <a:t>then we will cover non parametric approaches</a:t>
+              <a:t>then non-parametric approaches</a:t>
             </a:r>
           </a:p>
           <a:p>
             <a:pPr lvl="1"/>
             <a:r>
               <a:rPr/>
-              <a:t>later on we will explore other approaches to use the appropriate underlying distribution that is not normal but Poisson or other</a:t>
+              <a:t>later, other approaches use the appropriate underlying distribution when it isn’t normal, but Poisson or other</a:t>
+            </a:r>
+          </a:p>
+          <a:p>
+            <a:pPr lvl="0" indent="0" marL="1270000">
+              <a:buNone/>
+            </a:pPr>
+            <a:r>
+              <a:rPr sz="2000" b="1"/>
+              <a:t>Note</a:t>
+            </a:r>
+          </a:p>
+          <a:p>
+            <a:pPr lvl="0" indent="0" marL="1270000">
+              <a:buNone/>
+            </a:pPr>
+            <a:r>
+              <a:rPr sz="2000" b="1"/>
+              <a:t>✅ Key idea from last lecture</a:t>
+            </a:r>
+          </a:p>
+          <a:p>
+            <a:pPr lvl="0" indent="0" marL="1270000">
+              <a:buNone/>
+            </a:pPr>
+            <a:r>
+              <a:rPr sz="2000"/>
+              <a:t>A t-test’s p-value is only trustworthy if its assumptions hold. Today is about what to do when they don’t.</a:t>
             </a:r>
           </a:p>
         </p:txBody>
@@ -5062,11 +4869,8 @@
         <p:spPr>
           <a:xfrm>
             <a:off x="0" y="0"/>
-            <a:ext cx="9144000" cy="602780"/>
+            <a:ext cx="9144000" cy="582780"/>
           </a:xfrm>
-          <a:solidFill>
-            <a:srgbClr val="70121D"/>
-          </a:solidFill>
         </p:spPr>
         <p:txBody>
           <a:bodyPr/>
@@ -5077,140 +4881,11 @@
             </a:pPr>
             <a:r>
               <a:rPr/>
-              <a:t>Permutation Tests - Concept</a:t>
-            </a:r>
-          </a:p>
-        </p:txBody>
-      </p:sp>
-      <p:sp>
-        <p:nvSpPr>
-          <p:cNvPr id="3" name="Content Placeholder 2"/>
-          <p:cNvSpPr>
-            <a:spLocks noGrp="1"/>
-          </p:cNvSpPr>
-          <p:nvPr>
-            <p:ph idx="1" sz="half"/>
-          </p:nvPr>
-        </p:nvSpPr>
-        <p:spPr/>
-        <p:txBody>
-          <a:bodyPr/>
-          <a:lstStyle/>
-          <a:p>
-            <a:pPr lvl="0"/>
-            <a:r>
-              <a:rPr/>
-              <a:t>Permutation tests based on resampling: reshuffling of original data</a:t>
-            </a:r>
-          </a:p>
-          <a:p>
-            <a:pPr lvl="0"/>
-            <a:r>
-              <a:rPr/>
-              <a:t>Resampling allows parameter estimation when distribution unknown, including SEs and CIs of statistics (means, medians)</a:t>
-            </a:r>
-          </a:p>
-          <a:p>
-            <a:pPr lvl="0"/>
-            <a:r>
-              <a:rPr/>
-              <a:t>Common approach is bootstrap: resample sample with replacement many times, recalculate sample stats</a:t>
-            </a:r>
-          </a:p>
-          <a:p>
-            <a:pPr lvl="0"/>
-            <a:r>
-              <a:rPr/>
-              <a:t>Use the </a:t>
-            </a:r>
-            <a:r>
-              <a:rPr>
-                <a:latin typeface="Courier"/>
-              </a:rPr>
-              <a:t>perm</a:t>
-            </a:r>
-            <a:r>
-              <a:rPr/>
-              <a:t> package</a:t>
-            </a:r>
-          </a:p>
-          <a:p>
-            <a:pPr lvl="0"/>
-            <a:r>
-              <a:rPr/>
-              <a:t>Ho: µ</a:t>
-            </a:r>
-            <a:r>
-              <a:rPr baseline="-25000"/>
-              <a:t>A</a:t>
-            </a:r>
-            <a:r>
-              <a:rPr/>
-              <a:t> = µ</a:t>
-            </a:r>
-            <a:r>
-              <a:rPr baseline="-25000"/>
-              <a:t>B</a:t>
-            </a:r>
-          </a:p>
-          <a:p>
-            <a:pPr lvl="0"/>
-            <a:r>
-              <a:rPr/>
-              <a:t>Ha: µ</a:t>
-            </a:r>
-            <a:r>
-              <a:rPr baseline="-25000"/>
-              <a:t>A</a:t>
-            </a:r>
-            <a:r>
-              <a:rPr/>
-              <a:t> ≠µ</a:t>
-            </a:r>
-            <a:r>
-              <a:rPr baseline="-25000"/>
-              <a:t>B</a:t>
-            </a:r>
-          </a:p>
-          <a:p>
-            <a:pPr lvl="0"/>
-            <a:r>
-              <a:rPr/>
-              <a:t>Calculates the difference ∆ in means between two groups</a:t>
-            </a:r>
-          </a:p>
-        </p:txBody>
-      </p:sp>
-      <p:pic>
-        <p:nvPicPr>
-          <p:cNvPr descr="nonparametric_t_tests_lecture_files/figure-pptx/l07-12-1.png" id="0" name="Picture 1"/>
-          <p:cNvPicPr>
-            <a:picLocks noGrp="1" noChangeAspect="1"/>
-          </p:cNvPicPr>
-          <p:nvPr/>
-        </p:nvPicPr>
-        <p:blipFill>
-          <a:blip r:embed="rId2"/>
-          <a:stretch>
-            <a:fillRect/>
-          </a:stretch>
-        </p:blipFill>
-        <p:spPr bwMode="auto">
-          <a:xfrm>
-            <a:off x="6121400" y="1778000"/>
-            <a:ext cx="2781300" cy="2222500"/>
-          </a:xfrm>
-          <a:prstGeom prst="rect">
-            <a:avLst/>
-          </a:prstGeom>
-          <a:noFill/>
-          <a:ln w="9525">
-            <a:noFill/>
-            <a:headEnd/>
-            <a:tailEnd/>
-          </a:ln>
-        </p:spPr>
-      </p:pic>
+              <a:t>Part 4 · Welch’s T-Test</a:t>
+            </a:r>
+          </a:p>
+        </p:txBody>
+      </p:sp>
     </p:spTree>
   </p:cSld>
 </p:sld>
@@ -5261,7 +4936,7 @@
             </a:pPr>
             <a:r>
               <a:rPr/>
-              <a:t>Permutation Tests - Method</a:t>
+              <a:t>Robust Tests — Welch’s T-Test</a:t>
             </a:r>
           </a:p>
         </p:txBody>
@@ -5281,59 +4956,82 @@
           <a:bodyPr/>
           <a:lstStyle/>
           <a:p>
+            <a:pPr lvl="0" indent="0" marL="0">
+              <a:buNone/>
+            </a:pPr>
+            <a:r>
+              <a:rPr b="1"/>
+              <a:t>Welch’s t-test:</a:t>
+            </a:r>
+          </a:p>
+          <a:p>
             <a:pPr lvl="0"/>
             <a:r>
               <a:rPr/>
-              <a:t>Randomly reshuffle observations between groups (keeping n~NE 12~=323 and n</a:t>
-            </a:r>
-            <a:r>
-              <a:rPr baseline="-25000"/>
-              <a:t>Island</a:t>
-            </a:r>
-            <a:r>
-              <a:rPr/>
-              <a:t>=10), calculate ∆</a:t>
+              <a:t>a common “robust” test for the means of two populations</a:t>
             </a:r>
           </a:p>
           <a:p>
             <a:pPr lvl="0"/>
             <a:r>
               <a:rPr/>
-              <a:t>Repeat &gt;1,000 times</a:t>
+              <a:t>robust to violation of the equal-variance assumption; deals better with unequal sample sizes</a:t>
             </a:r>
           </a:p>
           <a:p>
             <a:pPr lvl="0"/>
             <a:r>
               <a:rPr/>
-              <a:t>Record proportion of the different means i</a:t>
+              <a:t>still a </a:t>
+            </a:r>
+            <a:r>
+              <a:rPr b="1"/>
+              <a:t>parametric</a:t>
+            </a:r>
+            <a:r>
+              <a:rPr/>
+              <a:t> test (assumes normal distribution)</a:t>
             </a:r>
           </a:p>
           <a:p>
             <a:pPr lvl="0"/>
             <a:r>
               <a:rPr/>
-              <a:t>This is equivalent to p-value and can be used in “traditional” H test framework</a:t>
-            </a:r>
-          </a:p>
-          <a:p>
-            <a:pPr lvl="0"/>
-            <a:r>
-              <a:rPr/>
-              <a:t>For a graphical explanation:</a:t>
-            </a:r>
-          </a:p>
-          <a:p>
-            <a:pPr lvl="1"/>
-            <a:r>
-              <a:rPr>
-                <a:hlinkClick r:id="rId2"/>
-              </a:rPr>
-              <a:t>Graphical Explanation</a:t>
-            </a:r>
-          </a:p>
-        </p:txBody>
-      </p:sp>
+              <a:t>calculates a t statistic, but recalculates degrees of freedom based on sample sizes and s</a:t>
+            </a:r>
+          </a:p>
+        </p:txBody>
+      </p:sp>
+      <p:pic>
+        <p:nvPicPr>
+          <p:cNvPr descr="nonparametric_t_tests_lecture_files/figure-pptx/unnamed-chunk-10-1.png" id="0" name="Picture 1"/>
+          <p:cNvPicPr>
+            <a:picLocks noGrp="1" noChangeAspect="1"/>
+          </p:cNvPicPr>
+          <p:nvPr/>
+        </p:nvPicPr>
+        <p:blipFill>
+          <a:blip r:embed="rId2"/>
+          <a:stretch>
+            <a:fillRect/>
+          </a:stretch>
+        </p:blipFill>
+        <p:spPr bwMode="auto">
+          <a:xfrm>
+            <a:off x="6121400" y="1752600"/>
+            <a:ext cx="2781300" cy="2286000"/>
+          </a:xfrm>
+          <a:prstGeom prst="rect">
+            <a:avLst/>
+          </a:prstGeom>
+          <a:noFill/>
+          <a:ln w="9525">
+            <a:noFill/>
+            <a:headEnd/>
+            <a:tailEnd/>
+          </a:ln>
+        </p:spPr>
+      </p:pic>
     </p:spTree>
   </p:cSld>
 </p:sld>
@@ -5369,8 +5067,11 @@
         <p:spPr>
           <a:xfrm>
             <a:off x="0" y="0"/>
-            <a:ext cx="9144000" cy="582780"/>
+            <a:ext cx="9144000" cy="602780"/>
           </a:xfrm>
+          <a:solidFill>
+            <a:srgbClr val="70121D"/>
+          </a:solidFill>
         </p:spPr>
         <p:txBody>
           <a:bodyPr/>
@@ -5381,7 +5082,7 @@
             </a:pPr>
             <a:r>
               <a:rPr/>
-              <a:t>Permutation Test Implementation</a:t>
+              <a:t>Comparing Standard T-Test vs. Welch’s T-Test</a:t>
             </a:r>
           </a:p>
         </p:txBody>
@@ -5393,7 +5094,7 @@
             <a:spLocks noGrp="1"/>
           </p:cNvSpPr>
           <p:nvPr>
-            <p:ph idx="1"/>
+            <p:ph idx="1" sz="half"/>
           </p:nvPr>
         </p:nvSpPr>
         <p:spPr/>
@@ -5401,19 +5102,56 @@
           <a:bodyPr/>
           <a:lstStyle/>
           <a:p>
+            <a:pPr lvl="0" indent="0" marL="0">
+              <a:buNone/>
+            </a:pPr>
+            <a:r>
+              <a:rPr/>
+              <a:t>Let’s compare a parametric t-test to a Welch’s t-test:</a:t>
+            </a:r>
+          </a:p>
+          <a:p>
             <a:pPr lvl="0"/>
             <a:r>
               <a:rPr/>
-              <a:t>In R (using ‘perm’ package):</a:t>
+              <a:t>Standard: </a:t>
+            </a:r>
+            <a:r>
+              <a:rPr b="1">
+                <a:latin typeface="Courier"/>
+              </a:rPr>
+              <a:t>t.test(y1, y2, var.equal = TRUE, paired = FALSE)</a:t>
             </a:r>
           </a:p>
           <a:p>
             <a:pPr lvl="0"/>
             <a:r>
               <a:rPr/>
-              <a:t>Assumptions: both groups have similar distribution; equal variance</a:t>
-            </a:r>
-          </a:p>
+              <a:t>Welch’s: </a:t>
+            </a:r>
+            <a:r>
+              <a:rPr b="1">
+                <a:latin typeface="Courier"/>
+              </a:rPr>
+              <a:t>t.test(y1, y2, var.equal = FALSE, paired = FALSE)</a:t>
+            </a:r>
+          </a:p>
+        </p:txBody>
+      </p:sp>
+      <p:sp>
+        <p:nvSpPr>
+          <p:cNvPr id="4" name="Content Placeholder 3"/>
+          <p:cNvSpPr>
+            <a:spLocks noGrp="1"/>
+          </p:cNvSpPr>
+          <p:nvPr>
+            <p:ph idx="2" sz="half"/>
+          </p:nvPr>
+        </p:nvSpPr>
+        <p:spPr/>
+        <p:txBody>
+          <a:bodyPr/>
+          <a:lstStyle/>
           <a:p>
             <a:pPr lvl="0" indent="0">
               <a:buNone/>
@@ -5422,17 +5160,58 @@
               <a:rPr>
                 <a:latin typeface="Courier"/>
               </a:rPr>
+              <a:t>[1] "Standard t-test results for mass_g:"</a:t>
+            </a:r>
+          </a:p>
+          <a:p>
+            <a:pPr lvl="0" indent="0">
+              <a:buNone/>
+            </a:pPr>
+            <a:r>
+              <a:rPr>
+                <a:latin typeface="Courier"/>
+              </a:rPr>
               <a:t>
-    Exact Permutation Test Estimated by Monte Carlo
-data:  GROUP 1 and GROUP 2
-p-value = 2e-04
-alternative hypothesis: true mean GROUP 1 - mean GROUP 2 is not equal to 0
+    Two Sample t-test
+data:  mass_g by lake
+t = 14.181, df = 330, p-value &lt; 2.2e-16
+alternative hypothesis: true difference in means between group Island Lake and group NE 12 is not equal to 0
+95 percent confidence interval:
+ 2266.304 2996.360
 sample estimates:
-mean GROUP 1 - mean GROUP 2 
-                    -333.08 
-p-value estimated from 10000 Monte Carlo replications
-99 percent confidence interval on p-value:
- 0.000000000 0.001059383 </a:t>
+mean in group Island Lake       mean in group NE 12 
+                3165.0000                  533.6677 </a:t>
+            </a:r>
+          </a:p>
+          <a:p>
+            <a:pPr lvl="0" indent="0">
+              <a:buNone/>
+            </a:pPr>
+            <a:r>
+              <a:rPr>
+                <a:latin typeface="Courier"/>
+              </a:rPr>
+              <a:t>[1] "Welch's t-test results for mass_g:"</a:t>
+            </a:r>
+          </a:p>
+          <a:p>
+            <a:pPr lvl="0" indent="0">
+              <a:buNone/>
+            </a:pPr>
+            <a:r>
+              <a:rPr>
+                <a:latin typeface="Courier"/>
+              </a:rPr>
+              <a:t>
+    Welch Two Sample t-test
+data:  mass_g by lake
+t = 5.1368, df = 9.0578, p-value = 0.0006016
+alternative hypothesis: true difference in means between group Island Lake and group NE 12 is not equal to 0
+95 percent confidence interval:
+ 1473.676 3788.989
+sample estimates:
+mean in group Island Lake       mean in group NE 12 
+                3165.0000                  533.6677 </a:t>
             </a:r>
           </a:p>
         </p:txBody>
@@ -5484,117 +5263,7 @@
             </a:pPr>
             <a:r>
               <a:rPr/>
-              <a:t>Summary - Testing Assumptions</a:t>
-            </a:r>
-          </a:p>
-        </p:txBody>
-      </p:sp>
-      <p:sp>
-        <p:nvSpPr>
-          <p:cNvPr id="3" name="Content Placeholder 2"/>
-          <p:cNvSpPr>
-            <a:spLocks noGrp="1"/>
-          </p:cNvSpPr>
-          <p:nvPr>
-            <p:ph idx="1"/>
-          </p:nvPr>
-        </p:nvSpPr>
-        <p:spPr/>
-        <p:txBody>
-          <a:bodyPr/>
-          <a:lstStyle/>
-          <a:p>
-            <a:pPr lvl="0" indent="0" marL="0">
-              <a:spcBef>
-                <a:spcPts val="3000"/>
-              </a:spcBef>
-              <a:buNone/>
-            </a:pPr>
-            <a:r>
-              <a:rPr b="1"/>
-              <a:t>Testing Assumptions of Parametric Tests</a:t>
-            </a:r>
-          </a:p>
-          <a:p>
-            <a:pPr lvl="0" indent="0" marL="0">
-              <a:spcBef>
-                <a:spcPts val="3000"/>
-              </a:spcBef>
-              <a:buNone/>
-            </a:pPr>
-            <a:r>
-              <a:rPr b="1"/>
-              <a:t>Key Assumptions</a:t>
-            </a:r>
-          </a:p>
-          <a:p>
-            <a:pPr lvl="0"/>
-            <a:r>
-              <a:rPr b="1"/>
-              <a:t>Random sampling</a:t>
-            </a:r>
-            <a:r>
-              <a:rPr/>
-              <a:t>: Samples are randomly collected from populations</a:t>
-            </a:r>
-          </a:p>
-          <a:p>
-            <a:pPr lvl="0"/>
-            <a:r>
-              <a:rPr b="1"/>
-              <a:t>Normality</a:t>
-            </a:r>
-            <a:r>
-              <a:rPr/>
-              <a:t>: Data follows a normal distribution</a:t>
-            </a:r>
-          </a:p>
-          <a:p>
-            <a:pPr lvl="0"/>
-            <a:r>
-              <a:rPr b="1"/>
-              <a:t>Equal variance</a:t>
-            </a:r>
-            <a:r>
-              <a:rPr/>
-              <a:t>: Samples come from populations with similar variability</a:t>
-            </a:r>
-          </a:p>
-          <a:p>
-            <a:pPr lvl="0"/>
-            <a:r>
-              <a:rPr b="1"/>
-              <a:t>No outliers</a:t>
-            </a:r>
-            <a:r>
-              <a:rPr/>
-              <a:t>: No extreme values that can skew results</a:t>
-            </a:r>
-          </a:p>
-          <a:p>
-            <a:pPr lvl="0" indent="0" marL="0">
-              <a:spcBef>
-                <a:spcPts val="3000"/>
-              </a:spcBef>
-              <a:buNone/>
-            </a:pPr>
-            <a:r>
-              <a:rPr b="1"/>
-              <a:t>Assessing Assumptions</a:t>
-            </a:r>
-          </a:p>
-          <a:p>
-            <a:pPr lvl="0"/>
-            <a:r>
-              <a:rPr/>
-              <a:t>Key to do every time</a:t>
-            </a:r>
-          </a:p>
-          <a:p>
-            <a:pPr lvl="0"/>
-            <a:r>
-              <a:rPr/>
-              <a:t>Should acknowledge in manuscript</a:t>
+              <a:t>Part 5 · Rank-Based Tests</a:t>
             </a:r>
           </a:p>
         </p:txBody>
@@ -5634,8 +5303,11 @@
         <p:spPr>
           <a:xfrm>
             <a:off x="0" y="0"/>
-            <a:ext cx="9144000" cy="582780"/>
+            <a:ext cx="9144000" cy="602780"/>
           </a:xfrm>
+          <a:solidFill>
+            <a:srgbClr val="70121D"/>
+          </a:solidFill>
         </p:spPr>
         <p:txBody>
           <a:bodyPr/>
@@ -5646,7 +5318,7 @@
             </a:pPr>
             <a:r>
               <a:rPr/>
-              <a:t>Summary - Data Transformations</a:t>
+              <a:t>Rank-Based Tests</a:t>
             </a:r>
           </a:p>
         </p:txBody>
@@ -5658,7 +5330,7 @@
             <a:spLocks noGrp="1"/>
           </p:cNvSpPr>
           <p:nvPr>
-            <p:ph idx="1"/>
+            <p:ph idx="1" sz="half"/>
           </p:nvPr>
         </p:nvSpPr>
         <p:spPr/>
@@ -5667,87 +5339,104 @@
           <a:lstStyle/>
           <a:p>
             <a:pPr lvl="0" indent="0" marL="0">
-              <a:spcBef>
-                <a:spcPts val="3000"/>
-              </a:spcBef>
-              <a:buNone/>
-            </a:pPr>
+              <a:buNone/>
+            </a:pPr>
+            <a:r>
+              <a:rPr/>
+              <a:t>Rank-based tests: no assumptions about distribution (non-parametric).</a:t>
+            </a:r>
+          </a:p>
+          <a:p>
+            <a:pPr lvl="0"/>
+            <a:r>
+              <a:rPr/>
+              <a:t>Ranks of data: observations are assigned ranks; sums (and signs, for paired tests) of ranks for groups are compared</a:t>
+            </a:r>
+          </a:p>
+          <a:p>
+            <a:pPr lvl="0"/>
             <a:r>
               <a:rPr b="1"/>
-              <a:t>Data Transformations</a:t>
-            </a:r>
-          </a:p>
-          <a:p>
-            <a:pPr lvl="0" indent="0" marL="0">
-              <a:buNone/>
-            </a:pPr>
-            <a:r>
-              <a:rPr/>
-              <a:t>When assumptions aren’t met, transformations may help normalize data:</a:t>
+              <a:t>Mann-Whitney U test</a:t>
+            </a:r>
+            <a:r>
+              <a:rPr/>
+              <a:t> — common alternative to the independent-samples t-test</a:t>
             </a:r>
           </a:p>
           <a:p>
             <a:pPr lvl="0"/>
             <a:r>
               <a:rPr b="1"/>
-              <a:t>Log transformation</a:t>
-            </a:r>
-            <a:r>
-              <a:rPr/>
-              <a:t>: </a:t>
-            </a:r>
-            <a:r>
-              <a:rPr>
-                <a:latin typeface="Courier"/>
-              </a:rPr>
-              <a:t>log10(x)</a:t>
-            </a:r>
-            <a:r>
-              <a:rPr/>
-              <a:t> - Useful for right-skewed data, multiplicative effects</a:t>
+              <a:t>Wilcoxon signed-rank test</a:t>
+            </a:r>
+            <a:r>
+              <a:rPr/>
+              <a:t> — alternative to the paired t-test</a:t>
             </a:r>
           </a:p>
           <a:p>
             <a:pPr lvl="0"/>
             <a:r>
-              <a:rPr b="1"/>
-              <a:t>Square root</a:t>
-            </a:r>
-            <a:r>
-              <a:rPr/>
-              <a:t>: </a:t>
-            </a:r>
-            <a:r>
-              <a:rPr>
-                <a:latin typeface="Courier"/>
-              </a:rPr>
-              <a:t>sqrt(x)</a:t>
-            </a:r>
-            <a:r>
-              <a:rPr/>
-              <a:t> - Useful for count data, moderately right-skewed distributions</a:t>
+              <a:rPr/>
+              <a:t>Assumptions: similar distributions for groups, equal variance</a:t>
             </a:r>
           </a:p>
           <a:p>
             <a:pPr lvl="0"/>
             <a:r>
-              <a:rPr b="1"/>
-              <a:t>Box-Cox</a:t>
-            </a:r>
-            <a:r>
-              <a:rPr/>
-              <a:t>: More flexible family of power transformations</a:t>
+              <a:rPr/>
+              <a:t>Less power than parametric tests</a:t>
             </a:r>
           </a:p>
           <a:p>
             <a:pPr lvl="0"/>
             <a:r>
-              <a:rPr b="1"/>
-              <a:t>More specialized transformations</a:t>
-            </a:r>
-            <a:r>
-              <a:rPr/>
-              <a:t> especially for percentages or proportions</a:t>
+              <a:rPr/>
+              <a:t>Best when normality can’t be met by transformation (weird distribution) or there are large outliers</a:t>
+            </a:r>
+          </a:p>
+        </p:txBody>
+      </p:sp>
+      <p:sp>
+        <p:nvSpPr>
+          <p:cNvPr id="4" name="Content Placeholder 3"/>
+          <p:cNvSpPr>
+            <a:spLocks noGrp="1"/>
+          </p:cNvSpPr>
+          <p:nvPr>
+            <p:ph idx="2" sz="half"/>
+          </p:nvPr>
+        </p:nvSpPr>
+        <p:spPr/>
+        <p:txBody>
+          <a:bodyPr/>
+          <a:lstStyle/>
+          <a:p>
+            <a:pPr lvl="0" indent="0" marL="1270000">
+              <a:buNone/>
+            </a:pPr>
+            <a:r>
+              <a:rPr sz="2000" b="1"/>
+              <a:t>Note</a:t>
+            </a:r>
+          </a:p>
+          <a:p>
+            <a:pPr lvl="0" indent="0" marL="1270000">
+              <a:buNone/>
+            </a:pPr>
+            <a:r>
+              <a:rPr sz="2000" b="1"/>
+              <a:t>📖 Reference</a:t>
+            </a:r>
+          </a:p>
+          <a:p>
+            <a:pPr lvl="0" indent="0" marL="1270000">
+              <a:buNone/>
+            </a:pPr>
+            <a:r>
+              <a:rPr sz="2000"/>
+              <a:t>Whitlock &amp; Schluter, Ch. 13, covers the Mann-Whitney U test and Wilcoxon signed-rank test as the standard rank-based alternatives.</a:t>
             </a:r>
           </a:p>
         </p:txBody>
@@ -5787,8 +5476,11 @@
         <p:spPr>
           <a:xfrm>
             <a:off x="0" y="0"/>
-            <a:ext cx="9144000" cy="582780"/>
+            <a:ext cx="9144000" cy="602780"/>
           </a:xfrm>
+          <a:solidFill>
+            <a:srgbClr val="70121D"/>
+          </a:solidFill>
         </p:spPr>
         <p:txBody>
           <a:bodyPr/>
@@ -5799,7 +5491,7 @@
             </a:pPr>
             <a:r>
               <a:rPr/>
-              <a:t>Summary - Parametric Test Options</a:t>
+              <a:t>Mann-Whitney U Test Results</a:t>
             </a:r>
           </a:p>
         </p:txBody>
@@ -5811,7 +5503,7 @@
             <a:spLocks noGrp="1"/>
           </p:cNvSpPr>
           <p:nvPr>
-            <p:ph idx="1"/>
+            <p:ph idx="1" sz="half"/>
           </p:nvPr>
         </p:nvSpPr>
         <p:spPr/>
@@ -5819,118 +5511,92 @@
           <a:bodyPr/>
           <a:lstStyle/>
           <a:p>
-            <a:pPr lvl="0" indent="0" marL="0">
-              <a:spcBef>
-                <a:spcPts val="3000"/>
-              </a:spcBef>
-              <a:buNone/>
-            </a:pPr>
-            <a:r>
-              <a:rPr b="1"/>
-              <a:t>1. Standard T-Test</a:t>
-            </a:r>
-          </a:p>
-          <a:p>
-            <a:pPr lvl="0"/>
-            <a:r>
-              <a:rPr b="1"/>
-              <a:t>Strengths:</a:t>
-            </a:r>
-          </a:p>
-          <a:p>
-            <a:pPr lvl="1"/>
-            <a:r>
-              <a:rPr/>
-              <a:t>High statistical power when assumptions are met</a:t>
-            </a:r>
-          </a:p>
-          <a:p>
-            <a:pPr lvl="1"/>
-            <a:r>
-              <a:rPr/>
-              <a:t>- Well understood and widely accepted</a:t>
-            </a:r>
-          </a:p>
-          <a:p>
-            <a:pPr lvl="0"/>
-            <a:r>
-              <a:rPr b="1"/>
-              <a:t>Weaknesses:</a:t>
-            </a:r>
-          </a:p>
-          <a:p>
-            <a:pPr lvl="1"/>
-            <a:r>
-              <a:rPr/>
-              <a:t>- Sensitive to violations of normality, equal variance</a:t>
-            </a:r>
-          </a:p>
-          <a:p>
-            <a:pPr lvl="1"/>
-            <a:r>
-              <a:rPr/>
-              <a:t>- Heavily influenced by outliers</a:t>
-            </a:r>
-          </a:p>
-          <a:p>
-            <a:pPr lvl="0" indent="0" marL="0">
-              <a:spcBef>
-                <a:spcPts val="3000"/>
-              </a:spcBef>
-              <a:buNone/>
-            </a:pPr>
-            <a:r>
-              <a:rPr b="1"/>
-              <a:t>2. Welch’s T-Test</a:t>
-            </a:r>
-          </a:p>
-          <a:p>
-            <a:pPr lvl="0"/>
-            <a:r>
-              <a:rPr b="1"/>
-              <a:t>Strengths:</a:t>
-            </a:r>
-          </a:p>
-          <a:p>
-            <a:pPr lvl="1"/>
-            <a:r>
-              <a:rPr/>
-              <a:t>- Robust to violations of equal variance assumption</a:t>
-            </a:r>
-          </a:p>
-          <a:p>
-            <a:pPr lvl="1"/>
-            <a:r>
-              <a:rPr/>
-              <a:t>- Handles unequal sample sizes well</a:t>
-            </a:r>
-          </a:p>
-          <a:p>
-            <a:pPr lvl="1"/>
-            <a:r>
-              <a:rPr/>
-              <a:t>- Still parametric (assumes normality)</a:t>
-            </a:r>
-          </a:p>
-          <a:p>
-            <a:pPr lvl="0"/>
-            <a:r>
-              <a:rPr b="1"/>
-              <a:t>Weaknesses:</a:t>
-            </a:r>
-          </a:p>
-          <a:p>
-            <a:pPr lvl="1"/>
-            <a:r>
-              <a:rPr/>
-              <a:t>- Slightly less powerful than standard t-test when variances are equal</a:t>
-            </a:r>
-          </a:p>
-          <a:p>
-            <a:pPr lvl="1"/>
-            <a:r>
-              <a:rPr/>
-              <a:t>- Still assumes normal distribution</a:t>
+            <a:pPr lvl="0" indent="0">
+              <a:buNone/>
+            </a:pPr>
+            <a:r>
+              <a:rPr>
+                <a:latin typeface="Courier"/>
+              </a:rPr>
+              <a:t>[1] "Mann-Whitney U test results mass_g:"</a:t>
+            </a:r>
+          </a:p>
+          <a:p>
+            <a:pPr lvl="0" indent="0">
+              <a:buNone/>
+            </a:pPr>
+            <a:r>
+              <a:rPr>
+                <a:latin typeface="Courier"/>
+              </a:rPr>
+              <a:t>
+    Wilcoxon rank sum test with continuity correction
+data:  mass_g by lake
+W = 3205.5, p-value = 9.506e-08
+alternative hypothesis: true location shift is not equal to 0</a:t>
+            </a:r>
+          </a:p>
+        </p:txBody>
+      </p:sp>
+      <p:sp>
+        <p:nvSpPr>
+          <p:cNvPr id="4" name="Content Placeholder 3"/>
+          <p:cNvSpPr>
+            <a:spLocks noGrp="1"/>
+          </p:cNvSpPr>
+          <p:nvPr>
+            <p:ph idx="2" sz="half"/>
+          </p:nvPr>
+        </p:nvSpPr>
+        <p:spPr/>
+        <p:txBody>
+          <a:bodyPr/>
+          <a:lstStyle/>
+          <a:p>
+            <a:pPr lvl="0" indent="0" marL="1270000">
+              <a:buNone/>
+            </a:pPr>
+            <a:r>
+              <a:rPr sz="2000" b="1"/>
+              <a:t>Tip</a:t>
+            </a:r>
+          </a:p>
+          <a:p>
+            <a:pPr lvl="0" indent="0" marL="1270000">
+              <a:buNone/>
+            </a:pPr>
+            <a:r>
+              <a:rPr sz="2000" b="1"/>
+              <a:t>🖐 Notice</a:t>
+            </a:r>
+          </a:p>
+          <a:p>
+            <a:pPr lvl="0" indent="0" marL="1270000">
+              <a:buNone/>
+            </a:pPr>
+            <a:r>
+              <a:rPr sz="2000"/>
+              <a:t>The test statistic is </a:t>
+            </a:r>
+            <a:r>
+              <a:rPr sz="2000">
+                <a:latin typeface="Courier"/>
+              </a:rPr>
+              <a:t>W</a:t>
+            </a:r>
+            <a:r>
+              <a:rPr sz="2000"/>
+              <a:t>, not </a:t>
+            </a:r>
+            <a:r>
+              <a:rPr sz="2000">
+                <a:latin typeface="Courier"/>
+              </a:rPr>
+              <a:t>t</a:t>
+            </a:r>
+            <a:r>
+              <a:rPr sz="2000"/>
+              <a:t> — a signal you’re reading rank-based test output, not a t-test.</a:t>
             </a:r>
           </a:p>
         </p:txBody>
@@ -5982,166 +5648,7 @@
             </a:pPr>
             <a:r>
               <a:rPr/>
-              <a:t>Summary - Non-Parametric Options</a:t>
-            </a:r>
-          </a:p>
-        </p:txBody>
-      </p:sp>
-      <p:sp>
-        <p:nvSpPr>
-          <p:cNvPr id="3" name="Content Placeholder 2"/>
-          <p:cNvSpPr>
-            <a:spLocks noGrp="1"/>
-          </p:cNvSpPr>
-          <p:nvPr>
-            <p:ph idx="1"/>
-          </p:nvPr>
-        </p:nvSpPr>
-        <p:spPr/>
-        <p:txBody>
-          <a:bodyPr/>
-          <a:lstStyle/>
-          <a:p>
-            <a:pPr lvl="0" indent="0" marL="0">
-              <a:spcBef>
-                <a:spcPts val="3000"/>
-              </a:spcBef>
-              <a:buNone/>
-            </a:pPr>
-            <a:r>
-              <a:rPr b="1"/>
-              <a:t>3. Mann-Whitney-Wilcoxon Test</a:t>
-            </a:r>
-          </a:p>
-          <a:p>
-            <a:pPr lvl="0"/>
-            <a:r>
-              <a:rPr b="1"/>
-              <a:t>Strengths:</a:t>
-            </a:r>
-          </a:p>
-          <a:p>
-            <a:pPr lvl="1"/>
-            <a:r>
-              <a:rPr/>
-              <a:t>- Non-parametric: doesn’t assume normal distribution</a:t>
-            </a:r>
-          </a:p>
-          <a:p>
-            <a:pPr lvl="1"/>
-            <a:r>
-              <a:rPr/>
-              <a:t>- Robust against outliers</a:t>
-            </a:r>
-          </a:p>
-          <a:p>
-            <a:pPr lvl="1"/>
-            <a:r>
-              <a:rPr/>
-              <a:t>- Works with ordinal data</a:t>
-            </a:r>
-          </a:p>
-          <a:p>
-            <a:pPr lvl="0"/>
-            <a:r>
-              <a:rPr b="1"/>
-              <a:t>Weaknesses:</a:t>
-            </a:r>
-          </a:p>
-          <a:p>
-            <a:pPr lvl="1"/>
-            <a:r>
-              <a:rPr/>
-              <a:t>- Less statistical power than parametric tests</a:t>
-            </a:r>
-          </a:p>
-          <a:p>
-            <a:pPr lvl="1"/>
-            <a:r>
-              <a:rPr/>
-              <a:t>- Still assumes similar distributions and approximate equal variance</a:t>
-            </a:r>
-          </a:p>
-          <a:p>
-            <a:pPr lvl="1"/>
-            <a:r>
-              <a:rPr/>
-              <a:t>- Tests median differences rather than mean differences</a:t>
-            </a:r>
-          </a:p>
-          <a:p>
-            <a:pPr lvl="0" indent="0" marL="0">
-              <a:spcBef>
-                <a:spcPts val="3000"/>
-              </a:spcBef>
-              <a:buNone/>
-            </a:pPr>
-            <a:r>
-              <a:rPr b="1"/>
-              <a:t>4. Permutation Tests</a:t>
-            </a:r>
-          </a:p>
-          <a:p>
-            <a:pPr lvl="0"/>
-            <a:r>
-              <a:rPr b="1"/>
-              <a:t>Strengths:</a:t>
-            </a:r>
-          </a:p>
-          <a:p>
-            <a:pPr lvl="1"/>
-            <a:r>
-              <a:rPr/>
-              <a:t>- Distribution-free: doesn’t assume a specific distribution</a:t>
-            </a:r>
-          </a:p>
-          <a:p>
-            <a:pPr lvl="1"/>
-            <a:r>
-              <a:rPr/>
-              <a:t>- Can be applied to many types of test statistics</a:t>
-            </a:r>
-          </a:p>
-          <a:p>
-            <a:pPr lvl="1"/>
-            <a:r>
-              <a:rPr/>
-              <a:t>- Handles small sample sizes well</a:t>
-            </a:r>
-          </a:p>
-          <a:p>
-            <a:pPr lvl="1"/>
-            <a:r>
-              <a:rPr/>
-              <a:t>- Directly estimates p-values through resampling</a:t>
-            </a:r>
-          </a:p>
-          <a:p>
-            <a:pPr lvl="0"/>
-            <a:r>
-              <a:rPr b="1"/>
-              <a:t>Weaknesses:</a:t>
-            </a:r>
-          </a:p>
-          <a:p>
-            <a:pPr lvl="1"/>
-            <a:r>
-              <a:rPr/>
-              <a:t>- Computationally intensive</a:t>
-            </a:r>
-          </a:p>
-          <a:p>
-            <a:pPr lvl="1"/>
-            <a:r>
-              <a:rPr/>
-              <a:t>- Assumes exchangeability under the null hypothesis</a:t>
-            </a:r>
-          </a:p>
-          <a:p>
-            <a:pPr lvl="1"/>
-            <a:r>
-              <a:rPr/>
-              <a:t>- Requires similar distributions and equal variance</a:t>
+              <a:t>Part 6 · Permutation Tests</a:t>
             </a:r>
           </a:p>
         </p:txBody>
@@ -6181,8 +5688,11 @@
         <p:spPr>
           <a:xfrm>
             <a:off x="0" y="0"/>
-            <a:ext cx="9144000" cy="582780"/>
+            <a:ext cx="9144000" cy="602780"/>
           </a:xfrm>
+          <a:solidFill>
+            <a:srgbClr val="70121D"/>
+          </a:solidFill>
         </p:spPr>
         <p:txBody>
           <a:bodyPr/>
@@ -6193,7 +5703,7 @@
             </a:pPr>
             <a:r>
               <a:rPr/>
-              <a:t>Key Takeaway</a:t>
+              <a:t>Permutation Tests — Concept</a:t>
             </a:r>
           </a:p>
         </p:txBody>
@@ -6205,7 +5715,7 @@
             <a:spLocks noGrp="1"/>
           </p:cNvSpPr>
           <p:nvPr>
-            <p:ph idx="1"/>
+            <p:ph idx="1" sz="half"/>
           </p:nvPr>
         </p:nvSpPr>
         <p:spPr/>
@@ -6213,12 +5723,1103 @@
           <a:bodyPr/>
           <a:lstStyle/>
           <a:p>
+            <a:pPr lvl="0"/>
+            <a:r>
+              <a:rPr/>
+              <a:t>Permutation tests are based on resampling: reshuffling the original data</a:t>
+            </a:r>
+          </a:p>
+          <a:p>
+            <a:pPr lvl="0"/>
+            <a:r>
+              <a:rPr/>
+              <a:t>Resampling allows parameter estimation when the distribution is unknown, including SEs and CIs of statistics (means, medians)</a:t>
+            </a:r>
+          </a:p>
+          <a:p>
+            <a:pPr lvl="0"/>
+            <a:r>
+              <a:rPr/>
+              <a:t>A common approach is the bootstrap: resample with replacement many times, recalculate sample stats</a:t>
+            </a:r>
+          </a:p>
+          <a:p>
+            <a:pPr lvl="0"/>
+            <a:r>
+              <a:rPr/>
+              <a:t>We use the </a:t>
+            </a:r>
+            <a:r>
+              <a:rPr>
+                <a:latin typeface="Courier"/>
+              </a:rPr>
+              <a:t>perm</a:t>
+            </a:r>
+            <a:r>
+              <a:rPr/>
+              <a:t> package</a:t>
+            </a:r>
+          </a:p>
+          <a:p>
+            <a:pPr lvl="0"/>
+            <a:r>
+              <a:rPr/>
+              <a:t>H₀: µ_A = µ_B, Hₐ: µ_A ≠ µ_B</a:t>
+            </a:r>
+          </a:p>
+          <a:p>
+            <a:pPr lvl="0"/>
+            <a:r>
+              <a:rPr/>
+              <a:t>Calculates the difference Δ in means between two groups</a:t>
+            </a:r>
+          </a:p>
+        </p:txBody>
+      </p:sp>
+      <p:pic>
+        <p:nvPicPr>
+          <p:cNvPr descr="nonparametric_t_tests_lecture_files/figure-pptx/unnamed-chunk-13-1.png" id="0" name="Picture 1"/>
+          <p:cNvPicPr>
+            <a:picLocks noGrp="1" noChangeAspect="1"/>
+          </p:cNvPicPr>
+          <p:nvPr/>
+        </p:nvPicPr>
+        <p:blipFill>
+          <a:blip r:embed="rId2"/>
+          <a:stretch>
+            <a:fillRect/>
+          </a:stretch>
+        </p:blipFill>
+        <p:spPr bwMode="auto">
+          <a:xfrm>
+            <a:off x="6121400" y="1676400"/>
+            <a:ext cx="2781300" cy="2438400"/>
+          </a:xfrm>
+          <a:prstGeom prst="rect">
+            <a:avLst/>
+          </a:prstGeom>
+          <a:noFill/>
+          <a:ln w="9525">
+            <a:noFill/>
+            <a:headEnd/>
+            <a:tailEnd/>
+          </a:ln>
+        </p:spPr>
+      </p:pic>
+    </p:spTree>
+  </p:cSld>
+</p:sld>
+</file>
+
+<file path=ppt/slides/slide28.xml><?xml version="1.0" encoding="utf-8"?>
+<p:sld xmlns:a="http://schemas.openxmlformats.org/drawingml/2006/main" xmlns:r="http://schemas.openxmlformats.org/officeDocument/2006/relationships" xmlns:p="http://schemas.openxmlformats.org/presentationml/2006/main">
+  <p:cSld>
+    <p:spTree>
+      <p:nvGrpSpPr>
+        <p:cNvPr id="1" name=""/>
+        <p:cNvGrpSpPr/>
+        <p:nvPr/>
+      </p:nvGrpSpPr>
+      <p:grpSpPr>
+        <a:xfrm>
+          <a:off x="0" y="0"/>
+          <a:ext cx="0" cy="0"/>
+          <a:chOff x="0" y="0"/>
+          <a:chExt cx="0" cy="0"/>
+        </a:xfrm>
+      </p:grpSpPr>
+      <p:sp>
+        <p:nvSpPr>
+          <p:cNvPr id="2" name="Title 1"/>
+          <p:cNvSpPr>
+            <a:spLocks noGrp="1"/>
+          </p:cNvSpPr>
+          <p:nvPr>
+            <p:ph type="title"/>
+          </p:nvPr>
+        </p:nvSpPr>
+        <p:spPr>
+          <a:xfrm>
+            <a:off x="0" y="0"/>
+            <a:ext cx="9144000" cy="602780"/>
+          </a:xfrm>
+          <a:solidFill>
+            <a:srgbClr val="70121D"/>
+          </a:solidFill>
+        </p:spPr>
+        <p:txBody>
+          <a:bodyPr/>
+          <a:lstStyle/>
+          <a:p>
             <a:pPr lvl="0" indent="0" marL="0">
               <a:buNone/>
             </a:pPr>
             <a:r>
               <a:rPr/>
-              <a:t>Statistical tests have different strengths and assumptions. The choice should be guided by your data characteristics, not just convenience. Always visualize your data before deciding on the appropriate test.</a:t>
+              <a:t>Permutation Tests — Method</a:t>
+            </a:r>
+          </a:p>
+        </p:txBody>
+      </p:sp>
+      <p:sp>
+        <p:nvSpPr>
+          <p:cNvPr id="3" name="Content Placeholder 2"/>
+          <p:cNvSpPr>
+            <a:spLocks noGrp="1"/>
+          </p:cNvSpPr>
+          <p:nvPr>
+            <p:ph idx="1" sz="half"/>
+          </p:nvPr>
+        </p:nvSpPr>
+        <p:spPr/>
+        <p:txBody>
+          <a:bodyPr/>
+          <a:lstStyle/>
+          <a:p>
+            <a:pPr lvl="0"/>
+            <a:r>
+              <a:rPr/>
+              <a:t>Randomly reshuffle observations between groups (keeping n₍NE 12₎ = 323 and n₍Island₎ = 10), calculate Δ</a:t>
+            </a:r>
+          </a:p>
+          <a:p>
+            <a:pPr lvl="0"/>
+            <a:r>
+              <a:rPr/>
+              <a:t>Repeat &gt; 1,000 times</a:t>
+            </a:r>
+          </a:p>
+          <a:p>
+            <a:pPr lvl="0"/>
+            <a:r>
+              <a:rPr/>
+              <a:t>Record the proportion of the differences in means as extreme as (or more extreme than) observed</a:t>
+            </a:r>
+          </a:p>
+          <a:p>
+            <a:pPr lvl="0"/>
+            <a:r>
+              <a:rPr/>
+              <a:t>This is equivalent to a p-value, and can be used in the “traditional” hypothesis-testing framework</a:t>
+            </a:r>
+          </a:p>
+        </p:txBody>
+      </p:sp>
+      <p:sp>
+        <p:nvSpPr>
+          <p:cNvPr id="4" name="Content Placeholder 3"/>
+          <p:cNvSpPr>
+            <a:spLocks noGrp="1"/>
+          </p:cNvSpPr>
+          <p:nvPr>
+            <p:ph idx="2" sz="half"/>
+          </p:nvPr>
+        </p:nvSpPr>
+        <p:spPr/>
+        <p:txBody>
+          <a:bodyPr/>
+          <a:lstStyle/>
+          <a:p>
+            <a:pPr lvl="0" indent="0" marL="1270000">
+              <a:buNone/>
+            </a:pPr>
+            <a:r>
+              <a:rPr sz="2000" b="1"/>
+              <a:t>Tip</a:t>
+            </a:r>
+          </a:p>
+          <a:p>
+            <a:pPr lvl="0" indent="0" marL="1270000">
+              <a:buNone/>
+            </a:pPr>
+            <a:r>
+              <a:rPr sz="2000" b="1"/>
+              <a:t>🖐 For a graphical explanation</a:t>
+            </a:r>
+          </a:p>
+          <a:p>
+            <a:pPr lvl="0" indent="0" marL="1270000">
+              <a:buNone/>
+            </a:pPr>
+            <a:r>
+              <a:rPr sz="2000">
+                <a:hlinkClick r:id="rId2"/>
+              </a:rPr>
+              <a:t>jwilber.me/permutationtest</a:t>
+            </a:r>
+          </a:p>
+        </p:txBody>
+      </p:sp>
+    </p:spTree>
+  </p:cSld>
+</p:sld>
+</file>
+
+<file path=ppt/slides/slide29.xml><?xml version="1.0" encoding="utf-8"?>
+<p:sld xmlns:a="http://schemas.openxmlformats.org/drawingml/2006/main" xmlns:r="http://schemas.openxmlformats.org/officeDocument/2006/relationships" xmlns:p="http://schemas.openxmlformats.org/presentationml/2006/main">
+  <p:cSld>
+    <p:spTree>
+      <p:nvGrpSpPr>
+        <p:cNvPr id="1" name=""/>
+        <p:cNvGrpSpPr/>
+        <p:nvPr/>
+      </p:nvGrpSpPr>
+      <p:grpSpPr>
+        <a:xfrm>
+          <a:off x="0" y="0"/>
+          <a:ext cx="0" cy="0"/>
+          <a:chOff x="0" y="0"/>
+          <a:chExt cx="0" cy="0"/>
+        </a:xfrm>
+      </p:grpSpPr>
+      <p:sp>
+        <p:nvSpPr>
+          <p:cNvPr id="2" name="Title 1"/>
+          <p:cNvSpPr>
+            <a:spLocks noGrp="1"/>
+          </p:cNvSpPr>
+          <p:nvPr>
+            <p:ph type="title"/>
+          </p:nvPr>
+        </p:nvSpPr>
+        <p:spPr>
+          <a:xfrm>
+            <a:off x="0" y="0"/>
+            <a:ext cx="9144000" cy="602780"/>
+          </a:xfrm>
+          <a:solidFill>
+            <a:srgbClr val="70121D"/>
+          </a:solidFill>
+        </p:spPr>
+        <p:txBody>
+          <a:bodyPr/>
+          <a:lstStyle/>
+          <a:p>
+            <a:pPr lvl="0" indent="0" marL="0">
+              <a:buNone/>
+            </a:pPr>
+            <a:r>
+              <a:rPr/>
+              <a:t>Permutation Test Implementation</a:t>
+            </a:r>
+          </a:p>
+        </p:txBody>
+      </p:sp>
+      <p:sp>
+        <p:nvSpPr>
+          <p:cNvPr id="3" name="Content Placeholder 2"/>
+          <p:cNvSpPr>
+            <a:spLocks noGrp="1"/>
+          </p:cNvSpPr>
+          <p:nvPr>
+            <p:ph idx="1" sz="half"/>
+          </p:nvPr>
+        </p:nvSpPr>
+        <p:spPr/>
+        <p:txBody>
+          <a:bodyPr/>
+          <a:lstStyle/>
+          <a:p>
+            <a:pPr lvl="0" indent="0" marL="0">
+              <a:buNone/>
+            </a:pPr>
+            <a:r>
+              <a:rPr/>
+              <a:t>In R, using the </a:t>
+            </a:r>
+            <a:r>
+              <a:rPr>
+                <a:latin typeface="Courier"/>
+              </a:rPr>
+              <a:t>perm</a:t>
+            </a:r>
+            <a:r>
+              <a:rPr/>
+              <a:t> package. Assumptions: both groups have a similar distribution; equal variance.</a:t>
+            </a:r>
+          </a:p>
+          <a:p>
+            <a:pPr lvl="0" indent="0">
+              <a:buNone/>
+            </a:pPr>
+            <a:r>
+              <a:rPr>
+                <a:solidFill>
+                  <a:srgbClr val="4758AB"/>
+                </a:solidFill>
+                <a:latin typeface="Courier"/>
+              </a:rPr>
+              <a:t>library</a:t>
+            </a:r>
+            <a:r>
+              <a:rPr>
+                <a:solidFill>
+                  <a:srgbClr val="003B4F"/>
+                </a:solidFill>
+                <a:latin typeface="Courier"/>
+              </a:rPr>
+              <a:t>(perm)</a:t>
+            </a:r>
+            <a:br/>
+            <a:br/>
+            <a:r>
+              <a:rPr>
+                <a:solidFill>
+                  <a:srgbClr val="003B4F"/>
+                </a:solidFill>
+                <a:latin typeface="Courier"/>
+              </a:rPr>
+              <a:t>ne12_perm_data &lt;- isl_ne12_df </a:t>
+            </a:r>
+            <a:r>
+              <a:rPr>
+                <a:solidFill>
+                  <a:srgbClr val="5E5E5E"/>
+                </a:solidFill>
+                <a:latin typeface="Courier"/>
+              </a:rPr>
+              <a:t>%&gt;%</a:t>
+            </a:r>
+            <a:br/>
+            <a:r>
+              <a:rPr>
+                <a:solidFill>
+                  <a:srgbClr val="003B4F"/>
+                </a:solidFill>
+                <a:latin typeface="Courier"/>
+              </a:rPr>
+              <a:t>  </a:t>
+            </a:r>
+            <a:r>
+              <a:rPr>
+                <a:solidFill>
+                  <a:srgbClr val="4758AB"/>
+                </a:solidFill>
+                <a:latin typeface="Courier"/>
+              </a:rPr>
+              <a:t>filter</a:t>
+            </a:r>
+            <a:r>
+              <a:rPr>
+                <a:solidFill>
+                  <a:srgbClr val="003B4F"/>
+                </a:solidFill>
+                <a:latin typeface="Courier"/>
+              </a:rPr>
+              <a:t>(lake </a:t>
+            </a:r>
+            <a:r>
+              <a:rPr>
+                <a:solidFill>
+                  <a:srgbClr val="5E5E5E"/>
+                </a:solidFill>
+                <a:latin typeface="Courier"/>
+              </a:rPr>
+              <a:t>==</a:t>
+            </a:r>
+            <a:r>
+              <a:rPr>
+                <a:solidFill>
+                  <a:srgbClr val="003B4F"/>
+                </a:solidFill>
+                <a:latin typeface="Courier"/>
+              </a:rPr>
+              <a:t> </a:t>
+            </a:r>
+            <a:r>
+              <a:rPr>
+                <a:solidFill>
+                  <a:srgbClr val="20794D"/>
+                </a:solidFill>
+                <a:latin typeface="Courier"/>
+              </a:rPr>
+              <a:t>"NE 12"</a:t>
+            </a:r>
+            <a:r>
+              <a:rPr>
+                <a:solidFill>
+                  <a:srgbClr val="003B4F"/>
+                </a:solidFill>
+                <a:latin typeface="Courier"/>
+              </a:rPr>
+              <a:t>) </a:t>
+            </a:r>
+            <a:r>
+              <a:rPr>
+                <a:solidFill>
+                  <a:srgbClr val="5E5E5E"/>
+                </a:solidFill>
+                <a:latin typeface="Courier"/>
+              </a:rPr>
+              <a:t>%&gt;%</a:t>
+            </a:r>
+            <a:br/>
+            <a:r>
+              <a:rPr>
+                <a:solidFill>
+                  <a:srgbClr val="003B4F"/>
+                </a:solidFill>
+                <a:latin typeface="Courier"/>
+              </a:rPr>
+              <a:t>  </a:t>
+            </a:r>
+            <a:r>
+              <a:rPr>
+                <a:solidFill>
+                  <a:srgbClr val="4758AB"/>
+                </a:solidFill>
+                <a:latin typeface="Courier"/>
+              </a:rPr>
+              <a:t>pull</a:t>
+            </a:r>
+            <a:r>
+              <a:rPr>
+                <a:solidFill>
+                  <a:srgbClr val="003B4F"/>
+                </a:solidFill>
+                <a:latin typeface="Courier"/>
+              </a:rPr>
+              <a:t>(length_mm)</a:t>
+            </a:r>
+            <a:br/>
+            <a:br/>
+            <a:r>
+              <a:rPr>
+                <a:solidFill>
+                  <a:srgbClr val="5E5E5E"/>
+                </a:solidFill>
+                <a:latin typeface="Courier"/>
+              </a:rPr>
+              <a:t># Randomly sample exactly 25 observations from NE 12</a:t>
+            </a:r>
+            <a:br/>
+            <a:r>
+              <a:rPr>
+                <a:solidFill>
+                  <a:srgbClr val="4758AB"/>
+                </a:solidFill>
+                <a:latin typeface="Courier"/>
+              </a:rPr>
+              <a:t>set.seed</a:t>
+            </a:r>
+            <a:r>
+              <a:rPr>
+                <a:solidFill>
+                  <a:srgbClr val="003B4F"/>
+                </a:solidFill>
+                <a:latin typeface="Courier"/>
+              </a:rPr>
+              <a:t>(</a:t>
+            </a:r>
+            <a:r>
+              <a:rPr>
+                <a:solidFill>
+                  <a:srgbClr val="AD0000"/>
+                </a:solidFill>
+                <a:latin typeface="Courier"/>
+              </a:rPr>
+              <a:t>123</a:t>
+            </a:r>
+            <a:r>
+              <a:rPr>
+                <a:solidFill>
+                  <a:srgbClr val="003B4F"/>
+                </a:solidFill>
+                <a:latin typeface="Courier"/>
+              </a:rPr>
+              <a:t>)</a:t>
+            </a:r>
+            <a:br/>
+            <a:r>
+              <a:rPr>
+                <a:solidFill>
+                  <a:srgbClr val="003B4F"/>
+                </a:solidFill>
+                <a:latin typeface="Courier"/>
+              </a:rPr>
+              <a:t>ne12_perm_data &lt;- </a:t>
+            </a:r>
+            <a:r>
+              <a:rPr>
+                <a:solidFill>
+                  <a:srgbClr val="4758AB"/>
+                </a:solidFill>
+                <a:latin typeface="Courier"/>
+              </a:rPr>
+              <a:t>sample</a:t>
+            </a:r>
+            <a:r>
+              <a:rPr>
+                <a:solidFill>
+                  <a:srgbClr val="003B4F"/>
+                </a:solidFill>
+                <a:latin typeface="Courier"/>
+              </a:rPr>
+              <a:t>(ne12_perm_data, </a:t>
+            </a:r>
+            <a:r>
+              <a:rPr>
+                <a:solidFill>
+                  <a:srgbClr val="657422"/>
+                </a:solidFill>
+                <a:latin typeface="Courier"/>
+              </a:rPr>
+              <a:t>size =</a:t>
+            </a:r>
+            <a:r>
+              <a:rPr>
+                <a:solidFill>
+                  <a:srgbClr val="003B4F"/>
+                </a:solidFill>
+                <a:latin typeface="Courier"/>
+              </a:rPr>
+              <a:t> </a:t>
+            </a:r>
+            <a:r>
+              <a:rPr>
+                <a:solidFill>
+                  <a:srgbClr val="AD0000"/>
+                </a:solidFill>
+                <a:latin typeface="Courier"/>
+              </a:rPr>
+              <a:t>25</a:t>
+            </a:r>
+            <a:r>
+              <a:rPr>
+                <a:solidFill>
+                  <a:srgbClr val="003B4F"/>
+                </a:solidFill>
+                <a:latin typeface="Courier"/>
+              </a:rPr>
+              <a:t>, </a:t>
+            </a:r>
+            <a:r>
+              <a:rPr>
+                <a:solidFill>
+                  <a:srgbClr val="657422"/>
+                </a:solidFill>
+                <a:latin typeface="Courier"/>
+              </a:rPr>
+              <a:t>replace =</a:t>
+            </a:r>
+            <a:r>
+              <a:rPr>
+                <a:solidFill>
+                  <a:srgbClr val="003B4F"/>
+                </a:solidFill>
+                <a:latin typeface="Courier"/>
+              </a:rPr>
+              <a:t> </a:t>
+            </a:r>
+            <a:r>
+              <a:rPr>
+                <a:solidFill>
+                  <a:srgbClr val="8F5902"/>
+                </a:solidFill>
+                <a:latin typeface="Courier"/>
+              </a:rPr>
+              <a:t>FALSE</a:t>
+            </a:r>
+            <a:r>
+              <a:rPr>
+                <a:solidFill>
+                  <a:srgbClr val="003B4F"/>
+                </a:solidFill>
+                <a:latin typeface="Courier"/>
+              </a:rPr>
+              <a:t>)</a:t>
+            </a:r>
+            <a:br/>
+            <a:br/>
+            <a:r>
+              <a:rPr>
+                <a:solidFill>
+                  <a:srgbClr val="003B4F"/>
+                </a:solidFill>
+                <a:latin typeface="Courier"/>
+              </a:rPr>
+              <a:t>island_perm_data &lt;- isl_ne12_df </a:t>
+            </a:r>
+            <a:r>
+              <a:rPr>
+                <a:solidFill>
+                  <a:srgbClr val="5E5E5E"/>
+                </a:solidFill>
+                <a:latin typeface="Courier"/>
+              </a:rPr>
+              <a:t>%&gt;%</a:t>
+            </a:r>
+            <a:br/>
+            <a:r>
+              <a:rPr>
+                <a:solidFill>
+                  <a:srgbClr val="003B4F"/>
+                </a:solidFill>
+                <a:latin typeface="Courier"/>
+              </a:rPr>
+              <a:t>  </a:t>
+            </a:r>
+            <a:r>
+              <a:rPr>
+                <a:solidFill>
+                  <a:srgbClr val="4758AB"/>
+                </a:solidFill>
+                <a:latin typeface="Courier"/>
+              </a:rPr>
+              <a:t>filter</a:t>
+            </a:r>
+            <a:r>
+              <a:rPr>
+                <a:solidFill>
+                  <a:srgbClr val="003B4F"/>
+                </a:solidFill>
+                <a:latin typeface="Courier"/>
+              </a:rPr>
+              <a:t>(lake </a:t>
+            </a:r>
+            <a:r>
+              <a:rPr>
+                <a:solidFill>
+                  <a:srgbClr val="5E5E5E"/>
+                </a:solidFill>
+                <a:latin typeface="Courier"/>
+              </a:rPr>
+              <a:t>==</a:t>
+            </a:r>
+            <a:r>
+              <a:rPr>
+                <a:solidFill>
+                  <a:srgbClr val="003B4F"/>
+                </a:solidFill>
+                <a:latin typeface="Courier"/>
+              </a:rPr>
+              <a:t> </a:t>
+            </a:r>
+            <a:r>
+              <a:rPr>
+                <a:solidFill>
+                  <a:srgbClr val="20794D"/>
+                </a:solidFill>
+                <a:latin typeface="Courier"/>
+              </a:rPr>
+              <a:t>"Island Lake"</a:t>
+            </a:r>
+            <a:r>
+              <a:rPr>
+                <a:solidFill>
+                  <a:srgbClr val="003B4F"/>
+                </a:solidFill>
+                <a:latin typeface="Courier"/>
+              </a:rPr>
+              <a:t>) </a:t>
+            </a:r>
+            <a:r>
+              <a:rPr>
+                <a:solidFill>
+                  <a:srgbClr val="5E5E5E"/>
+                </a:solidFill>
+                <a:latin typeface="Courier"/>
+              </a:rPr>
+              <a:t>%&gt;%</a:t>
+            </a:r>
+            <a:br/>
+            <a:r>
+              <a:rPr>
+                <a:solidFill>
+                  <a:srgbClr val="003B4F"/>
+                </a:solidFill>
+                <a:latin typeface="Courier"/>
+              </a:rPr>
+              <a:t>  </a:t>
+            </a:r>
+            <a:r>
+              <a:rPr>
+                <a:solidFill>
+                  <a:srgbClr val="4758AB"/>
+                </a:solidFill>
+                <a:latin typeface="Courier"/>
+              </a:rPr>
+              <a:t>pull</a:t>
+            </a:r>
+            <a:r>
+              <a:rPr>
+                <a:solidFill>
+                  <a:srgbClr val="003B4F"/>
+                </a:solidFill>
+                <a:latin typeface="Courier"/>
+              </a:rPr>
+              <a:t>(length_mm)</a:t>
+            </a:r>
+            <a:br/>
+            <a:br/>
+            <a:r>
+              <a:rPr>
+                <a:solidFill>
+                  <a:srgbClr val="003B4F"/>
+                </a:solidFill>
+                <a:latin typeface="Courier"/>
+              </a:rPr>
+              <a:t>observed_diff &lt;- </a:t>
+            </a:r>
+            <a:r>
+              <a:rPr>
+                <a:solidFill>
+                  <a:srgbClr val="4758AB"/>
+                </a:solidFill>
+                <a:latin typeface="Courier"/>
+              </a:rPr>
+              <a:t>mean</a:t>
+            </a:r>
+            <a:r>
+              <a:rPr>
+                <a:solidFill>
+                  <a:srgbClr val="003B4F"/>
+                </a:solidFill>
+                <a:latin typeface="Courier"/>
+              </a:rPr>
+              <a:t>(ne12_perm_data, </a:t>
+            </a:r>
+            <a:r>
+              <a:rPr>
+                <a:solidFill>
+                  <a:srgbClr val="657422"/>
+                </a:solidFill>
+                <a:latin typeface="Courier"/>
+              </a:rPr>
+              <a:t>na.rm =</a:t>
+            </a:r>
+            <a:r>
+              <a:rPr>
+                <a:solidFill>
+                  <a:srgbClr val="003B4F"/>
+                </a:solidFill>
+                <a:latin typeface="Courier"/>
+              </a:rPr>
+              <a:t> </a:t>
+            </a:r>
+            <a:r>
+              <a:rPr>
+                <a:solidFill>
+                  <a:srgbClr val="8F5902"/>
+                </a:solidFill>
+                <a:latin typeface="Courier"/>
+              </a:rPr>
+              <a:t>TRUE</a:t>
+            </a:r>
+            <a:r>
+              <a:rPr>
+                <a:solidFill>
+                  <a:srgbClr val="003B4F"/>
+                </a:solidFill>
+                <a:latin typeface="Courier"/>
+              </a:rPr>
+              <a:t>) </a:t>
+            </a:r>
+            <a:r>
+              <a:rPr>
+                <a:solidFill>
+                  <a:srgbClr val="5E5E5E"/>
+                </a:solidFill>
+                <a:latin typeface="Courier"/>
+              </a:rPr>
+              <a:t>-</a:t>
+            </a:r>
+            <a:r>
+              <a:rPr>
+                <a:solidFill>
+                  <a:srgbClr val="003B4F"/>
+                </a:solidFill>
+                <a:latin typeface="Courier"/>
+              </a:rPr>
+              <a:t> </a:t>
+            </a:r>
+            <a:r>
+              <a:rPr>
+                <a:solidFill>
+                  <a:srgbClr val="4758AB"/>
+                </a:solidFill>
+                <a:latin typeface="Courier"/>
+              </a:rPr>
+              <a:t>mean</a:t>
+            </a:r>
+            <a:r>
+              <a:rPr>
+                <a:solidFill>
+                  <a:srgbClr val="003B4F"/>
+                </a:solidFill>
+                <a:latin typeface="Courier"/>
+              </a:rPr>
+              <a:t>(island_perm_data, </a:t>
+            </a:r>
+            <a:r>
+              <a:rPr>
+                <a:solidFill>
+                  <a:srgbClr val="657422"/>
+                </a:solidFill>
+                <a:latin typeface="Courier"/>
+              </a:rPr>
+              <a:t>na.rm =</a:t>
+            </a:r>
+            <a:r>
+              <a:rPr>
+                <a:solidFill>
+                  <a:srgbClr val="003B4F"/>
+                </a:solidFill>
+                <a:latin typeface="Courier"/>
+              </a:rPr>
+              <a:t> </a:t>
+            </a:r>
+            <a:r>
+              <a:rPr>
+                <a:solidFill>
+                  <a:srgbClr val="8F5902"/>
+                </a:solidFill>
+                <a:latin typeface="Courier"/>
+              </a:rPr>
+              <a:t>TRUE</a:t>
+            </a:r>
+            <a:r>
+              <a:rPr>
+                <a:solidFill>
+                  <a:srgbClr val="003B4F"/>
+                </a:solidFill>
+                <a:latin typeface="Courier"/>
+              </a:rPr>
+              <a:t>)</a:t>
+            </a:r>
+          </a:p>
+        </p:txBody>
+      </p:sp>
+      <p:sp>
+        <p:nvSpPr>
+          <p:cNvPr id="4" name="Content Placeholder 3"/>
+          <p:cNvSpPr>
+            <a:spLocks noGrp="1"/>
+          </p:cNvSpPr>
+          <p:nvPr>
+            <p:ph idx="2" sz="half"/>
+          </p:nvPr>
+        </p:nvSpPr>
+        <p:spPr/>
+        <p:txBody>
+          <a:bodyPr/>
+          <a:lstStyle/>
+          <a:p>
+            <a:pPr lvl="0" indent="0">
+              <a:buNone/>
+            </a:pPr>
+            <a:r>
+              <a:rPr>
+                <a:solidFill>
+                  <a:srgbClr val="4758AB"/>
+                </a:solidFill>
+                <a:latin typeface="Courier"/>
+              </a:rPr>
+              <a:t>permTS</a:t>
+            </a:r>
+            <a:r>
+              <a:rPr>
+                <a:solidFill>
+                  <a:srgbClr val="003B4F"/>
+                </a:solidFill>
+                <a:latin typeface="Courier"/>
+              </a:rPr>
+              <a:t>(ne12_perm_data, island_perm_data,</a:t>
+            </a:r>
+            <a:br/>
+            <a:r>
+              <a:rPr>
+                <a:solidFill>
+                  <a:srgbClr val="003B4F"/>
+                </a:solidFill>
+                <a:latin typeface="Courier"/>
+              </a:rPr>
+              <a:t>       </a:t>
+            </a:r>
+            <a:r>
+              <a:rPr>
+                <a:solidFill>
+                  <a:srgbClr val="657422"/>
+                </a:solidFill>
+                <a:latin typeface="Courier"/>
+              </a:rPr>
+              <a:t>alternative =</a:t>
+            </a:r>
+            <a:r>
+              <a:rPr>
+                <a:solidFill>
+                  <a:srgbClr val="003B4F"/>
+                </a:solidFill>
+                <a:latin typeface="Courier"/>
+              </a:rPr>
+              <a:t> </a:t>
+            </a:r>
+            <a:r>
+              <a:rPr>
+                <a:solidFill>
+                  <a:srgbClr val="20794D"/>
+                </a:solidFill>
+                <a:latin typeface="Courier"/>
+              </a:rPr>
+              <a:t>"two.sided"</a:t>
+            </a:r>
+            <a:r>
+              <a:rPr>
+                <a:solidFill>
+                  <a:srgbClr val="003B4F"/>
+                </a:solidFill>
+                <a:latin typeface="Courier"/>
+              </a:rPr>
+              <a:t>,</a:t>
+            </a:r>
+            <a:br/>
+            <a:r>
+              <a:rPr>
+                <a:solidFill>
+                  <a:srgbClr val="003B4F"/>
+                </a:solidFill>
+                <a:latin typeface="Courier"/>
+              </a:rPr>
+              <a:t>       </a:t>
+            </a:r>
+            <a:r>
+              <a:rPr>
+                <a:solidFill>
+                  <a:srgbClr val="657422"/>
+                </a:solidFill>
+                <a:latin typeface="Courier"/>
+              </a:rPr>
+              <a:t>method =</a:t>
+            </a:r>
+            <a:r>
+              <a:rPr>
+                <a:solidFill>
+                  <a:srgbClr val="003B4F"/>
+                </a:solidFill>
+                <a:latin typeface="Courier"/>
+              </a:rPr>
+              <a:t> </a:t>
+            </a:r>
+            <a:r>
+              <a:rPr>
+                <a:solidFill>
+                  <a:srgbClr val="20794D"/>
+                </a:solidFill>
+                <a:latin typeface="Courier"/>
+              </a:rPr>
+              <a:t>"exact.mc"</a:t>
+            </a:r>
+            <a:r>
+              <a:rPr>
+                <a:solidFill>
+                  <a:srgbClr val="003B4F"/>
+                </a:solidFill>
+                <a:latin typeface="Courier"/>
+              </a:rPr>
+              <a:t>,</a:t>
+            </a:r>
+            <a:br/>
+            <a:r>
+              <a:rPr>
+                <a:solidFill>
+                  <a:srgbClr val="003B4F"/>
+                </a:solidFill>
+                <a:latin typeface="Courier"/>
+              </a:rPr>
+              <a:t>       </a:t>
+            </a:r>
+            <a:r>
+              <a:rPr>
+                <a:solidFill>
+                  <a:srgbClr val="657422"/>
+                </a:solidFill>
+                <a:latin typeface="Courier"/>
+              </a:rPr>
+              <a:t>control =</a:t>
+            </a:r>
+            <a:r>
+              <a:rPr>
+                <a:solidFill>
+                  <a:srgbClr val="003B4F"/>
+                </a:solidFill>
+                <a:latin typeface="Courier"/>
+              </a:rPr>
+              <a:t> </a:t>
+            </a:r>
+            <a:r>
+              <a:rPr>
+                <a:solidFill>
+                  <a:srgbClr val="4758AB"/>
+                </a:solidFill>
+                <a:latin typeface="Courier"/>
+              </a:rPr>
+              <a:t>permControl</a:t>
+            </a:r>
+            <a:r>
+              <a:rPr>
+                <a:solidFill>
+                  <a:srgbClr val="003B4F"/>
+                </a:solidFill>
+                <a:latin typeface="Courier"/>
+              </a:rPr>
+              <a:t>(</a:t>
+            </a:r>
+            <a:r>
+              <a:rPr>
+                <a:solidFill>
+                  <a:srgbClr val="657422"/>
+                </a:solidFill>
+                <a:latin typeface="Courier"/>
+              </a:rPr>
+              <a:t>nmc =</a:t>
+            </a:r>
+            <a:r>
+              <a:rPr>
+                <a:solidFill>
+                  <a:srgbClr val="003B4F"/>
+                </a:solidFill>
+                <a:latin typeface="Courier"/>
+              </a:rPr>
+              <a:t> </a:t>
+            </a:r>
+            <a:r>
+              <a:rPr>
+                <a:solidFill>
+                  <a:srgbClr val="AD0000"/>
+                </a:solidFill>
+                <a:latin typeface="Courier"/>
+              </a:rPr>
+              <a:t>10000</a:t>
+            </a:r>
+            <a:r>
+              <a:rPr>
+                <a:solidFill>
+                  <a:srgbClr val="003B4F"/>
+                </a:solidFill>
+                <a:latin typeface="Courier"/>
+              </a:rPr>
+              <a:t>))</a:t>
+            </a:r>
+          </a:p>
+          <a:p>
+            <a:pPr lvl="0" indent="0">
+              <a:buNone/>
+            </a:pPr>
+            <a:r>
+              <a:rPr>
+                <a:latin typeface="Courier"/>
+              </a:rPr>
+              <a:t>
+    Exact Permutation Test Estimated by Monte Carlo
+data:  GROUP 1 and GROUP 2
+p-value = 2e-04
+alternative hypothesis: true mean GROUP 1 - mean GROUP 2 is not equal to 0
+sample estimates:
+mean GROUP 1 - mean GROUP 2 
+                    -333.08 
+p-value estimated from 10000 Monte Carlo replications
+99 percent confidence interval on p-value:
+ 0.000000000 0.001059383 </a:t>
             </a:r>
           </a:p>
         </p:txBody>
@@ -6270,7 +6871,7 @@
             </a:pPr>
             <a:r>
               <a:rPr/>
-              <a:t>Lecture 7 overview</a:t>
+              <a:t>Today’s Overview</a:t>
             </a:r>
           </a:p>
         </p:txBody>
@@ -6302,14 +6903,14 @@
             <a:pPr lvl="0"/>
             <a:r>
               <a:rPr/>
-              <a:t>What are the assumptions again and how do you assess them</a:t>
+              <a:t>What are the assumptions again, and how do you assess them?</a:t>
             </a:r>
           </a:p>
           <a:p>
             <a:pPr lvl="0"/>
             <a:r>
               <a:rPr/>
-              <a:t>What to do when assumptions fail</a:t>
+              <a:t>What to do when assumptions fail:</a:t>
             </a:r>
           </a:p>
           <a:p>
@@ -6355,25 +6956,7 @@
             </a:pPr>
             <a:r>
               <a:rPr/>
-              <a:t>Lets work with the Lake Trout data as the weights are pretty cool and the assumptions may or may not hold</a:t>
-            </a:r>
-          </a:p>
-          <a:p>
-            <a:pPr lvl="0" indent="0" marL="0">
-              <a:buNone/>
-            </a:pPr>
-            <a:r>
-              <a:rPr/>
-              <a:t>This is easily translated into any of the other dataframes you might want to use</a:t>
-            </a:r>
-          </a:p>
-          <a:p>
-            <a:pPr lvl="0" indent="0" marL="0">
-              <a:buNone/>
-            </a:pPr>
-            <a:r>
-              <a:rPr/>
-              <a:t>lake trout</a:t>
+              <a:t>Let’s work with the lake trout data, as the weights are pretty cool and the assumptions may or may not hold. This easily translates to any of the other data frames you might want to use.</a:t>
             </a:r>
           </a:p>
         </p:txBody>
@@ -6413,6 +6996,995 @@
 </p:sld>
 </file>
 
+<file path=ppt/slides/slide30.xml><?xml version="1.0" encoding="utf-8"?>
+<p:sld xmlns:a="http://schemas.openxmlformats.org/drawingml/2006/main" xmlns:r="http://schemas.openxmlformats.org/officeDocument/2006/relationships" xmlns:p="http://schemas.openxmlformats.org/presentationml/2006/main">
+  <p:cSld>
+    <p:spTree>
+      <p:nvGrpSpPr>
+        <p:cNvPr id="1" name=""/>
+        <p:cNvGrpSpPr/>
+        <p:nvPr/>
+      </p:nvGrpSpPr>
+      <p:grpSpPr>
+        <a:xfrm>
+          <a:off x="0" y="0"/>
+          <a:ext cx="0" cy="0"/>
+          <a:chOff x="0" y="0"/>
+          <a:chExt cx="0" cy="0"/>
+        </a:xfrm>
+      </p:grpSpPr>
+      <p:sp>
+        <p:nvSpPr>
+          <p:cNvPr id="2" name="Title 1"/>
+          <p:cNvSpPr>
+            <a:spLocks noGrp="1"/>
+          </p:cNvSpPr>
+          <p:nvPr>
+            <p:ph type="title"/>
+          </p:nvPr>
+        </p:nvSpPr>
+        <p:spPr>
+          <a:xfrm>
+            <a:off x="0" y="0"/>
+            <a:ext cx="9144000" cy="582780"/>
+          </a:xfrm>
+        </p:spPr>
+        <p:txBody>
+          <a:bodyPr/>
+          <a:lstStyle/>
+          <a:p>
+            <a:pPr lvl="0" indent="0" marL="0">
+              <a:buNone/>
+            </a:pPr>
+            <a:r>
+              <a:rPr/>
+              <a:t>Part 7 · Summary</a:t>
+            </a:r>
+          </a:p>
+        </p:txBody>
+      </p:sp>
+    </p:spTree>
+  </p:cSld>
+</p:sld>
+</file>
+
+<file path=ppt/slides/slide31.xml><?xml version="1.0" encoding="utf-8"?>
+<p:sld xmlns:a="http://schemas.openxmlformats.org/drawingml/2006/main" xmlns:r="http://schemas.openxmlformats.org/officeDocument/2006/relationships" xmlns:p="http://schemas.openxmlformats.org/presentationml/2006/main">
+  <p:cSld>
+    <p:spTree>
+      <p:nvGrpSpPr>
+        <p:cNvPr id="1" name=""/>
+        <p:cNvGrpSpPr/>
+        <p:nvPr/>
+      </p:nvGrpSpPr>
+      <p:grpSpPr>
+        <a:xfrm>
+          <a:off x="0" y="0"/>
+          <a:ext cx="0" cy="0"/>
+          <a:chOff x="0" y="0"/>
+          <a:chExt cx="0" cy="0"/>
+        </a:xfrm>
+      </p:grpSpPr>
+      <p:sp>
+        <p:nvSpPr>
+          <p:cNvPr id="2" name="Title 1"/>
+          <p:cNvSpPr>
+            <a:spLocks noGrp="1"/>
+          </p:cNvSpPr>
+          <p:nvPr>
+            <p:ph type="title"/>
+          </p:nvPr>
+        </p:nvSpPr>
+        <p:spPr>
+          <a:xfrm>
+            <a:off x="0" y="0"/>
+            <a:ext cx="9144000" cy="602780"/>
+          </a:xfrm>
+          <a:solidFill>
+            <a:srgbClr val="70121D"/>
+          </a:solidFill>
+        </p:spPr>
+        <p:txBody>
+          <a:bodyPr/>
+          <a:lstStyle/>
+          <a:p>
+            <a:pPr lvl="0" indent="0" marL="0">
+              <a:buNone/>
+            </a:pPr>
+            <a:r>
+              <a:rPr/>
+              <a:t>Summary — Testing Assumptions</a:t>
+            </a:r>
+          </a:p>
+        </p:txBody>
+      </p:sp>
+      <p:sp>
+        <p:nvSpPr>
+          <p:cNvPr id="3" name="Content Placeholder 2"/>
+          <p:cNvSpPr>
+            <a:spLocks noGrp="1"/>
+          </p:cNvSpPr>
+          <p:nvPr>
+            <p:ph idx="1" sz="half"/>
+          </p:nvPr>
+        </p:nvSpPr>
+        <p:spPr/>
+        <p:txBody>
+          <a:bodyPr/>
+          <a:lstStyle/>
+          <a:p>
+            <a:pPr lvl="0" indent="0" marL="0">
+              <a:buNone/>
+            </a:pPr>
+            <a:r>
+              <a:rPr b="1"/>
+              <a:t>Key assumptions:</a:t>
+            </a:r>
+          </a:p>
+          <a:p>
+            <a:pPr lvl="0"/>
+            <a:r>
+              <a:rPr b="1"/>
+              <a:t>Random sampling</a:t>
+            </a:r>
+            <a:r>
+              <a:rPr/>
+              <a:t> — samples are randomly collected from populations</a:t>
+            </a:r>
+          </a:p>
+          <a:p>
+            <a:pPr lvl="0"/>
+            <a:r>
+              <a:rPr b="1"/>
+              <a:t>Normality</a:t>
+            </a:r>
+            <a:r>
+              <a:rPr/>
+              <a:t> — data follows a normal distribution</a:t>
+            </a:r>
+          </a:p>
+          <a:p>
+            <a:pPr lvl="0"/>
+            <a:r>
+              <a:rPr b="1"/>
+              <a:t>Equal variance</a:t>
+            </a:r>
+            <a:r>
+              <a:rPr/>
+              <a:t> — samples come from populations with similar variability</a:t>
+            </a:r>
+          </a:p>
+          <a:p>
+            <a:pPr lvl="0"/>
+            <a:r>
+              <a:rPr b="1"/>
+              <a:t>No outliers</a:t>
+            </a:r>
+            <a:r>
+              <a:rPr/>
+              <a:t> — no extreme values that can skew results</a:t>
+            </a:r>
+          </a:p>
+        </p:txBody>
+      </p:sp>
+      <p:sp>
+        <p:nvSpPr>
+          <p:cNvPr id="4" name="Content Placeholder 3"/>
+          <p:cNvSpPr>
+            <a:spLocks noGrp="1"/>
+          </p:cNvSpPr>
+          <p:nvPr>
+            <p:ph idx="2" sz="half"/>
+          </p:nvPr>
+        </p:nvSpPr>
+        <p:spPr/>
+        <p:txBody>
+          <a:bodyPr/>
+          <a:lstStyle/>
+          <a:p>
+            <a:pPr lvl="0" indent="0" marL="1270000">
+              <a:buNone/>
+            </a:pPr>
+            <a:r>
+              <a:rPr sz="2000" b="1"/>
+              <a:t>Note</a:t>
+            </a:r>
+          </a:p>
+          <a:p>
+            <a:pPr lvl="0" indent="0" marL="1270000">
+              <a:buNone/>
+            </a:pPr>
+            <a:r>
+              <a:rPr sz="2000" b="1"/>
+              <a:t>Assessing assumptions</a:t>
+            </a:r>
+          </a:p>
+          <a:p>
+            <a:pPr lvl="0"/>
+            <a:r>
+              <a:rPr sz="2000"/>
+              <a:t>Key to do </a:t>
+            </a:r>
+            <a:r>
+              <a:rPr sz="2000" i="1"/>
+              <a:t>every time</a:t>
+            </a:r>
+          </a:p>
+          <a:p>
+            <a:pPr lvl="0"/>
+            <a:r>
+              <a:rPr sz="2000"/>
+              <a:t>Should be acknowledged in the manuscript</a:t>
+            </a:r>
+          </a:p>
+        </p:txBody>
+      </p:sp>
+    </p:spTree>
+  </p:cSld>
+</p:sld>
+</file>
+
+<file path=ppt/slides/slide32.xml><?xml version="1.0" encoding="utf-8"?>
+<p:sld xmlns:a="http://schemas.openxmlformats.org/drawingml/2006/main" xmlns:r="http://schemas.openxmlformats.org/officeDocument/2006/relationships" xmlns:p="http://schemas.openxmlformats.org/presentationml/2006/main">
+  <p:cSld>
+    <p:spTree>
+      <p:nvGrpSpPr>
+        <p:cNvPr id="1" name=""/>
+        <p:cNvGrpSpPr/>
+        <p:nvPr/>
+      </p:nvGrpSpPr>
+      <p:grpSpPr>
+        <a:xfrm>
+          <a:off x="0" y="0"/>
+          <a:ext cx="0" cy="0"/>
+          <a:chOff x="0" y="0"/>
+          <a:chExt cx="0" cy="0"/>
+        </a:xfrm>
+      </p:grpSpPr>
+      <p:sp>
+        <p:nvSpPr>
+          <p:cNvPr id="2" name="Title 1"/>
+          <p:cNvSpPr>
+            <a:spLocks noGrp="1"/>
+          </p:cNvSpPr>
+          <p:nvPr>
+            <p:ph type="title"/>
+          </p:nvPr>
+        </p:nvSpPr>
+        <p:spPr>
+          <a:xfrm>
+            <a:off x="0" y="0"/>
+            <a:ext cx="9144000" cy="602780"/>
+          </a:xfrm>
+          <a:solidFill>
+            <a:srgbClr val="70121D"/>
+          </a:solidFill>
+        </p:spPr>
+        <p:txBody>
+          <a:bodyPr/>
+          <a:lstStyle/>
+          <a:p>
+            <a:pPr lvl="0" indent="0" marL="0">
+              <a:buNone/>
+            </a:pPr>
+            <a:r>
+              <a:rPr/>
+              <a:t>Summary — Data Transformations</a:t>
+            </a:r>
+          </a:p>
+        </p:txBody>
+      </p:sp>
+      <p:sp>
+        <p:nvSpPr>
+          <p:cNvPr id="3" name="Content Placeholder 2"/>
+          <p:cNvSpPr>
+            <a:spLocks noGrp="1"/>
+          </p:cNvSpPr>
+          <p:nvPr>
+            <p:ph idx="1" sz="half"/>
+          </p:nvPr>
+        </p:nvSpPr>
+        <p:spPr/>
+        <p:txBody>
+          <a:bodyPr/>
+          <a:lstStyle/>
+          <a:p>
+            <a:pPr lvl="0" indent="0" marL="0">
+              <a:buNone/>
+            </a:pPr>
+            <a:r>
+              <a:rPr/>
+              <a:t>When assumptions aren’t met, transformations may help normalize data:</a:t>
+            </a:r>
+          </a:p>
+          <a:p>
+            <a:pPr lvl="0"/>
+            <a:r>
+              <a:rPr b="1"/>
+              <a:t>Log transformation:</a:t>
+            </a:r>
+            <a:r>
+              <a:rPr/>
+              <a:t> </a:t>
+            </a:r>
+            <a:r>
+              <a:rPr>
+                <a:latin typeface="Courier"/>
+              </a:rPr>
+              <a:t>log10(x)</a:t>
+            </a:r>
+            <a:r>
+              <a:rPr/>
+              <a:t> — useful for right-skewed data, multiplicative effects</a:t>
+            </a:r>
+          </a:p>
+          <a:p>
+            <a:pPr lvl="0"/>
+            <a:r>
+              <a:rPr b="1"/>
+              <a:t>Square root:</a:t>
+            </a:r>
+            <a:r>
+              <a:rPr/>
+              <a:t> </a:t>
+            </a:r>
+            <a:r>
+              <a:rPr>
+                <a:latin typeface="Courier"/>
+              </a:rPr>
+              <a:t>sqrt(x)</a:t>
+            </a:r>
+            <a:r>
+              <a:rPr/>
+              <a:t> — useful for count data, moderately right-skewed distributions</a:t>
+            </a:r>
+          </a:p>
+          <a:p>
+            <a:pPr lvl="0"/>
+            <a:r>
+              <a:rPr b="1"/>
+              <a:t>Box-Cox:</a:t>
+            </a:r>
+            <a:r>
+              <a:rPr/>
+              <a:t> a more flexible family of power transformations</a:t>
+            </a:r>
+          </a:p>
+          <a:p>
+            <a:pPr lvl="0"/>
+            <a:r>
+              <a:rPr/>
+              <a:t>More specialized transformations exist, especially for percentages or proportions</a:t>
+            </a:r>
+          </a:p>
+        </p:txBody>
+      </p:sp>
+      <p:sp>
+        <p:nvSpPr>
+          <p:cNvPr id="4" name="Content Placeholder 3"/>
+          <p:cNvSpPr>
+            <a:spLocks noGrp="1"/>
+          </p:cNvSpPr>
+          <p:nvPr>
+            <p:ph idx="2" sz="half"/>
+          </p:nvPr>
+        </p:nvSpPr>
+        <p:spPr/>
+        <p:txBody>
+          <a:bodyPr/>
+          <a:lstStyle/>
+          <a:p>
+            <a:pPr lvl="0" indent="0" marL="1270000">
+              <a:buNone/>
+            </a:pPr>
+            <a:r>
+              <a:rPr sz="2000" b="1"/>
+              <a:t>Tip</a:t>
+            </a:r>
+          </a:p>
+          <a:p>
+            <a:pPr lvl="0" indent="0" marL="1270000">
+              <a:buNone/>
+            </a:pPr>
+            <a:r>
+              <a:rPr sz="2000" b="1"/>
+              <a:t>🖐 Recall</a:t>
+            </a:r>
+          </a:p>
+          <a:p>
+            <a:pPr lvl="0" indent="0" marL="1270000">
+              <a:buNone/>
+            </a:pPr>
+            <a:r>
+              <a:rPr sz="2000"/>
+              <a:t>We saw </a:t>
+            </a:r>
+            <a:r>
+              <a:rPr sz="2000">
+                <a:latin typeface="Courier"/>
+              </a:rPr>
+              <a:t>log10()</a:t>
+            </a:r>
+            <a:r>
+              <a:rPr sz="2000"/>
+              <a:t> shrink the gap between the NE 12 and Island Lake boxplots earlier — that’s the transformation working.</a:t>
+            </a:r>
+          </a:p>
+        </p:txBody>
+      </p:sp>
+    </p:spTree>
+  </p:cSld>
+</p:sld>
+</file>
+
+<file path=ppt/slides/slide33.xml><?xml version="1.0" encoding="utf-8"?>
+<p:sld xmlns:a="http://schemas.openxmlformats.org/drawingml/2006/main" xmlns:r="http://schemas.openxmlformats.org/officeDocument/2006/relationships" xmlns:p="http://schemas.openxmlformats.org/presentationml/2006/main">
+  <p:cSld>
+    <p:spTree>
+      <p:nvGrpSpPr>
+        <p:cNvPr id="1" name=""/>
+        <p:cNvGrpSpPr/>
+        <p:nvPr/>
+      </p:nvGrpSpPr>
+      <p:grpSpPr>
+        <a:xfrm>
+          <a:off x="0" y="0"/>
+          <a:ext cx="0" cy="0"/>
+          <a:chOff x="0" y="0"/>
+          <a:chExt cx="0" cy="0"/>
+        </a:xfrm>
+      </p:grpSpPr>
+      <p:sp>
+        <p:nvSpPr>
+          <p:cNvPr id="2" name="Title 1"/>
+          <p:cNvSpPr>
+            <a:spLocks noGrp="1"/>
+          </p:cNvSpPr>
+          <p:nvPr>
+            <p:ph type="title"/>
+          </p:nvPr>
+        </p:nvSpPr>
+        <p:spPr>
+          <a:xfrm>
+            <a:off x="0" y="0"/>
+            <a:ext cx="9144000" cy="602780"/>
+          </a:xfrm>
+          <a:solidFill>
+            <a:srgbClr val="70121D"/>
+          </a:solidFill>
+        </p:spPr>
+        <p:txBody>
+          <a:bodyPr/>
+          <a:lstStyle/>
+          <a:p>
+            <a:pPr lvl="0" indent="0" marL="0">
+              <a:buNone/>
+            </a:pPr>
+            <a:r>
+              <a:rPr/>
+              <a:t>Summary — Parametric Test Options</a:t>
+            </a:r>
+          </a:p>
+        </p:txBody>
+      </p:sp>
+      <p:sp>
+        <p:nvSpPr>
+          <p:cNvPr id="3" name="Content Placeholder 2"/>
+          <p:cNvSpPr>
+            <a:spLocks noGrp="1"/>
+          </p:cNvSpPr>
+          <p:nvPr>
+            <p:ph idx="1" sz="half"/>
+          </p:nvPr>
+        </p:nvSpPr>
+        <p:spPr/>
+        <p:txBody>
+          <a:bodyPr/>
+          <a:lstStyle/>
+          <a:p>
+            <a:pPr lvl="0" indent="0" marL="0">
+              <a:buNone/>
+            </a:pPr>
+            <a:r>
+              <a:rPr b="1"/>
+              <a:t>1. Standard t-test</a:t>
+            </a:r>
+          </a:p>
+          <a:p>
+            <a:pPr lvl="0" indent="0" marL="0">
+              <a:buNone/>
+            </a:pPr>
+            <a:r>
+              <a:rPr/>
+              <a:t>Strengths:</a:t>
+            </a:r>
+          </a:p>
+          <a:p>
+            <a:pPr lvl="0"/>
+            <a:r>
+              <a:rPr/>
+              <a:t>High statistical power when assumptions are met</a:t>
+            </a:r>
+          </a:p>
+          <a:p>
+            <a:pPr lvl="0"/>
+            <a:r>
+              <a:rPr/>
+              <a:t>Well understood and widely accepted</a:t>
+            </a:r>
+          </a:p>
+          <a:p>
+            <a:pPr lvl="0" indent="0" marL="0">
+              <a:buNone/>
+            </a:pPr>
+            <a:r>
+              <a:rPr/>
+              <a:t>Weaknesses:</a:t>
+            </a:r>
+          </a:p>
+          <a:p>
+            <a:pPr lvl="0"/>
+            <a:r>
+              <a:rPr/>
+              <a:t>Sensitive to violations of normality, equal variance</a:t>
+            </a:r>
+          </a:p>
+          <a:p>
+            <a:pPr lvl="0"/>
+            <a:r>
+              <a:rPr/>
+              <a:t>Heavily influenced by outliers</a:t>
+            </a:r>
+          </a:p>
+        </p:txBody>
+      </p:sp>
+      <p:sp>
+        <p:nvSpPr>
+          <p:cNvPr id="4" name="Content Placeholder 3"/>
+          <p:cNvSpPr>
+            <a:spLocks noGrp="1"/>
+          </p:cNvSpPr>
+          <p:nvPr>
+            <p:ph idx="2" sz="half"/>
+          </p:nvPr>
+        </p:nvSpPr>
+        <p:spPr/>
+        <p:txBody>
+          <a:bodyPr/>
+          <a:lstStyle/>
+          <a:p>
+            <a:pPr lvl="0" indent="0" marL="0">
+              <a:buNone/>
+            </a:pPr>
+            <a:r>
+              <a:rPr b="1"/>
+              <a:t>2. Welch’s t-test</a:t>
+            </a:r>
+          </a:p>
+          <a:p>
+            <a:pPr lvl="0" indent="0" marL="0">
+              <a:buNone/>
+            </a:pPr>
+            <a:r>
+              <a:rPr/>
+              <a:t>Strengths:</a:t>
+            </a:r>
+          </a:p>
+          <a:p>
+            <a:pPr lvl="0"/>
+            <a:r>
+              <a:rPr/>
+              <a:t>Robust to violations of the equal-variance assumption</a:t>
+            </a:r>
+          </a:p>
+          <a:p>
+            <a:pPr lvl="0"/>
+            <a:r>
+              <a:rPr/>
+              <a:t>Handles unequal sample sizes well</a:t>
+            </a:r>
+          </a:p>
+          <a:p>
+            <a:pPr lvl="0"/>
+            <a:r>
+              <a:rPr/>
+              <a:t>Still parametric (assumes normality)</a:t>
+            </a:r>
+          </a:p>
+          <a:p>
+            <a:pPr lvl="0" indent="0" marL="0">
+              <a:buNone/>
+            </a:pPr>
+            <a:r>
+              <a:rPr/>
+              <a:t>Weaknesses:</a:t>
+            </a:r>
+          </a:p>
+          <a:p>
+            <a:pPr lvl="0"/>
+            <a:r>
+              <a:rPr/>
+              <a:t>Slightly less powerful than the standard t-test when variances are equal</a:t>
+            </a:r>
+          </a:p>
+          <a:p>
+            <a:pPr lvl="0"/>
+            <a:r>
+              <a:rPr/>
+              <a:t>Still assumes a normal distribution</a:t>
+            </a:r>
+          </a:p>
+        </p:txBody>
+      </p:sp>
+    </p:spTree>
+  </p:cSld>
+</p:sld>
+</file>
+
+<file path=ppt/slides/slide34.xml><?xml version="1.0" encoding="utf-8"?>
+<p:sld xmlns:a="http://schemas.openxmlformats.org/drawingml/2006/main" xmlns:r="http://schemas.openxmlformats.org/officeDocument/2006/relationships" xmlns:p="http://schemas.openxmlformats.org/presentationml/2006/main">
+  <p:cSld>
+    <p:spTree>
+      <p:nvGrpSpPr>
+        <p:cNvPr id="1" name=""/>
+        <p:cNvGrpSpPr/>
+        <p:nvPr/>
+      </p:nvGrpSpPr>
+      <p:grpSpPr>
+        <a:xfrm>
+          <a:off x="0" y="0"/>
+          <a:ext cx="0" cy="0"/>
+          <a:chOff x="0" y="0"/>
+          <a:chExt cx="0" cy="0"/>
+        </a:xfrm>
+      </p:grpSpPr>
+      <p:sp>
+        <p:nvSpPr>
+          <p:cNvPr id="2" name="Title 1"/>
+          <p:cNvSpPr>
+            <a:spLocks noGrp="1"/>
+          </p:cNvSpPr>
+          <p:nvPr>
+            <p:ph type="title"/>
+          </p:nvPr>
+        </p:nvSpPr>
+        <p:spPr>
+          <a:xfrm>
+            <a:off x="0" y="0"/>
+            <a:ext cx="9144000" cy="602780"/>
+          </a:xfrm>
+          <a:solidFill>
+            <a:srgbClr val="70121D"/>
+          </a:solidFill>
+        </p:spPr>
+        <p:txBody>
+          <a:bodyPr/>
+          <a:lstStyle/>
+          <a:p>
+            <a:pPr lvl="0" indent="0" marL="0">
+              <a:buNone/>
+            </a:pPr>
+            <a:r>
+              <a:rPr/>
+              <a:t>Summary — Non-Parametric Options</a:t>
+            </a:r>
+          </a:p>
+        </p:txBody>
+      </p:sp>
+      <p:sp>
+        <p:nvSpPr>
+          <p:cNvPr id="3" name="Content Placeholder 2"/>
+          <p:cNvSpPr>
+            <a:spLocks noGrp="1"/>
+          </p:cNvSpPr>
+          <p:nvPr>
+            <p:ph idx="1" sz="half"/>
+          </p:nvPr>
+        </p:nvSpPr>
+        <p:spPr/>
+        <p:txBody>
+          <a:bodyPr/>
+          <a:lstStyle/>
+          <a:p>
+            <a:pPr lvl="0" indent="0" marL="0">
+              <a:buNone/>
+            </a:pPr>
+            <a:r>
+              <a:rPr b="1"/>
+              <a:t>3. Mann-Whitney-Wilcoxon test</a:t>
+            </a:r>
+          </a:p>
+          <a:p>
+            <a:pPr lvl="0" indent="0" marL="0">
+              <a:buNone/>
+            </a:pPr>
+            <a:r>
+              <a:rPr/>
+              <a:t>Strengths:</a:t>
+            </a:r>
+          </a:p>
+          <a:p>
+            <a:pPr lvl="0"/>
+            <a:r>
+              <a:rPr/>
+              <a:t>Non-parametric: doesn’t assume normal distribution</a:t>
+            </a:r>
+          </a:p>
+          <a:p>
+            <a:pPr lvl="0"/>
+            <a:r>
+              <a:rPr/>
+              <a:t>Robust against outliers</a:t>
+            </a:r>
+          </a:p>
+          <a:p>
+            <a:pPr lvl="0"/>
+            <a:r>
+              <a:rPr/>
+              <a:t>Works with ordinal data</a:t>
+            </a:r>
+          </a:p>
+          <a:p>
+            <a:pPr lvl="0" indent="0" marL="0">
+              <a:buNone/>
+            </a:pPr>
+            <a:r>
+              <a:rPr/>
+              <a:t>Weaknesses:</a:t>
+            </a:r>
+          </a:p>
+          <a:p>
+            <a:pPr lvl="0"/>
+            <a:r>
+              <a:rPr/>
+              <a:t>Less statistical power than parametric tests</a:t>
+            </a:r>
+          </a:p>
+          <a:p>
+            <a:pPr lvl="0"/>
+            <a:r>
+              <a:rPr/>
+              <a:t>Still assumes similar distributions and approximately equal variance</a:t>
+            </a:r>
+          </a:p>
+          <a:p>
+            <a:pPr lvl="0"/>
+            <a:r>
+              <a:rPr/>
+              <a:t>Tests median differences rather than mean differences</a:t>
+            </a:r>
+          </a:p>
+        </p:txBody>
+      </p:sp>
+      <p:sp>
+        <p:nvSpPr>
+          <p:cNvPr id="4" name="Content Placeholder 3"/>
+          <p:cNvSpPr>
+            <a:spLocks noGrp="1"/>
+          </p:cNvSpPr>
+          <p:nvPr>
+            <p:ph idx="2" sz="half"/>
+          </p:nvPr>
+        </p:nvSpPr>
+        <p:spPr/>
+        <p:txBody>
+          <a:bodyPr/>
+          <a:lstStyle/>
+          <a:p>
+            <a:pPr lvl="0" indent="0" marL="0">
+              <a:buNone/>
+            </a:pPr>
+            <a:r>
+              <a:rPr b="1"/>
+              <a:t>4. Permutation tests</a:t>
+            </a:r>
+          </a:p>
+          <a:p>
+            <a:pPr lvl="0" indent="0" marL="0">
+              <a:buNone/>
+            </a:pPr>
+            <a:r>
+              <a:rPr/>
+              <a:t>Strengths:</a:t>
+            </a:r>
+          </a:p>
+          <a:p>
+            <a:pPr lvl="0"/>
+            <a:r>
+              <a:rPr/>
+              <a:t>Distribution-free: doesn’t assume a specific distribution</a:t>
+            </a:r>
+          </a:p>
+          <a:p>
+            <a:pPr lvl="0"/>
+            <a:r>
+              <a:rPr/>
+              <a:t>Can be applied to many types of test statistics</a:t>
+            </a:r>
+          </a:p>
+          <a:p>
+            <a:pPr lvl="0"/>
+            <a:r>
+              <a:rPr/>
+              <a:t>Handles small sample sizes well</a:t>
+            </a:r>
+          </a:p>
+          <a:p>
+            <a:pPr lvl="0"/>
+            <a:r>
+              <a:rPr/>
+              <a:t>Directly estimates p-values through resampling</a:t>
+            </a:r>
+          </a:p>
+          <a:p>
+            <a:pPr lvl="0" indent="0" marL="0">
+              <a:buNone/>
+            </a:pPr>
+            <a:r>
+              <a:rPr/>
+              <a:t>Weaknesses:</a:t>
+            </a:r>
+          </a:p>
+          <a:p>
+            <a:pPr lvl="0"/>
+            <a:r>
+              <a:rPr/>
+              <a:t>Computationally intensive</a:t>
+            </a:r>
+          </a:p>
+          <a:p>
+            <a:pPr lvl="0"/>
+            <a:r>
+              <a:rPr/>
+              <a:t>Assumes exchangeability under the null hypothesis</a:t>
+            </a:r>
+          </a:p>
+          <a:p>
+            <a:pPr lvl="0"/>
+            <a:r>
+              <a:rPr/>
+              <a:t>Requires similar distributions and equal variance</a:t>
+            </a:r>
+          </a:p>
+        </p:txBody>
+      </p:sp>
+    </p:spTree>
+  </p:cSld>
+</p:sld>
+</file>
+
+<file path=ppt/slides/slide35.xml><?xml version="1.0" encoding="utf-8"?>
+<p:sld xmlns:a="http://schemas.openxmlformats.org/drawingml/2006/main" xmlns:r="http://schemas.openxmlformats.org/officeDocument/2006/relationships" xmlns:p="http://schemas.openxmlformats.org/presentationml/2006/main">
+  <p:cSld>
+    <p:spTree>
+      <p:nvGrpSpPr>
+        <p:cNvPr id="1" name=""/>
+        <p:cNvGrpSpPr/>
+        <p:nvPr/>
+      </p:nvGrpSpPr>
+      <p:grpSpPr>
+        <a:xfrm>
+          <a:off x="0" y="0"/>
+          <a:ext cx="0" cy="0"/>
+          <a:chOff x="0" y="0"/>
+          <a:chExt cx="0" cy="0"/>
+        </a:xfrm>
+      </p:grpSpPr>
+      <p:sp>
+        <p:nvSpPr>
+          <p:cNvPr id="2" name="Title 1"/>
+          <p:cNvSpPr>
+            <a:spLocks noGrp="1"/>
+          </p:cNvSpPr>
+          <p:nvPr>
+            <p:ph type="title"/>
+          </p:nvPr>
+        </p:nvSpPr>
+        <p:spPr>
+          <a:xfrm>
+            <a:off x="0" y="0"/>
+            <a:ext cx="9144000" cy="602780"/>
+          </a:xfrm>
+          <a:solidFill>
+            <a:srgbClr val="70121D"/>
+          </a:solidFill>
+        </p:spPr>
+        <p:txBody>
+          <a:bodyPr/>
+          <a:lstStyle/>
+          <a:p>
+            <a:pPr lvl="0" indent="0" marL="0">
+              <a:buNone/>
+            </a:pPr>
+            <a:r>
+              <a:rPr/>
+              <a:t>Key Takeaway</a:t>
+            </a:r>
+          </a:p>
+        </p:txBody>
+      </p:sp>
+      <p:sp>
+        <p:nvSpPr>
+          <p:cNvPr id="3" name="Content Placeholder 2"/>
+          <p:cNvSpPr>
+            <a:spLocks noGrp="1"/>
+          </p:cNvSpPr>
+          <p:nvPr>
+            <p:ph idx="1" sz="half"/>
+          </p:nvPr>
+        </p:nvSpPr>
+        <p:spPr/>
+        <p:txBody>
+          <a:bodyPr/>
+          <a:lstStyle/>
+          <a:p>
+            <a:pPr lvl="0" indent="0" marL="0">
+              <a:buNone/>
+            </a:pPr>
+            <a:r>
+              <a:rPr/>
+              <a:t>Statistical tests have different strengths and assumptions. The choice should be guided by your data’s characteristics, not just convenience.</a:t>
+            </a:r>
+          </a:p>
+          <a:p>
+            <a:pPr lvl="0" indent="0" marL="0">
+              <a:buNone/>
+            </a:pPr>
+            <a:r>
+              <a:rPr b="1"/>
+              <a:t>Always visualize your data before deciding on the appropriate test.</a:t>
+            </a:r>
+          </a:p>
+        </p:txBody>
+      </p:sp>
+      <p:sp>
+        <p:nvSpPr>
+          <p:cNvPr id="4" name="Content Placeholder 3"/>
+          <p:cNvSpPr>
+            <a:spLocks noGrp="1"/>
+          </p:cNvSpPr>
+          <p:nvPr>
+            <p:ph idx="2" sz="half"/>
+          </p:nvPr>
+        </p:nvSpPr>
+        <p:spPr/>
+        <p:txBody>
+          <a:bodyPr/>
+          <a:lstStyle/>
+          <a:p>
+            <a:pPr lvl="0" indent="0" marL="1270000">
+              <a:buNone/>
+            </a:pPr>
+            <a:r>
+              <a:rPr sz="2000" b="1"/>
+              <a:t>Note</a:t>
+            </a:r>
+          </a:p>
+          <a:p>
+            <a:pPr lvl="0" indent="0" marL="1270000">
+              <a:buNone/>
+            </a:pPr>
+            <a:r>
+              <a:rPr sz="2000" b="1"/>
+              <a:t>✅ Key idea</a:t>
+            </a:r>
+          </a:p>
+          <a:p>
+            <a:pPr lvl="0" indent="0" marL="1270000">
+              <a:buNone/>
+            </a:pPr>
+            <a:r>
+              <a:rPr sz="2000"/>
+              <a:t>Standard t-test → Welch’s → Mann-Whitney/Permutation isn’t a strict ladder of “better” tests — each answers a slightly different question (means vs. medians) under different assumptions. Pick based on what your data actually looks like.</a:t>
+            </a:r>
+          </a:p>
+        </p:txBody>
+      </p:sp>
+    </p:spTree>
+  </p:cSld>
+</p:sld>
+</file>
+
 <file path=ppt/slides/slide4.xml><?xml version="1.0" encoding="utf-8"?>
 <p:sld xmlns:a="http://schemas.openxmlformats.org/drawingml/2006/main" xmlns:r="http://schemas.openxmlformats.org/officeDocument/2006/relationships" xmlns:p="http://schemas.openxmlformats.org/presentationml/2006/main">
   <p:cSld>
@@ -6455,7 +8027,7 @@
             </a:pPr>
             <a:r>
               <a:rPr/>
-              <a:t>Setting Up Our Analysis</a:t>
+              <a:t>Part 1 · Setting Up Our Analysis</a:t>
             </a:r>
           </a:p>
         </p:txBody>
@@ -6495,8 +8067,11 @@
         <p:spPr>
           <a:xfrm>
             <a:off x="0" y="0"/>
-            <a:ext cx="9144000" cy="582780"/>
+            <a:ext cx="9144000" cy="602780"/>
           </a:xfrm>
+          <a:solidFill>
+            <a:srgbClr val="70121D"/>
+          </a:solidFill>
         </p:spPr>
         <p:txBody>
           <a:bodyPr/>
@@ -6507,7 +8082,7 @@
             </a:pPr>
             <a:r>
               <a:rPr/>
-              <a:t>Loading Lake Trout Data</a:t>
+              <a:t>Setting Up Our Analysis</a:t>
             </a:r>
           </a:p>
         </p:txBody>
@@ -6519,13 +8094,171 @@
             <a:spLocks noGrp="1"/>
           </p:cNvSpPr>
           <p:nvPr>
-            <p:ph idx="1"/>
+            <p:ph idx="1" sz="half"/>
           </p:nvPr>
         </p:nvSpPr>
         <p:spPr/>
         <p:txBody>
           <a:bodyPr/>
           <a:lstStyle/>
+          <a:p>
+            <a:pPr lvl="0" indent="0">
+              <a:buNone/>
+            </a:pPr>
+            <a:r>
+              <a:rPr>
+                <a:solidFill>
+                  <a:srgbClr val="5E5E5E"/>
+                </a:solidFill>
+                <a:latin typeface="Courier"/>
+              </a:rPr>
+              <a:t># Load libraries</a:t>
+            </a:r>
+            <a:br/>
+            <a:r>
+              <a:rPr>
+                <a:solidFill>
+                  <a:srgbClr val="4758AB"/>
+                </a:solidFill>
+                <a:latin typeface="Courier"/>
+              </a:rPr>
+              <a:t>library</a:t>
+            </a:r>
+            <a:r>
+              <a:rPr>
+                <a:solidFill>
+                  <a:srgbClr val="003B4F"/>
+                </a:solidFill>
+                <a:latin typeface="Courier"/>
+              </a:rPr>
+              <a:t>(car)          </a:t>
+            </a:r>
+            <a:r>
+              <a:rPr>
+                <a:solidFill>
+                  <a:srgbClr val="5E5E5E"/>
+                </a:solidFill>
+                <a:latin typeface="Courier"/>
+              </a:rPr>
+              <a:t># For diagnostic tests</a:t>
+            </a:r>
+            <a:br/>
+            <a:r>
+              <a:rPr>
+                <a:solidFill>
+                  <a:srgbClr val="4758AB"/>
+                </a:solidFill>
+                <a:latin typeface="Courier"/>
+              </a:rPr>
+              <a:t>library</a:t>
+            </a:r>
+            <a:r>
+              <a:rPr>
+                <a:solidFill>
+                  <a:srgbClr val="003B4F"/>
+                </a:solidFill>
+                <a:latin typeface="Courier"/>
+              </a:rPr>
+              <a:t>(patchwork)</a:t>
+            </a:r>
+            <a:br/>
+            <a:r>
+              <a:rPr>
+                <a:solidFill>
+                  <a:srgbClr val="4758AB"/>
+                </a:solidFill>
+                <a:latin typeface="Courier"/>
+              </a:rPr>
+              <a:t>library</a:t>
+            </a:r>
+            <a:r>
+              <a:rPr>
+                <a:solidFill>
+                  <a:srgbClr val="003B4F"/>
+                </a:solidFill>
+                <a:latin typeface="Courier"/>
+              </a:rPr>
+              <a:t>(tidyverse)    </a:t>
+            </a:r>
+            <a:r>
+              <a:rPr>
+                <a:solidFill>
+                  <a:srgbClr val="5E5E5E"/>
+                </a:solidFill>
+                <a:latin typeface="Courier"/>
+              </a:rPr>
+              <a:t># For data manipulation and visualization</a:t>
+            </a:r>
+          </a:p>
+          <a:p>
+            <a:pPr lvl="0" indent="0">
+              <a:buNone/>
+            </a:pPr>
+            <a:r>
+              <a:rPr>
+                <a:solidFill>
+                  <a:srgbClr val="003B4F"/>
+                </a:solidFill>
+                <a:latin typeface="Courier"/>
+              </a:rPr>
+              <a:t>lt_df &lt;- </a:t>
+            </a:r>
+            <a:r>
+              <a:rPr>
+                <a:solidFill>
+                  <a:srgbClr val="4758AB"/>
+                </a:solidFill>
+                <a:latin typeface="Courier"/>
+              </a:rPr>
+              <a:t>read_csv</a:t>
+            </a:r>
+            <a:r>
+              <a:rPr>
+                <a:solidFill>
+                  <a:srgbClr val="003B4F"/>
+                </a:solidFill>
+                <a:latin typeface="Courier"/>
+              </a:rPr>
+              <a:t>(</a:t>
+            </a:r>
+            <a:r>
+              <a:rPr>
+                <a:solidFill>
+                  <a:srgbClr val="20794D"/>
+                </a:solidFill>
+                <a:latin typeface="Courier"/>
+              </a:rPr>
+              <a:t>"data/lake_trout.csv"</a:t>
+            </a:r>
+            <a:r>
+              <a:rPr>
+                <a:solidFill>
+                  <a:srgbClr val="003B4F"/>
+                </a:solidFill>
+                <a:latin typeface="Courier"/>
+              </a:rPr>
+              <a:t>)</a:t>
+            </a:r>
+            <a:br/>
+            <a:r>
+              <a:rPr>
+                <a:solidFill>
+                  <a:srgbClr val="4758AB"/>
+                </a:solidFill>
+                <a:latin typeface="Courier"/>
+              </a:rPr>
+              <a:t>head</a:t>
+            </a:r>
+            <a:r>
+              <a:rPr>
+                <a:solidFill>
+                  <a:srgbClr val="003B4F"/>
+                </a:solidFill>
+                <a:latin typeface="Courier"/>
+              </a:rPr>
+              <a:t>(lt_df)</a:t>
+            </a:r>
+          </a:p>
           <a:p>
             <a:pPr lvl="0" indent="0">
               <a:buNone/>
@@ -6545,24 +8278,97 @@
 6 I8            lake trout       607   2100 I8   </a:t>
             </a:r>
           </a:p>
-          <a:p>
-            <a:pPr lvl="0" indent="0">
-              <a:buNone/>
-            </a:pPr>
-            <a:r>
-              <a:rPr>
-                <a:latin typeface="Courier"/>
-              </a:rPr>
-              <a:t># A tibble: 6 × 2
-# Groups:   lake [6]
-  lake        mode_mass
-  &lt;chr&gt;           &lt;dbl&gt;
-1 I8               1000
-2 Island Lake      2200
-3 N 01             1000
-4 NE 12              90
-5 NE 14            1150
-6 Toolik            340</a:t>
+        </p:txBody>
+      </p:sp>
+      <p:sp>
+        <p:nvSpPr>
+          <p:cNvPr id="4" name="Content Placeholder 3"/>
+          <p:cNvSpPr>
+            <a:spLocks noGrp="1"/>
+          </p:cNvSpPr>
+          <p:nvPr>
+            <p:ph idx="2" sz="half"/>
+          </p:nvPr>
+        </p:nvSpPr>
+        <p:spPr/>
+        <p:txBody>
+          <a:bodyPr/>
+          <a:lstStyle/>
+          <a:p>
+            <a:pPr lvl="0" indent="0" marL="1270000">
+              <a:buNone/>
+            </a:pPr>
+            <a:r>
+              <a:rPr sz="2000" b="1"/>
+              <a:t>Tip</a:t>
+            </a:r>
+          </a:p>
+          <a:p>
+            <a:pPr lvl="0" indent="0" marL="1270000">
+              <a:buNone/>
+            </a:pPr>
+            <a:r>
+              <a:rPr sz="2000" b="1"/>
+              <a:t>🖐 Notice</a:t>
+            </a:r>
+          </a:p>
+          <a:p>
+            <a:pPr lvl="0" indent="0" marL="1270000">
+              <a:buNone/>
+            </a:pPr>
+            <a:r>
+              <a:rPr sz="2000"/>
+              <a:t>Six lakes’ worth of trout: </a:t>
+            </a:r>
+            <a:r>
+              <a:rPr sz="2000">
+                <a:latin typeface="Courier"/>
+              </a:rPr>
+              <a:t>sampling_site</a:t>
+            </a:r>
+            <a:r>
+              <a:rPr sz="2000"/>
+              <a:t>, </a:t>
+            </a:r>
+            <a:r>
+              <a:rPr sz="2000">
+                <a:latin typeface="Courier"/>
+              </a:rPr>
+              <a:t>species</a:t>
+            </a:r>
+            <a:r>
+              <a:rPr sz="2000"/>
+              <a:t>, </a:t>
+            </a:r>
+            <a:r>
+              <a:rPr sz="2000">
+                <a:latin typeface="Courier"/>
+              </a:rPr>
+              <a:t>length_mm</a:t>
+            </a:r>
+            <a:r>
+              <a:rPr sz="2000"/>
+              <a:t>, </a:t>
+            </a:r>
+            <a:r>
+              <a:rPr sz="2000">
+                <a:latin typeface="Courier"/>
+              </a:rPr>
+              <a:t>mass_g</a:t>
+            </a:r>
+            <a:r>
+              <a:rPr sz="2000"/>
+              <a:t>, </a:t>
+            </a:r>
+            <a:r>
+              <a:rPr sz="2000">
+                <a:latin typeface="Courier"/>
+              </a:rPr>
+              <a:t>lake</a:t>
+            </a:r>
+            <a:r>
+              <a:rPr sz="2000"/>
+              <a:t>.</a:t>
             </a:r>
           </a:p>
         </p:txBody>
@@ -6617,7 +8423,697 @@
             </a:pPr>
             <a:r>
               <a:rPr/>
-              <a:t>Parametric versus non-parametric tests</a:t>
+              <a:t>Calculating the Mode</a:t>
+            </a:r>
+          </a:p>
+        </p:txBody>
+      </p:sp>
+      <p:sp>
+        <p:nvSpPr>
+          <p:cNvPr id="3" name="Content Placeholder 2"/>
+          <p:cNvSpPr>
+            <a:spLocks noGrp="1"/>
+          </p:cNvSpPr>
+          <p:nvPr>
+            <p:ph idx="1" sz="half"/>
+          </p:nvPr>
+        </p:nvSpPr>
+        <p:spPr/>
+        <p:txBody>
+          <a:bodyPr/>
+          <a:lstStyle/>
+          <a:p>
+            <a:pPr lvl="0" indent="0">
+              <a:buNone/>
+            </a:pPr>
+            <a:r>
+              <a:rPr>
+                <a:solidFill>
+                  <a:srgbClr val="5E5E5E"/>
+                </a:solidFill>
+                <a:latin typeface="Courier"/>
+              </a:rPr>
+              <a:t># I had accidentally asked you to do mode in HW2 without</a:t>
+            </a:r>
+            <a:br/>
+            <a:r>
+              <a:rPr>
+                <a:solidFill>
+                  <a:srgbClr val="5E5E5E"/>
+                </a:solidFill>
+                <a:latin typeface="Courier"/>
+              </a:rPr>
+              <a:t># telling you how... here is one approach</a:t>
+            </a:r>
+            <a:br/>
+            <a:r>
+              <a:rPr>
+                <a:solidFill>
+                  <a:srgbClr val="003B4F"/>
+                </a:solidFill>
+                <a:latin typeface="Courier"/>
+              </a:rPr>
+              <a:t>lt_df </a:t>
+            </a:r>
+            <a:r>
+              <a:rPr>
+                <a:solidFill>
+                  <a:srgbClr val="5E5E5E"/>
+                </a:solidFill>
+                <a:latin typeface="Courier"/>
+              </a:rPr>
+              <a:t>%&gt;%</a:t>
+            </a:r>
+            <a:br/>
+            <a:r>
+              <a:rPr>
+                <a:solidFill>
+                  <a:srgbClr val="003B4F"/>
+                </a:solidFill>
+                <a:latin typeface="Courier"/>
+              </a:rPr>
+              <a:t>  </a:t>
+            </a:r>
+            <a:r>
+              <a:rPr>
+                <a:solidFill>
+                  <a:srgbClr val="4758AB"/>
+                </a:solidFill>
+                <a:latin typeface="Courier"/>
+              </a:rPr>
+              <a:t>filter</a:t>
+            </a:r>
+            <a:r>
+              <a:rPr>
+                <a:solidFill>
+                  <a:srgbClr val="003B4F"/>
+                </a:solidFill>
+                <a:latin typeface="Courier"/>
+              </a:rPr>
+              <a:t>(</a:t>
+            </a:r>
+            <a:r>
+              <a:rPr>
+                <a:solidFill>
+                  <a:srgbClr val="5E5E5E"/>
+                </a:solidFill>
+                <a:latin typeface="Courier"/>
+              </a:rPr>
+              <a:t>!</a:t>
+            </a:r>
+            <a:r>
+              <a:rPr>
+                <a:solidFill>
+                  <a:srgbClr val="4758AB"/>
+                </a:solidFill>
+                <a:latin typeface="Courier"/>
+              </a:rPr>
+              <a:t>is.na</a:t>
+            </a:r>
+            <a:r>
+              <a:rPr>
+                <a:solidFill>
+                  <a:srgbClr val="003B4F"/>
+                </a:solidFill>
+                <a:latin typeface="Courier"/>
+              </a:rPr>
+              <a:t>(mass_g)) </a:t>
+            </a:r>
+            <a:r>
+              <a:rPr>
+                <a:solidFill>
+                  <a:srgbClr val="5E5E5E"/>
+                </a:solidFill>
+                <a:latin typeface="Courier"/>
+              </a:rPr>
+              <a:t>%&gt;%</a:t>
+            </a:r>
+            <a:br/>
+            <a:r>
+              <a:rPr>
+                <a:solidFill>
+                  <a:srgbClr val="003B4F"/>
+                </a:solidFill>
+                <a:latin typeface="Courier"/>
+              </a:rPr>
+              <a:t>  </a:t>
+            </a:r>
+            <a:r>
+              <a:rPr>
+                <a:solidFill>
+                  <a:srgbClr val="4758AB"/>
+                </a:solidFill>
+                <a:latin typeface="Courier"/>
+              </a:rPr>
+              <a:t>group_by</a:t>
+            </a:r>
+            <a:r>
+              <a:rPr>
+                <a:solidFill>
+                  <a:srgbClr val="003B4F"/>
+                </a:solidFill>
+                <a:latin typeface="Courier"/>
+              </a:rPr>
+              <a:t>(lake, mass_g) </a:t>
+            </a:r>
+            <a:r>
+              <a:rPr>
+                <a:solidFill>
+                  <a:srgbClr val="5E5E5E"/>
+                </a:solidFill>
+                <a:latin typeface="Courier"/>
+              </a:rPr>
+              <a:t>%&gt;%</a:t>
+            </a:r>
+            <a:br/>
+            <a:r>
+              <a:rPr>
+                <a:solidFill>
+                  <a:srgbClr val="003B4F"/>
+                </a:solidFill>
+                <a:latin typeface="Courier"/>
+              </a:rPr>
+              <a:t>  </a:t>
+            </a:r>
+            <a:r>
+              <a:rPr>
+                <a:solidFill>
+                  <a:srgbClr val="4758AB"/>
+                </a:solidFill>
+                <a:latin typeface="Courier"/>
+              </a:rPr>
+              <a:t>summarise</a:t>
+            </a:r>
+            <a:r>
+              <a:rPr>
+                <a:solidFill>
+                  <a:srgbClr val="003B4F"/>
+                </a:solidFill>
+                <a:latin typeface="Courier"/>
+              </a:rPr>
+              <a:t>(</a:t>
+            </a:r>
+            <a:r>
+              <a:rPr>
+                <a:solidFill>
+                  <a:srgbClr val="657422"/>
+                </a:solidFill>
+                <a:latin typeface="Courier"/>
+              </a:rPr>
+              <a:t>count =</a:t>
+            </a:r>
+            <a:r>
+              <a:rPr>
+                <a:solidFill>
+                  <a:srgbClr val="003B4F"/>
+                </a:solidFill>
+                <a:latin typeface="Courier"/>
+              </a:rPr>
+              <a:t> </a:t>
+            </a:r>
+            <a:r>
+              <a:rPr>
+                <a:solidFill>
+                  <a:srgbClr val="4758AB"/>
+                </a:solidFill>
+                <a:latin typeface="Courier"/>
+              </a:rPr>
+              <a:t>n</a:t>
+            </a:r>
+            <a:r>
+              <a:rPr>
+                <a:solidFill>
+                  <a:srgbClr val="003B4F"/>
+                </a:solidFill>
+                <a:latin typeface="Courier"/>
+              </a:rPr>
+              <a:t>(), </a:t>
+            </a:r>
+            <a:r>
+              <a:rPr>
+                <a:solidFill>
+                  <a:srgbClr val="657422"/>
+                </a:solidFill>
+                <a:latin typeface="Courier"/>
+              </a:rPr>
+              <a:t>.groups =</a:t>
+            </a:r>
+            <a:r>
+              <a:rPr>
+                <a:solidFill>
+                  <a:srgbClr val="003B4F"/>
+                </a:solidFill>
+                <a:latin typeface="Courier"/>
+              </a:rPr>
+              <a:t> </a:t>
+            </a:r>
+            <a:r>
+              <a:rPr>
+                <a:solidFill>
+                  <a:srgbClr val="20794D"/>
+                </a:solidFill>
+                <a:latin typeface="Courier"/>
+              </a:rPr>
+              <a:t>"drop_last"</a:t>
+            </a:r>
+            <a:r>
+              <a:rPr>
+                <a:solidFill>
+                  <a:srgbClr val="003B4F"/>
+                </a:solidFill>
+                <a:latin typeface="Courier"/>
+              </a:rPr>
+              <a:t>) </a:t>
+            </a:r>
+            <a:r>
+              <a:rPr>
+                <a:solidFill>
+                  <a:srgbClr val="5E5E5E"/>
+                </a:solidFill>
+                <a:latin typeface="Courier"/>
+              </a:rPr>
+              <a:t>%&gt;%</a:t>
+            </a:r>
+            <a:br/>
+            <a:r>
+              <a:rPr>
+                <a:solidFill>
+                  <a:srgbClr val="003B4F"/>
+                </a:solidFill>
+                <a:latin typeface="Courier"/>
+              </a:rPr>
+              <a:t>  </a:t>
+            </a:r>
+            <a:r>
+              <a:rPr>
+                <a:solidFill>
+                  <a:srgbClr val="4758AB"/>
+                </a:solidFill>
+                <a:latin typeface="Courier"/>
+              </a:rPr>
+              <a:t>arrange</a:t>
+            </a:r>
+            <a:r>
+              <a:rPr>
+                <a:solidFill>
+                  <a:srgbClr val="003B4F"/>
+                </a:solidFill>
+                <a:latin typeface="Courier"/>
+              </a:rPr>
+              <a:t>(</a:t>
+            </a:r>
+            <a:r>
+              <a:rPr>
+                <a:solidFill>
+                  <a:srgbClr val="4758AB"/>
+                </a:solidFill>
+                <a:latin typeface="Courier"/>
+              </a:rPr>
+              <a:t>desc</a:t>
+            </a:r>
+            <a:r>
+              <a:rPr>
+                <a:solidFill>
+                  <a:srgbClr val="003B4F"/>
+                </a:solidFill>
+                <a:latin typeface="Courier"/>
+              </a:rPr>
+              <a:t>(count)) </a:t>
+            </a:r>
+            <a:r>
+              <a:rPr>
+                <a:solidFill>
+                  <a:srgbClr val="5E5E5E"/>
+                </a:solidFill>
+                <a:latin typeface="Courier"/>
+              </a:rPr>
+              <a:t>%&gt;%</a:t>
+            </a:r>
+            <a:br/>
+            <a:r>
+              <a:rPr>
+                <a:solidFill>
+                  <a:srgbClr val="003B4F"/>
+                </a:solidFill>
+                <a:latin typeface="Courier"/>
+              </a:rPr>
+              <a:t>  </a:t>
+            </a:r>
+            <a:r>
+              <a:rPr>
+                <a:solidFill>
+                  <a:srgbClr val="4758AB"/>
+                </a:solidFill>
+                <a:latin typeface="Courier"/>
+              </a:rPr>
+              <a:t>slice</a:t>
+            </a:r>
+            <a:r>
+              <a:rPr>
+                <a:solidFill>
+                  <a:srgbClr val="003B4F"/>
+                </a:solidFill>
+                <a:latin typeface="Courier"/>
+              </a:rPr>
+              <a:t>(</a:t>
+            </a:r>
+            <a:r>
+              <a:rPr>
+                <a:solidFill>
+                  <a:srgbClr val="AD0000"/>
+                </a:solidFill>
+                <a:latin typeface="Courier"/>
+              </a:rPr>
+              <a:t>1</a:t>
+            </a:r>
+            <a:r>
+              <a:rPr>
+                <a:solidFill>
+                  <a:srgbClr val="003B4F"/>
+                </a:solidFill>
+                <a:latin typeface="Courier"/>
+              </a:rPr>
+              <a:t>) </a:t>
+            </a:r>
+            <a:r>
+              <a:rPr>
+                <a:solidFill>
+                  <a:srgbClr val="5E5E5E"/>
+                </a:solidFill>
+                <a:latin typeface="Courier"/>
+              </a:rPr>
+              <a:t>%&gt;%</a:t>
+            </a:r>
+            <a:br/>
+            <a:r>
+              <a:rPr>
+                <a:solidFill>
+                  <a:srgbClr val="003B4F"/>
+                </a:solidFill>
+                <a:latin typeface="Courier"/>
+              </a:rPr>
+              <a:t>  </a:t>
+            </a:r>
+            <a:r>
+              <a:rPr>
+                <a:solidFill>
+                  <a:srgbClr val="4758AB"/>
+                </a:solidFill>
+                <a:latin typeface="Courier"/>
+              </a:rPr>
+              <a:t>select</a:t>
+            </a:r>
+            <a:r>
+              <a:rPr>
+                <a:solidFill>
+                  <a:srgbClr val="003B4F"/>
+                </a:solidFill>
+                <a:latin typeface="Courier"/>
+              </a:rPr>
+              <a:t>(</a:t>
+            </a:r>
+            <a:r>
+              <a:rPr>
+                <a:solidFill>
+                  <a:srgbClr val="5E5E5E"/>
+                </a:solidFill>
+                <a:latin typeface="Courier"/>
+              </a:rPr>
+              <a:t>-</a:t>
+            </a:r>
+            <a:r>
+              <a:rPr>
+                <a:solidFill>
+                  <a:srgbClr val="003B4F"/>
+                </a:solidFill>
+                <a:latin typeface="Courier"/>
+              </a:rPr>
+              <a:t>count) </a:t>
+            </a:r>
+            <a:r>
+              <a:rPr>
+                <a:solidFill>
+                  <a:srgbClr val="5E5E5E"/>
+                </a:solidFill>
+                <a:latin typeface="Courier"/>
+              </a:rPr>
+              <a:t>%&gt;%</a:t>
+            </a:r>
+            <a:br/>
+            <a:r>
+              <a:rPr>
+                <a:solidFill>
+                  <a:srgbClr val="003B4F"/>
+                </a:solidFill>
+                <a:latin typeface="Courier"/>
+              </a:rPr>
+              <a:t>  </a:t>
+            </a:r>
+            <a:r>
+              <a:rPr>
+                <a:solidFill>
+                  <a:srgbClr val="4758AB"/>
+                </a:solidFill>
+                <a:latin typeface="Courier"/>
+              </a:rPr>
+              <a:t>rename</a:t>
+            </a:r>
+            <a:r>
+              <a:rPr>
+                <a:solidFill>
+                  <a:srgbClr val="003B4F"/>
+                </a:solidFill>
+                <a:latin typeface="Courier"/>
+              </a:rPr>
+              <a:t>(</a:t>
+            </a:r>
+            <a:r>
+              <a:rPr>
+                <a:solidFill>
+                  <a:srgbClr val="657422"/>
+                </a:solidFill>
+                <a:latin typeface="Courier"/>
+              </a:rPr>
+              <a:t>mode_mass =</a:t>
+            </a:r>
+            <a:r>
+              <a:rPr>
+                <a:solidFill>
+                  <a:srgbClr val="003B4F"/>
+                </a:solidFill>
+                <a:latin typeface="Courier"/>
+              </a:rPr>
+              <a:t> mass_g)</a:t>
+            </a:r>
+          </a:p>
+          <a:p>
+            <a:pPr lvl="0" indent="0">
+              <a:buNone/>
+            </a:pPr>
+            <a:r>
+              <a:rPr>
+                <a:latin typeface="Courier"/>
+              </a:rPr>
+              <a:t># A tibble: 6 × 2
+# Groups:   lake [6]
+  lake        mode_mass
+  &lt;chr&gt;           &lt;dbl&gt;
+1 I8               1000
+2 Island Lake      2200
+3 N 01             1000
+4 NE 12              90
+5 NE 14            1150
+6 Toolik            340</a:t>
+            </a:r>
+          </a:p>
+        </p:txBody>
+      </p:sp>
+      <p:sp>
+        <p:nvSpPr>
+          <p:cNvPr id="4" name="Content Placeholder 3"/>
+          <p:cNvSpPr>
+            <a:spLocks noGrp="1"/>
+          </p:cNvSpPr>
+          <p:nvPr>
+            <p:ph idx="2" sz="half"/>
+          </p:nvPr>
+        </p:nvSpPr>
+        <p:spPr/>
+        <p:txBody>
+          <a:bodyPr/>
+          <a:lstStyle/>
+          <a:p>
+            <a:pPr lvl="0" indent="0" marL="1270000">
+              <a:buNone/>
+            </a:pPr>
+            <a:r>
+              <a:rPr sz="2000" b="1"/>
+              <a:t>Note</a:t>
+            </a:r>
+          </a:p>
+          <a:p>
+            <a:pPr lvl="0" indent="0" marL="1270000">
+              <a:buNone/>
+            </a:pPr>
+            <a:r>
+              <a:rPr sz="2000" b="1"/>
+              <a:t>📖 New pattern</a:t>
+            </a:r>
+          </a:p>
+          <a:p>
+            <a:pPr lvl="0" indent="0" marL="1270000">
+              <a:buNone/>
+            </a:pPr>
+            <a:r>
+              <a:rPr sz="2000"/>
+              <a:t>R has no built-in </a:t>
+            </a:r>
+            <a:r>
+              <a:rPr sz="2000">
+                <a:latin typeface="Courier"/>
+              </a:rPr>
+              <a:t>mode()</a:t>
+            </a:r>
+            <a:r>
+              <a:rPr sz="2000"/>
+              <a:t> function for statistical mode — this </a:t>
+            </a:r>
+            <a:r>
+              <a:rPr sz="2000">
+                <a:latin typeface="Courier"/>
+              </a:rPr>
+              <a:t>group_by()</a:t>
+            </a:r>
+            <a:r>
+              <a:rPr sz="2000"/>
+              <a:t> + </a:t>
+            </a:r>
+            <a:r>
+              <a:rPr sz="2000">
+                <a:latin typeface="Courier"/>
+              </a:rPr>
+              <a:t>count</a:t>
+            </a:r>
+            <a:r>
+              <a:rPr sz="2000"/>
+              <a:t> + </a:t>
+            </a:r>
+            <a:r>
+              <a:rPr sz="2000">
+                <a:latin typeface="Courier"/>
+              </a:rPr>
+              <a:t>slice(1)</a:t>
+            </a:r>
+            <a:r>
+              <a:rPr sz="2000"/>
+              <a:t> pattern is the standard workaround.</a:t>
+            </a:r>
+          </a:p>
+        </p:txBody>
+      </p:sp>
+    </p:spTree>
+  </p:cSld>
+</p:sld>
+</file>
+
+<file path=ppt/slides/slide7.xml><?xml version="1.0" encoding="utf-8"?>
+<p:sld xmlns:a="http://schemas.openxmlformats.org/drawingml/2006/main" xmlns:r="http://schemas.openxmlformats.org/officeDocument/2006/relationships" xmlns:p="http://schemas.openxmlformats.org/presentationml/2006/main">
+  <p:cSld>
+    <p:spTree>
+      <p:nvGrpSpPr>
+        <p:cNvPr id="1" name=""/>
+        <p:cNvGrpSpPr/>
+        <p:nvPr/>
+      </p:nvGrpSpPr>
+      <p:grpSpPr>
+        <a:xfrm>
+          <a:off x="0" y="0"/>
+          <a:ext cx="0" cy="0"/>
+          <a:chOff x="0" y="0"/>
+          <a:chExt cx="0" cy="0"/>
+        </a:xfrm>
+      </p:grpSpPr>
+      <p:sp>
+        <p:nvSpPr>
+          <p:cNvPr id="2" name="Title 1"/>
+          <p:cNvSpPr>
+            <a:spLocks noGrp="1"/>
+          </p:cNvSpPr>
+          <p:nvPr>
+            <p:ph type="title"/>
+          </p:nvPr>
+        </p:nvSpPr>
+        <p:spPr>
+          <a:xfrm>
+            <a:off x="0" y="0"/>
+            <a:ext cx="9144000" cy="582780"/>
+          </a:xfrm>
+        </p:spPr>
+        <p:txBody>
+          <a:bodyPr/>
+          <a:lstStyle/>
+          <a:p>
+            <a:pPr lvl="0" indent="0" marL="0">
+              <a:buNone/>
+            </a:pPr>
+            <a:r>
+              <a:rPr/>
+              <a:t>Part 2 · Assumptions of Parametric Tests</a:t>
+            </a:r>
+          </a:p>
+        </p:txBody>
+      </p:sp>
+    </p:spTree>
+  </p:cSld>
+</p:sld>
+</file>
+
+<file path=ppt/slides/slide8.xml><?xml version="1.0" encoding="utf-8"?>
+<p:sld xmlns:a="http://schemas.openxmlformats.org/drawingml/2006/main" xmlns:r="http://schemas.openxmlformats.org/officeDocument/2006/relationships" xmlns:p="http://schemas.openxmlformats.org/presentationml/2006/main">
+  <p:cSld>
+    <p:spTree>
+      <p:nvGrpSpPr>
+        <p:cNvPr id="1" name=""/>
+        <p:cNvGrpSpPr/>
+        <p:nvPr/>
+      </p:nvGrpSpPr>
+      <p:grpSpPr>
+        <a:xfrm>
+          <a:off x="0" y="0"/>
+          <a:ext cx="0" cy="0"/>
+          <a:chOff x="0" y="0"/>
+          <a:chExt cx="0" cy="0"/>
+        </a:xfrm>
+      </p:grpSpPr>
+      <p:sp>
+        <p:nvSpPr>
+          <p:cNvPr id="2" name="Title 1"/>
+          <p:cNvSpPr>
+            <a:spLocks noGrp="1"/>
+          </p:cNvSpPr>
+          <p:nvPr>
+            <p:ph type="title"/>
+          </p:nvPr>
+        </p:nvSpPr>
+        <p:spPr>
+          <a:xfrm>
+            <a:off x="0" y="0"/>
+            <a:ext cx="9144000" cy="602780"/>
+          </a:xfrm>
+          <a:solidFill>
+            <a:srgbClr val="70121D"/>
+          </a:solidFill>
+        </p:spPr>
+        <p:txBody>
+          <a:bodyPr/>
+          <a:lstStyle/>
+          <a:p>
+            <a:pPr lvl="0" indent="0" marL="0">
+              <a:buNone/>
+            </a:pPr>
+            <a:r>
+              <a:rPr/>
+              <a:t>Parametric vs. Non-Parametric Tests</a:t>
             </a:r>
           </a:p>
         </p:txBody>
@@ -6650,13 +9146,13 @@
             </a:r>
             <a:r>
               <a:rPr/>
-              <a:t> tests</a:t>
+              <a:t> tests.</a:t>
             </a:r>
           </a:p>
           <a:p>
             <a:pPr lvl="0"/>
             <a:r>
-              <a:rPr/>
+              <a:rPr b="1"/>
               <a:t>Parametric tests:</a:t>
             </a:r>
           </a:p>
@@ -6664,56 +9160,67 @@
             <a:pPr lvl="1"/>
             <a:r>
               <a:rPr/>
-              <a:t>specify/assume probability distribution from which parameters came</a:t>
+              <a:t>specify/assume the probability distribution the parameters came from</a:t>
             </a:r>
           </a:p>
           <a:p>
             <a:pPr lvl="1"/>
             <a:r>
               <a:rPr/>
-              <a:t>Basic assumptions of parametric t-tests:</a:t>
-            </a:r>
-          </a:p>
-          <a:p>
-            <a:pPr lvl="2"/>
-            <a:r>
-              <a:rPr/>
-              <a:t>Random sampling</a:t>
-            </a:r>
-          </a:p>
-          <a:p>
-            <a:pPr lvl="2"/>
-            <a:r>
-              <a:rPr/>
-              <a:t>Normality</a:t>
-            </a:r>
-          </a:p>
-          <a:p>
-            <a:pPr lvl="2"/>
-            <a:r>
-              <a:rPr/>
-              <a:t>Equal variance (or Welches T Test)</a:t>
-            </a:r>
-          </a:p>
-          <a:p>
-            <a:pPr lvl="2"/>
-            <a:r>
-              <a:rPr/>
-              <a:t>No outliers</a:t>
+              <a:t>basic assumptions of parametric t-tests: random sampling, normality, equal variance (or Welch’s t-test), no outliers</a:t>
             </a:r>
           </a:p>
           <a:p>
             <a:pPr lvl="0"/>
             <a:r>
-              <a:rPr/>
-              <a:t>Non-parametric tests: no assumption about probability distribution/normality</a:t>
+              <a:rPr b="1"/>
+              <a:t>Non-parametric tests:</a:t>
+            </a:r>
+            <a:r>
+              <a:rPr/>
+              <a:t> no assumption about the probability distribution/normality</a:t>
             </a:r>
           </a:p>
           <a:p>
             <a:pPr lvl="1"/>
             <a:r>
               <a:rPr/>
-              <a:t>Mukasa et al 2021 DOI: 10.4236/ojbm.2021.93081</a:t>
+              <a:t>Mukasa et al. 2021, DOI: 10.4236/ojbm.2021.93081</a:t>
+            </a:r>
+          </a:p>
+          <a:p>
+            <a:pPr lvl="0" indent="0" marL="1270000">
+              <a:buNone/>
+            </a:pPr>
+            <a:r>
+              <a:rPr sz="2000" b="1"/>
+              <a:t>Note</a:t>
+            </a:r>
+          </a:p>
+          <a:p>
+            <a:pPr lvl="0" indent="0" marL="1270000">
+              <a:buNone/>
+            </a:pPr>
+            <a:r>
+              <a:rPr sz="2000" b="1"/>
+              <a:t>📖 Reference</a:t>
+            </a:r>
+          </a:p>
+          <a:p>
+            <a:pPr lvl="0" indent="0" marL="1270000">
+              <a:buNone/>
+            </a:pPr>
+            <a:r>
+              <a:rPr sz="2000"/>
+              <a:t>Whitlock &amp; Schluter, </a:t>
+            </a:r>
+            <a:r>
+              <a:rPr sz="2000" i="1"/>
+              <a:t>Analysis of Biological Data</a:t>
+            </a:r>
+            <a:r>
+              <a:rPr sz="2000"/>
+              <a:t>, Ch. 13 — Handling Violations of Assumptions, is the core reference for this whole lecture.</a:t>
             </a:r>
           </a:p>
         </p:txBody>
@@ -6753,285 +9260,6 @@
 </p:sld>
 </file>
 
-<file path=ppt/slides/slide7.xml><?xml version="1.0" encoding="utf-8"?>
-<p:sld xmlns:a="http://schemas.openxmlformats.org/drawingml/2006/main" xmlns:r="http://schemas.openxmlformats.org/officeDocument/2006/relationships" xmlns:p="http://schemas.openxmlformats.org/presentationml/2006/main">
-  <p:cSld>
-    <p:spTree>
-      <p:nvGrpSpPr>
-        <p:cNvPr id="1" name=""/>
-        <p:cNvGrpSpPr/>
-        <p:nvPr/>
-      </p:nvGrpSpPr>
-      <p:grpSpPr>
-        <a:xfrm>
-          <a:off x="0" y="0"/>
-          <a:ext cx="0" cy="0"/>
-          <a:chOff x="0" y="0"/>
-          <a:chExt cx="0" cy="0"/>
-        </a:xfrm>
-      </p:grpSpPr>
-      <p:sp>
-        <p:nvSpPr>
-          <p:cNvPr id="2" name="Title 1"/>
-          <p:cNvSpPr>
-            <a:spLocks noGrp="1"/>
-          </p:cNvSpPr>
-          <p:nvPr>
-            <p:ph type="title"/>
-          </p:nvPr>
-        </p:nvSpPr>
-        <p:spPr>
-          <a:xfrm>
-            <a:off x="0" y="0"/>
-            <a:ext cx="9144000" cy="602780"/>
-          </a:xfrm>
-          <a:solidFill>
-            <a:srgbClr val="70121D"/>
-          </a:solidFill>
-        </p:spPr>
-        <p:txBody>
-          <a:bodyPr/>
-          <a:lstStyle/>
-          <a:p>
-            <a:pPr lvl="0" indent="0" marL="0">
-              <a:buNone/>
-            </a:pPr>
-            <a:r>
-              <a:rPr/>
-              <a:t>Assumptions of parametric tests - Overview</a:t>
-            </a:r>
-          </a:p>
-        </p:txBody>
-      </p:sp>
-      <p:sp>
-        <p:nvSpPr>
-          <p:cNvPr id="3" name="Content Placeholder 2"/>
-          <p:cNvSpPr>
-            <a:spLocks noGrp="1"/>
-          </p:cNvSpPr>
-          <p:nvPr>
-            <p:ph idx="1" sz="half"/>
-          </p:nvPr>
-        </p:nvSpPr>
-        <p:spPr/>
-        <p:txBody>
-          <a:bodyPr/>
-          <a:lstStyle/>
-          <a:p>
-            <a:pPr lvl="0"/>
-            <a:r>
-              <a:rPr/>
-              <a:t>If assumptions of parametric test violated, test becomes unreliable</a:t>
-            </a:r>
-          </a:p>
-          <a:p>
-            <a:pPr lvl="0"/>
-            <a:r>
-              <a:rPr/>
-              <a:t>This is because test statistic may no longer follow distribution</a:t>
-            </a:r>
-          </a:p>
-          <a:p>
-            <a:pPr lvl="0"/>
-            <a:r>
-              <a:rPr/>
-              <a:t>Most parametric tests robust to mild/moderate violations of normality assumptions</a:t>
-            </a:r>
-          </a:p>
-        </p:txBody>
-      </p:sp>
-      <p:pic>
-        <p:nvPicPr>
-          <p:cNvPr descr="images/clipboard-286482702.png" id="0" name="Picture 1"/>
-          <p:cNvPicPr>
-            <a:picLocks noGrp="1" noChangeAspect="1"/>
-          </p:cNvPicPr>
-          <p:nvPr/>
-        </p:nvPicPr>
-        <p:blipFill>
-          <a:blip r:embed="rId2"/>
-          <a:stretch>
-            <a:fillRect/>
-          </a:stretch>
-        </p:blipFill>
-        <p:spPr bwMode="auto">
-          <a:xfrm>
-            <a:off x="6121400" y="1498600"/>
-            <a:ext cx="2781300" cy="2781300"/>
-          </a:xfrm>
-          <a:prstGeom prst="rect">
-            <a:avLst/>
-          </a:prstGeom>
-          <a:noFill/>
-          <a:ln w="9525">
-            <a:noFill/>
-            <a:headEnd/>
-            <a:tailEnd/>
-          </a:ln>
-        </p:spPr>
-      </p:pic>
-    </p:spTree>
-  </p:cSld>
-</p:sld>
-</file>
-
-<file path=ppt/slides/slide8.xml><?xml version="1.0" encoding="utf-8"?>
-<p:sld xmlns:a="http://schemas.openxmlformats.org/drawingml/2006/main" xmlns:r="http://schemas.openxmlformats.org/officeDocument/2006/relationships" xmlns:p="http://schemas.openxmlformats.org/presentationml/2006/main">
-  <p:cSld>
-    <p:spTree>
-      <p:nvGrpSpPr>
-        <p:cNvPr id="1" name=""/>
-        <p:cNvGrpSpPr/>
-        <p:nvPr/>
-      </p:nvGrpSpPr>
-      <p:grpSpPr>
-        <a:xfrm>
-          <a:off x="0" y="0"/>
-          <a:ext cx="0" cy="0"/>
-          <a:chOff x="0" y="0"/>
-          <a:chExt cx="0" cy="0"/>
-        </a:xfrm>
-      </p:grpSpPr>
-      <p:sp>
-        <p:nvSpPr>
-          <p:cNvPr id="2" name="Title 1"/>
-          <p:cNvSpPr>
-            <a:spLocks noGrp="1"/>
-          </p:cNvSpPr>
-          <p:nvPr>
-            <p:ph type="title"/>
-          </p:nvPr>
-        </p:nvSpPr>
-        <p:spPr>
-          <a:xfrm>
-            <a:off x="0" y="0"/>
-            <a:ext cx="9144000" cy="602780"/>
-          </a:xfrm>
-          <a:solidFill>
-            <a:srgbClr val="70121D"/>
-          </a:solidFill>
-        </p:spPr>
-        <p:txBody>
-          <a:bodyPr/>
-          <a:lstStyle/>
-          <a:p>
-            <a:pPr lvl="0" indent="0" marL="0">
-              <a:buNone/>
-            </a:pPr>
-            <a:r>
-              <a:rPr/>
-              <a:t>Assumptions of parametric tests - Random Sampling</a:t>
-            </a:r>
-          </a:p>
-        </p:txBody>
-      </p:sp>
-      <p:sp>
-        <p:nvSpPr>
-          <p:cNvPr id="3" name="Content Placeholder 2"/>
-          <p:cNvSpPr>
-            <a:spLocks noGrp="1"/>
-          </p:cNvSpPr>
-          <p:nvPr>
-            <p:ph idx="1" sz="half"/>
-          </p:nvPr>
-        </p:nvSpPr>
-        <p:spPr/>
-        <p:txBody>
-          <a:bodyPr/>
-          <a:lstStyle/>
-          <a:p>
-            <a:pPr lvl="0"/>
-            <a:r>
-              <a:rPr/>
-              <a:t>Basic assumptions of parametric t-tests:</a:t>
-            </a:r>
-          </a:p>
-          <a:p>
-            <a:pPr lvl="1"/>
-            <a:r>
-              <a:rPr/>
-              <a:t>Random sampling</a:t>
-            </a:r>
-          </a:p>
-          <a:p>
-            <a:pPr lvl="1"/>
-            <a:r>
-              <a:rPr/>
-              <a:t>Normality</a:t>
-            </a:r>
-          </a:p>
-          <a:p>
-            <a:pPr lvl="1"/>
-            <a:r>
-              <a:rPr/>
-              <a:t>Equal variance</a:t>
-            </a:r>
-          </a:p>
-          <a:p>
-            <a:pPr lvl="1"/>
-            <a:r>
-              <a:rPr/>
-              <a:t>No outliers</a:t>
-            </a:r>
-          </a:p>
-          <a:p>
-            <a:pPr lvl="0"/>
-            <a:r>
-              <a:rPr/>
-              <a:t>Random sampling:</a:t>
-            </a:r>
-          </a:p>
-          <a:p>
-            <a:pPr lvl="1"/>
-            <a:r>
-              <a:rPr/>
-              <a:t>samples are randomly collected from populations; part of experimental design</a:t>
-            </a:r>
-          </a:p>
-          <a:p>
-            <a:pPr lvl="1"/>
-            <a:r>
-              <a:rPr/>
-              <a:t>Necessary for sample -&gt; population inference</a:t>
-            </a:r>
-          </a:p>
-        </p:txBody>
-      </p:sp>
-      <p:pic>
-        <p:nvPicPr>
-          <p:cNvPr descr="images/clipboard-2526616735.png" id="0" name="Picture 1"/>
-          <p:cNvPicPr>
-            <a:picLocks noGrp="1" noChangeAspect="1"/>
-          </p:cNvPicPr>
-          <p:nvPr/>
-        </p:nvPicPr>
-        <p:blipFill>
-          <a:blip r:embed="rId2"/>
-          <a:stretch>
-            <a:fillRect/>
-          </a:stretch>
-        </p:blipFill>
-        <p:spPr bwMode="auto">
-          <a:xfrm>
-            <a:off x="6121400" y="1117600"/>
-            <a:ext cx="2781300" cy="3568700"/>
-          </a:xfrm>
-          <a:prstGeom prst="rect">
-            <a:avLst/>
-          </a:prstGeom>
-          <a:noFill/>
-          <a:ln w="9525">
-            <a:noFill/>
-            <a:headEnd/>
-            <a:tailEnd/>
-          </a:ln>
-        </p:spPr>
-      </p:pic>
-    </p:spTree>
-  </p:cSld>
-</p:sld>
-</file>
-
 <file path=ppt/slides/slide9.xml><?xml version="1.0" encoding="utf-8"?>
 <p:sld xmlns:a="http://schemas.openxmlformats.org/drawingml/2006/main" xmlns:r="http://schemas.openxmlformats.org/officeDocument/2006/relationships" xmlns:p="http://schemas.openxmlformats.org/presentationml/2006/main">
   <p:cSld>
@@ -7077,7 +9305,7 @@
             </a:pPr>
             <a:r>
               <a:rPr/>
-              <a:t>Assumptions of parametric tests - Normality Testing</a:t>
+              <a:t>Assumptions of Parametric Tests — Overview</a:t>
             </a:r>
           </a:p>
         </p:txBody>
@@ -7097,117 +9325,31 @@
           <a:bodyPr/>
           <a:lstStyle/>
           <a:p>
-            <a:pPr lvl="0" indent="0" marL="0">
-              <a:buNone/>
-            </a:pPr>
-            <a:r>
-              <a:rPr/>
-              <a:t>Basic assumptions of parametric t-tests:</a:t>
-            </a:r>
-          </a:p>
-          <a:p>
             <a:pPr lvl="0"/>
             <a:r>
               <a:rPr/>
-              <a:t>Normality</a:t>
+              <a:t>If a parametric test’s assumptions are violated, the test becomes unreliable</a:t>
             </a:r>
           </a:p>
           <a:p>
             <a:pPr lvl="0"/>
             <a:r>
               <a:rPr/>
-              <a:t>equal variance</a:t>
+              <a:t>This is because the test statistic may no longer follow the distribution it’s supposed to</a:t>
             </a:r>
           </a:p>
           <a:p>
             <a:pPr lvl="0"/>
             <a:r>
               <a:rPr/>
-              <a:t>random sampling</a:t>
-            </a:r>
-          </a:p>
-          <a:p>
-            <a:pPr lvl="0"/>
-            <a:r>
-              <a:rPr/>
-              <a:t>no outliers</a:t>
-            </a:r>
-          </a:p>
-          <a:p>
-            <a:pPr lvl="0"/>
-            <a:r>
-              <a:rPr/>
-              <a:t>Lets do the above for one lake - </a:t>
-            </a:r>
-            <a:r>
-              <a:rPr b="1">
-                <a:latin typeface="Courier"/>
-              </a:rPr>
-              <a:t>NE 12</a:t>
-            </a:r>
-            <a:r>
-              <a:rPr/>
-              <a:t> as if we were going to do a one sample T Test</a:t>
-            </a:r>
-          </a:p>
-          <a:p>
-            <a:pPr lvl="1"/>
-            <a:r>
-              <a:rPr/>
-              <a:t>we need to make a new dataframe with NE 12 data only called </a:t>
-            </a:r>
-            <a:r>
-              <a:rPr>
-                <a:latin typeface="Courier"/>
-              </a:rPr>
-              <a:t>ne12_data</a:t>
-            </a:r>
-          </a:p>
-          <a:p>
-            <a:pPr lvl="1"/>
-            <a:r>
-              <a:rPr/>
-              <a:t>how do you do this?</a:t>
-            </a:r>
-          </a:p>
-          <a:p>
-            <a:pPr lvl="0"/>
-            <a:r>
-              <a:rPr/>
-              <a:t>Normality: Samples from normally distributed population</a:t>
-            </a:r>
-          </a:p>
-          <a:p>
-            <a:pPr lvl="1"/>
-            <a:r>
-              <a:rPr/>
-              <a:t>Graphical tests: histograms, dotplots, boxplots, </a:t>
-            </a:r>
-            <a:r>
-              <a:rPr b="1"/>
-              <a:t>qq-plots</a:t>
-            </a:r>
-          </a:p>
-          <a:p>
-            <a:pPr lvl="1"/>
-            <a:r>
-              <a:rPr/>
-              <a:t>“Formal” tests: </a:t>
-            </a:r>
-            <a:r>
-              <a:rPr b="1"/>
-              <a:t>Shapiro-Wilk test</a:t>
-            </a:r>
-            <a:r>
-              <a:rPr/>
-              <a:t> - sometimes not useful</a:t>
+              <a:t>Most parametric tests are robust to mild/moderate violations of normality</a:t>
             </a:r>
           </a:p>
         </p:txBody>
       </p:sp>
       <p:pic>
         <p:nvPicPr>
-          <p:cNvPr descr="nonparametric_t_tests_lecture_files/figure-pptx/l07-03-1.png" id="0" name="Picture 1"/>
+          <p:cNvPr descr="images/clipboard-286482702.png" id="0" name="Picture 1"/>
           <p:cNvPicPr>
             <a:picLocks noGrp="1" noChangeAspect="1"/>
           </p:cNvPicPr>

--- a/docs/content/nonparametric_t_tests/nonparametric_t_tests_lecture.pptx
+++ b/docs/content/nonparametric_t_tests/nonparametric_t_tests_lecture.pptx
@@ -3487,7 +3487,7 @@
         </p:blipFill>
         <p:spPr bwMode="auto">
           <a:xfrm>
-            <a:off x="6121400" y="1117600"/>
+            <a:off x="6121400" y="863600"/>
             <a:ext cx="2781300" cy="3568700"/>
           </a:xfrm>
           <a:prstGeom prst="rect">
@@ -3501,6 +3501,38 @@
           </a:ln>
         </p:spPr>
       </p:pic>
+      <p:sp>
+        <p:nvSpPr>
+          <p:cNvPr id="1" name="TextBox 3"/>
+          <p:cNvSpPr txBox="1"/>
+          <p:nvPr>
+            <p:ph idx="1"/>
+          </p:nvPr>
+        </p:nvSpPr>
+        <p:spPr>
+          <a:xfrm>
+            <a:off x="6121400" y="4622800"/>
+            <a:ext cx="2781300" cy="508000"/>
+          </a:xfrm>
+          <a:prstGeom prst="rect">
+            <a:avLst/>
+          </a:prstGeom>
+          <a:noFill/>
+        </p:spPr>
+        <p:txBody>
+          <a:bodyPr/>
+          <a:lstStyle/>
+          <a:p>
+            <a:pPr lvl="0" indent="0" marL="0" algn="ctr">
+              <a:buNone/>
+            </a:pPr>
+            <a:r>
+              <a:rPr/>
+              <a:t>Diagram of a large circle labeled ‘population’ full of dots, with orange arrows showing a subset being drawn down into a small circle labeled ‘sample’, illustrating random sampling from a population.</a:t>
+            </a:r>
+          </a:p>
+        </p:txBody>
+      </p:sp>
     </p:spTree>
   </p:cSld>
 </p:sld>
@@ -4627,7 +4659,7 @@
         </p:blipFill>
         <p:spPr bwMode="auto">
           <a:xfrm>
-            <a:off x="6121400" y="1041400"/>
+            <a:off x="6121400" y="787400"/>
             <a:ext cx="2781300" cy="3708400"/>
           </a:xfrm>
           <a:prstGeom prst="rect">
@@ -4641,6 +4673,65 @@
           </a:ln>
         </p:spPr>
       </p:pic>
+      <p:sp>
+        <p:nvSpPr>
+          <p:cNvPr id="1" name="TextBox 3"/>
+          <p:cNvSpPr txBox="1"/>
+          <p:nvPr>
+            <p:ph idx="1"/>
+          </p:nvPr>
+        </p:nvSpPr>
+        <p:spPr>
+          <a:xfrm>
+            <a:off x="6121400" y="4622800"/>
+            <a:ext cx="2781300" cy="508000"/>
+          </a:xfrm>
+          <a:prstGeom prst="rect">
+            <a:avLst/>
+          </a:prstGeom>
+          <a:noFill/>
+        </p:spPr>
+        <p:txBody>
+          <a:bodyPr/>
+          <a:lstStyle/>
+          <a:p>
+            <a:pPr lvl="0" indent="0" marL="0" algn="ctr">
+              <a:buNone/>
+            </a:pPr>
+            <a:r>
+              <a:rPr/>
+              <a:t>Reference chart of six common data transformations (square root, logarithm, inverse, and their ‘reflect and’ variants for left-skewed data), each shown as a small curve with its transformation formula, used to pick a transformation that matches a variable’s skew shape.</a:t>
+            </a:r>
+          </a:p>
+        </p:txBody>
+      </p:sp>
+      <p:sp>
+        <p:nvSpPr>
+          <p:cNvPr id="4" name="Content Placeholder 3"/>
+          <p:cNvSpPr>
+            <a:spLocks noGrp="1"/>
+          </p:cNvSpPr>
+          <p:nvPr>
+            <p:ph idx="2" sz="half"/>
+          </p:nvPr>
+        </p:nvSpPr>
+        <p:spPr/>
+        <p:txBody>
+          <a:bodyPr/>
+          <a:lstStyle/>
+          <a:p>
+            <a:pPr lvl="0" indent="0" marL="0">
+              <a:buNone/>
+            </a:pPr>
+            <a:r>
+              <a:rPr>
+                <a:hlinkClick r:id="rId3"/>
+              </a:rPr>
+              <a:t>source</a:t>
+            </a:r>
+          </a:p>
+        </p:txBody>
+      </p:sp>
     </p:spTree>
   </p:cSld>
 </p:sld>
@@ -4820,7 +4911,7 @@
         </p:blipFill>
         <p:spPr bwMode="auto">
           <a:xfrm>
-            <a:off x="6121400" y="1041400"/>
+            <a:off x="6121400" y="787400"/>
             <a:ext cx="2781300" cy="3708400"/>
           </a:xfrm>
           <a:prstGeom prst="rect">
@@ -4834,6 +4925,38 @@
           </a:ln>
         </p:spPr>
       </p:pic>
+      <p:sp>
+        <p:nvSpPr>
+          <p:cNvPr id="1" name="TextBox 3"/>
+          <p:cNvSpPr txBox="1"/>
+          <p:nvPr>
+            <p:ph idx="1"/>
+          </p:nvPr>
+        </p:nvSpPr>
+        <p:spPr>
+          <a:xfrm>
+            <a:off x="6121400" y="4622800"/>
+            <a:ext cx="2781300" cy="508000"/>
+          </a:xfrm>
+          <a:prstGeom prst="rect">
+            <a:avLst/>
+          </a:prstGeom>
+          <a:noFill/>
+        </p:spPr>
+        <p:txBody>
+          <a:bodyPr/>
+          <a:lstStyle/>
+          <a:p>
+            <a:pPr lvl="0" indent="0" marL="0" algn="ctr">
+              <a:buNone/>
+            </a:pPr>
+            <a:r>
+              <a:rPr/>
+              <a:t>Photo comparing needle length and bundle count across six pine species (Pinus ponderosa, nigra, resinosa, strobus, sylvestris, banksiana).</a:t>
+            </a:r>
+          </a:p>
+        </p:txBody>
+      </p:sp>
     </p:spTree>
   </p:cSld>
 </p:sld>
@@ -6977,7 +7100,7 @@
         </p:blipFill>
         <p:spPr bwMode="auto">
           <a:xfrm>
-            <a:off x="4749800" y="2209800"/>
+            <a:off x="4749800" y="1955800"/>
             <a:ext cx="4038600" cy="1447800"/>
           </a:xfrm>
           <a:prstGeom prst="rect">
@@ -6991,6 +7114,38 @@
           </a:ln>
         </p:spPr>
       </p:pic>
+      <p:sp>
+        <p:nvSpPr>
+          <p:cNvPr id="1" name="TextBox 3"/>
+          <p:cNvSpPr txBox="1"/>
+          <p:nvPr>
+            <p:ph idx="1"/>
+          </p:nvPr>
+        </p:nvSpPr>
+        <p:spPr>
+          <a:xfrm>
+            <a:off x="4749800" y="4064000"/>
+            <a:ext cx="4038600" cy="508000"/>
+          </a:xfrm>
+          <a:prstGeom prst="rect">
+            <a:avLst/>
+          </a:prstGeom>
+          <a:noFill/>
+        </p:spPr>
+        <p:txBody>
+          <a:bodyPr/>
+          <a:lstStyle/>
+          <a:p>
+            <a:pPr lvl="0" indent="0" marL="0" algn="ctr">
+              <a:buNone/>
+            </a:pPr>
+            <a:r>
+              <a:rPr/>
+              <a:t>Illustration of a lake trout in profile, showing its mottled brown-and-cream coloring and forked tail, the species whose weight and length data are used throughout this lecture.</a:t>
+            </a:r>
+          </a:p>
+        </p:txBody>
+      </p:sp>
     </p:spTree>
   </p:cSld>
 </p:sld>
@@ -9241,7 +9396,7 @@
         </p:blipFill>
         <p:spPr bwMode="auto">
           <a:xfrm>
-            <a:off x="6121400" y="1981200"/>
+            <a:off x="6121400" y="1727200"/>
             <a:ext cx="2781300" cy="1816100"/>
           </a:xfrm>
           <a:prstGeom prst="rect">
@@ -9255,6 +9410,38 @@
           </a:ln>
         </p:spPr>
       </p:pic>
+      <p:sp>
+        <p:nvSpPr>
+          <p:cNvPr id="1" name="TextBox 3"/>
+          <p:cNvSpPr txBox="1"/>
+          <p:nvPr>
+            <p:ph idx="1"/>
+          </p:nvPr>
+        </p:nvSpPr>
+        <p:spPr>
+          <a:xfrm>
+            <a:off x="6121400" y="4622800"/>
+            <a:ext cx="2781300" cy="508000"/>
+          </a:xfrm>
+          <a:prstGeom prst="rect">
+            <a:avLst/>
+          </a:prstGeom>
+          <a:noFill/>
+        </p:spPr>
+        <p:txBody>
+          <a:bodyPr/>
+          <a:lstStyle/>
+          <a:p>
+            <a:pPr lvl="0" indent="0" marL="0" algn="ctr">
+              <a:buNone/>
+            </a:pPr>
+            <a:r>
+              <a:rPr/>
+              <a:t>Flowchart of hypothesis tests branching into parametric and nonparametric tests, each split into one-sample and two-sample (independent vs. paired) tests, listing specific tests under each branch (e.g., t test and z test under parametric one-sample; Mann-Whitney and Wilcoxon under nonparametric two-sample).</a:t>
+            </a:r>
+          </a:p>
+        </p:txBody>
+      </p:sp>
     </p:spTree>
   </p:cSld>
 </p:sld>
@@ -9363,7 +9550,7 @@
         </p:blipFill>
         <p:spPr bwMode="auto">
           <a:xfrm>
-            <a:off x="6121400" y="1498600"/>
+            <a:off x="6121400" y="1244600"/>
             <a:ext cx="2781300" cy="2781300"/>
           </a:xfrm>
           <a:prstGeom prst="rect">
@@ -9377,6 +9564,38 @@
           </a:ln>
         </p:spPr>
       </p:pic>
+      <p:sp>
+        <p:nvSpPr>
+          <p:cNvPr id="1" name="TextBox 3"/>
+          <p:cNvSpPr txBox="1"/>
+          <p:nvPr>
+            <p:ph idx="1"/>
+          </p:nvPr>
+        </p:nvSpPr>
+        <p:spPr>
+          <a:xfrm>
+            <a:off x="6121400" y="4622800"/>
+            <a:ext cx="2781300" cy="508000"/>
+          </a:xfrm>
+          <a:prstGeom prst="rect">
+            <a:avLst/>
+          </a:prstGeom>
+          <a:noFill/>
+        </p:spPr>
+        <p:txBody>
+          <a:bodyPr/>
+          <a:lstStyle/>
+          <a:p>
+            <a:pPr lvl="0" indent="0" marL="0" algn="ctr">
+              <a:buNone/>
+            </a:pPr>
+            <a:r>
+              <a:rPr/>
+              <a:t>Three probability density curves for a right-skewed distribution family at different sigma values (0.25, 0.5, 1) with mu = 0, showing how larger sigma produces a flatter, more spread-out, and less peaked skewed curve.</a:t>
+            </a:r>
+          </a:p>
+        </p:txBody>
+      </p:sp>
     </p:spTree>
   </p:cSld>
 </p:sld>
